--- a/projects/spanisch/kl07/sequenz-01-empezamos/01a-rally-begruessung/PPT-01a.pptx
+++ b/projects/spanisch/kl07/sequenz-01-empezamos/01a-rally-begruessung/PPT-01a.pptx
@@ -13,6 +13,13 @@
     <p:sldId id="261" r:id="rId12"/>
     <p:sldId id="262" r:id="rId13"/>
     <p:sldId id="263" r:id="rId14"/>
+    <p:sldId id="264" r:id="rId15"/>
+    <p:sldId id="265" r:id="rId16"/>
+    <p:sldId id="266" r:id="rId17"/>
+    <p:sldId id="267" r:id="rId18"/>
+    <p:sldId id="268" r:id="rId19"/>
+    <p:sldId id="269" r:id="rId20"/>
+    <p:sldId id="270" r:id="rId21"/>
   </p:sldIdLst>
   <p:sldSz cx="12191695" cy="6858000" type="screen4x3"/>
   <p:notesSz cx="6858000" cy="9144000"/>
@@ -3326,6 +3333,3527 @@
 </p:sld>
 </file>
 
+<file path=ppt/slides/slide10.xml><?xml version="1.0" encoding="utf-8"?>
+<p:sld xmlns:a="http://schemas.openxmlformats.org/drawingml/2006/main" xmlns:p="http://schemas.openxmlformats.org/presentationml/2006/main" xmlns:r="http://schemas.openxmlformats.org/officeDocument/2006/relationships">
+  <p:cSld>
+    <p:spTree>
+      <p:nvGrpSpPr>
+        <p:cNvPr id="1" name=""/>
+        <p:cNvGrpSpPr/>
+        <p:nvPr/>
+      </p:nvGrpSpPr>
+      <p:grpSpPr/>
+      <p:sp>
+        <p:nvSpPr>
+          <p:cNvPr id="2" name="Rectangle 1"/>
+          <p:cNvSpPr/>
+          <p:nvPr/>
+        </p:nvSpPr>
+        <p:spPr>
+          <a:xfrm>
+            <a:off x="0" y="0"/>
+            <a:ext cx="12191695" cy="457200"/>
+          </a:xfrm>
+          <a:prstGeom prst="rect">
+            <a:avLst/>
+          </a:prstGeom>
+          <a:solidFill>
+            <a:srgbClr val="C41E3A"/>
+          </a:solidFill>
+          <a:ln>
+            <a:noFill/>
+          </a:ln>
+        </p:spPr>
+        <p:style>
+          <a:lnRef idx="1">
+            <a:schemeClr val="accent1"/>
+          </a:lnRef>
+          <a:fillRef idx="3">
+            <a:schemeClr val="accent1"/>
+          </a:fillRef>
+          <a:effectRef idx="2">
+            <a:schemeClr val="accent1"/>
+          </a:effectRef>
+          <a:fontRef idx="minor">
+            <a:schemeClr val="lt1"/>
+          </a:fontRef>
+        </p:style>
+        <p:txBody>
+          <a:bodyPr rtlCol="0" anchor="ctr"/>
+          <a:lstStyle/>
+          <a:p>
+            <a:pPr algn="ctr"/>
+          </a:p>
+        </p:txBody>
+      </p:sp>
+      <p:sp>
+        <p:nvSpPr>
+          <p:cNvPr id="3" name="TextBox 2"/>
+          <p:cNvSpPr txBox="1"/>
+          <p:nvPr/>
+        </p:nvSpPr>
+        <p:spPr>
+          <a:xfrm>
+            <a:off x="274320" y="91440"/>
+            <a:ext cx="3657600" cy="274320"/>
+          </a:xfrm>
+          <a:prstGeom prst="rect">
+            <a:avLst/>
+          </a:prstGeom>
+          <a:noFill/>
+        </p:spPr>
+        <p:txBody>
+          <a:bodyPr wrap="none">
+            <a:spAutoFit/>
+          </a:bodyPr>
+          <a:lstStyle/>
+          <a:p>
+            <a:pPr algn="l">
+              <a:defRPr sz="1400" b="1">
+                <a:solidFill>
+                  <a:srgbClr val="FFFFFF"/>
+                </a:solidFill>
+                <a:latin typeface="Arial"/>
+              </a:defRPr>
+            </a:pPr>
+            <a:r>
+              <a:t>Spanisch Klasse 7 · LP-01a</a:t>
+            </a:r>
+          </a:p>
+        </p:txBody>
+      </p:sp>
+      <p:sp>
+        <p:nvSpPr>
+          <p:cNvPr id="4" name="Rectangle 3"/>
+          <p:cNvSpPr/>
+          <p:nvPr/>
+        </p:nvSpPr>
+        <p:spPr>
+          <a:xfrm>
+            <a:off x="0" y="6583680"/>
+            <a:ext cx="12191695" cy="274320"/>
+          </a:xfrm>
+          <a:prstGeom prst="rect">
+            <a:avLst/>
+          </a:prstGeom>
+          <a:solidFill>
+            <a:srgbClr val="F5F5F5"/>
+          </a:solidFill>
+          <a:ln>
+            <a:noFill/>
+          </a:ln>
+        </p:spPr>
+        <p:style>
+          <a:lnRef idx="1">
+            <a:schemeClr val="accent1"/>
+          </a:lnRef>
+          <a:fillRef idx="3">
+            <a:schemeClr val="accent1"/>
+          </a:fillRef>
+          <a:effectRef idx="2">
+            <a:schemeClr val="accent1"/>
+          </a:effectRef>
+          <a:fontRef idx="minor">
+            <a:schemeClr val="lt1"/>
+          </a:fontRef>
+        </p:style>
+        <p:txBody>
+          <a:bodyPr rtlCol="0" anchor="ctr"/>
+          <a:lstStyle/>
+          <a:p>
+            <a:pPr algn="ctr"/>
+          </a:p>
+        </p:txBody>
+      </p:sp>
+      <p:sp>
+        <p:nvSpPr>
+          <p:cNvPr id="5" name="TextBox 4"/>
+          <p:cNvSpPr txBox="1"/>
+          <p:nvPr/>
+        </p:nvSpPr>
+        <p:spPr>
+          <a:xfrm>
+            <a:off x="274320" y="6601968"/>
+            <a:ext cx="4572000" cy="228600"/>
+          </a:xfrm>
+          <a:prstGeom prst="rect">
+            <a:avLst/>
+          </a:prstGeom>
+          <a:noFill/>
+        </p:spPr>
+        <p:txBody>
+          <a:bodyPr wrap="none">
+            <a:spAutoFit/>
+          </a:bodyPr>
+          <a:lstStyle/>
+          <a:p>
+            <a:pPr algn="l">
+              <a:defRPr sz="1000" b="0">
+                <a:solidFill>
+                  <a:srgbClr val="555555"/>
+                </a:solidFill>
+                <a:latin typeface="Arial"/>
+              </a:defRPr>
+            </a:pPr>
+            <a:r>
+              <a:t>¡Hola!</a:t>
+            </a:r>
+          </a:p>
+        </p:txBody>
+      </p:sp>
+      <p:sp>
+        <p:nvSpPr>
+          <p:cNvPr id="6" name="TextBox 5"/>
+          <p:cNvSpPr txBox="1"/>
+          <p:nvPr/>
+        </p:nvSpPr>
+        <p:spPr>
+          <a:xfrm>
+            <a:off x="9144000" y="6601968"/>
+            <a:ext cx="2743200" cy="228600"/>
+          </a:xfrm>
+          <a:prstGeom prst="rect">
+            <a:avLst/>
+          </a:prstGeom>
+          <a:noFill/>
+        </p:spPr>
+        <p:txBody>
+          <a:bodyPr wrap="none">
+            <a:spAutoFit/>
+          </a:bodyPr>
+          <a:lstStyle/>
+          <a:p>
+            <a:pPr algn="r">
+              <a:defRPr sz="1000" b="0">
+                <a:solidFill>
+                  <a:srgbClr val="555555"/>
+                </a:solidFill>
+                <a:latin typeface="Arial"/>
+              </a:defRPr>
+            </a:pPr>
+            <a:r>
+              <a:t>Sequenz 1</a:t>
+            </a:r>
+          </a:p>
+        </p:txBody>
+      </p:sp>
+      <p:sp>
+        <p:nvSpPr>
+          <p:cNvPr id="7" name="Rectangle 6"/>
+          <p:cNvSpPr/>
+          <p:nvPr/>
+        </p:nvSpPr>
+        <p:spPr>
+          <a:xfrm>
+            <a:off x="457200" y="640080"/>
+            <a:ext cx="1828800" cy="457200"/>
+          </a:xfrm>
+          <a:prstGeom prst="rect">
+            <a:avLst/>
+          </a:prstGeom>
+          <a:solidFill>
+            <a:srgbClr val="C41E3A"/>
+          </a:solidFill>
+          <a:ln>
+            <a:noFill/>
+          </a:ln>
+        </p:spPr>
+        <p:style>
+          <a:lnRef idx="1">
+            <a:schemeClr val="accent1"/>
+          </a:lnRef>
+          <a:fillRef idx="3">
+            <a:schemeClr val="accent1"/>
+          </a:fillRef>
+          <a:effectRef idx="2">
+            <a:schemeClr val="accent1"/>
+          </a:effectRef>
+          <a:fontRef idx="minor">
+            <a:schemeClr val="lt1"/>
+          </a:fontRef>
+        </p:style>
+        <p:txBody>
+          <a:bodyPr rtlCol="0" anchor="ctr"/>
+          <a:lstStyle/>
+          <a:p>
+            <a:pPr algn="ctr"/>
+          </a:p>
+        </p:txBody>
+      </p:sp>
+      <p:sp>
+        <p:nvSpPr>
+          <p:cNvPr id="8" name="TextBox 7"/>
+          <p:cNvSpPr txBox="1"/>
+          <p:nvPr/>
+        </p:nvSpPr>
+        <p:spPr>
+          <a:xfrm>
+            <a:off x="548640" y="713231"/>
+            <a:ext cx="1645920" cy="320040"/>
+          </a:xfrm>
+          <a:prstGeom prst="rect">
+            <a:avLst/>
+          </a:prstGeom>
+          <a:noFill/>
+        </p:spPr>
+        <p:txBody>
+          <a:bodyPr wrap="none">
+            <a:spAutoFit/>
+          </a:bodyPr>
+          <a:lstStyle/>
+          <a:p>
+            <a:pPr algn="ctr">
+              <a:defRPr sz="1400" b="1">
+                <a:solidFill>
+                  <a:srgbClr val="FFFFFF"/>
+                </a:solidFill>
+                <a:latin typeface="Arial"/>
+              </a:defRPr>
+            </a:pPr>
+            <a:r>
+              <a:t>ÜBUNG</a:t>
+            </a:r>
+          </a:p>
+        </p:txBody>
+      </p:sp>
+      <p:sp>
+        <p:nvSpPr>
+          <p:cNvPr id="9" name="TextBox 8"/>
+          <p:cNvSpPr txBox="1"/>
+          <p:nvPr/>
+        </p:nvSpPr>
+        <p:spPr>
+          <a:xfrm>
+            <a:off x="457200" y="1280160"/>
+            <a:ext cx="11274552" cy="731520"/>
+          </a:xfrm>
+          <a:prstGeom prst="rect">
+            <a:avLst/>
+          </a:prstGeom>
+          <a:noFill/>
+        </p:spPr>
+        <p:txBody>
+          <a:bodyPr wrap="none">
+            <a:spAutoFit/>
+          </a:bodyPr>
+          <a:lstStyle/>
+          <a:p>
+            <a:pPr algn="l">
+              <a:defRPr sz="3200" b="1">
+                <a:solidFill>
+                  <a:srgbClr val="C41E3A"/>
+                </a:solidFill>
+                <a:latin typeface="Arial"/>
+              </a:defRPr>
+            </a:pPr>
+            <a:r>
+              <a:t>✏️ Übung: Tageszeit zuordnen</a:t>
+            </a:r>
+          </a:p>
+        </p:txBody>
+      </p:sp>
+      <p:sp>
+        <p:nvSpPr>
+          <p:cNvPr id="10" name="TextBox 9"/>
+          <p:cNvSpPr txBox="1"/>
+          <p:nvPr/>
+        </p:nvSpPr>
+        <p:spPr>
+          <a:xfrm>
+            <a:off x="640080" y="2011680"/>
+            <a:ext cx="5029200" cy="548640"/>
+          </a:xfrm>
+          <a:prstGeom prst="rect">
+            <a:avLst/>
+          </a:prstGeom>
+          <a:noFill/>
+        </p:spPr>
+        <p:txBody>
+          <a:bodyPr wrap="none">
+            <a:spAutoFit/>
+          </a:bodyPr>
+          <a:lstStyle/>
+          <a:p>
+            <a:pPr algn="l">
+              <a:defRPr sz="2200" b="1">
+                <a:solidFill>
+                  <a:srgbClr val="C41E3A"/>
+                </a:solidFill>
+                <a:latin typeface="Arial"/>
+              </a:defRPr>
+            </a:pPr>
+            <a:r>
+              <a:t>8:00 Uhr →</a:t>
+            </a:r>
+          </a:p>
+        </p:txBody>
+      </p:sp>
+      <p:sp>
+        <p:nvSpPr>
+          <p:cNvPr id="11" name="TextBox 10"/>
+          <p:cNvSpPr txBox="1"/>
+          <p:nvPr/>
+        </p:nvSpPr>
+        <p:spPr>
+          <a:xfrm>
+            <a:off x="5943600" y="2011680"/>
+            <a:ext cx="5029200" cy="548640"/>
+          </a:xfrm>
+          <a:prstGeom prst="rect">
+            <a:avLst/>
+          </a:prstGeom>
+          <a:noFill/>
+        </p:spPr>
+        <p:txBody>
+          <a:bodyPr wrap="none">
+            <a:spAutoFit/>
+          </a:bodyPr>
+          <a:lstStyle/>
+          <a:p>
+            <a:pPr algn="l">
+              <a:defRPr sz="2200" b="0">
+                <a:solidFill>
+                  <a:srgbClr val="888888"/>
+                </a:solidFill>
+                <a:latin typeface="Arial"/>
+              </a:defRPr>
+            </a:pPr>
+            <a:r>
+              <a:t>___</a:t>
+            </a:r>
+          </a:p>
+        </p:txBody>
+      </p:sp>
+      <p:sp>
+        <p:nvSpPr>
+          <p:cNvPr id="12" name="TextBox 11"/>
+          <p:cNvSpPr txBox="1"/>
+          <p:nvPr/>
+        </p:nvSpPr>
+        <p:spPr>
+          <a:xfrm>
+            <a:off x="640080" y="2926080"/>
+            <a:ext cx="5029200" cy="548640"/>
+          </a:xfrm>
+          <a:prstGeom prst="rect">
+            <a:avLst/>
+          </a:prstGeom>
+          <a:noFill/>
+        </p:spPr>
+        <p:txBody>
+          <a:bodyPr wrap="none">
+            <a:spAutoFit/>
+          </a:bodyPr>
+          <a:lstStyle/>
+          <a:p>
+            <a:pPr algn="l">
+              <a:defRPr sz="2200" b="1">
+                <a:solidFill>
+                  <a:srgbClr val="C41E3A"/>
+                </a:solidFill>
+                <a:latin typeface="Arial"/>
+              </a:defRPr>
+            </a:pPr>
+            <a:r>
+              <a:t>15:00 Uhr →</a:t>
+            </a:r>
+          </a:p>
+        </p:txBody>
+      </p:sp>
+      <p:sp>
+        <p:nvSpPr>
+          <p:cNvPr id="13" name="TextBox 12"/>
+          <p:cNvSpPr txBox="1"/>
+          <p:nvPr/>
+        </p:nvSpPr>
+        <p:spPr>
+          <a:xfrm>
+            <a:off x="5943600" y="2926080"/>
+            <a:ext cx="5029200" cy="548640"/>
+          </a:xfrm>
+          <a:prstGeom prst="rect">
+            <a:avLst/>
+          </a:prstGeom>
+          <a:noFill/>
+        </p:spPr>
+        <p:txBody>
+          <a:bodyPr wrap="none">
+            <a:spAutoFit/>
+          </a:bodyPr>
+          <a:lstStyle/>
+          <a:p>
+            <a:pPr algn="l">
+              <a:defRPr sz="2200" b="0">
+                <a:solidFill>
+                  <a:srgbClr val="888888"/>
+                </a:solidFill>
+                <a:latin typeface="Arial"/>
+              </a:defRPr>
+            </a:pPr>
+            <a:r>
+              <a:t>___</a:t>
+            </a:r>
+          </a:p>
+        </p:txBody>
+      </p:sp>
+      <p:sp>
+        <p:nvSpPr>
+          <p:cNvPr id="14" name="TextBox 13"/>
+          <p:cNvSpPr txBox="1"/>
+          <p:nvPr/>
+        </p:nvSpPr>
+        <p:spPr>
+          <a:xfrm>
+            <a:off x="640080" y="3840480"/>
+            <a:ext cx="5029200" cy="548640"/>
+          </a:xfrm>
+          <a:prstGeom prst="rect">
+            <a:avLst/>
+          </a:prstGeom>
+          <a:noFill/>
+        </p:spPr>
+        <p:txBody>
+          <a:bodyPr wrap="none">
+            <a:spAutoFit/>
+          </a:bodyPr>
+          <a:lstStyle/>
+          <a:p>
+            <a:pPr algn="l">
+              <a:defRPr sz="2200" b="1">
+                <a:solidFill>
+                  <a:srgbClr val="C41E3A"/>
+                </a:solidFill>
+                <a:latin typeface="Arial"/>
+              </a:defRPr>
+            </a:pPr>
+            <a:r>
+              <a:t>21:00 Uhr →</a:t>
+            </a:r>
+          </a:p>
+        </p:txBody>
+      </p:sp>
+      <p:sp>
+        <p:nvSpPr>
+          <p:cNvPr id="15" name="TextBox 14"/>
+          <p:cNvSpPr txBox="1"/>
+          <p:nvPr/>
+        </p:nvSpPr>
+        <p:spPr>
+          <a:xfrm>
+            <a:off x="5943600" y="3840480"/>
+            <a:ext cx="5029200" cy="548640"/>
+          </a:xfrm>
+          <a:prstGeom prst="rect">
+            <a:avLst/>
+          </a:prstGeom>
+          <a:noFill/>
+        </p:spPr>
+        <p:txBody>
+          <a:bodyPr wrap="none">
+            <a:spAutoFit/>
+          </a:bodyPr>
+          <a:lstStyle/>
+          <a:p>
+            <a:pPr algn="l">
+              <a:defRPr sz="2200" b="0">
+                <a:solidFill>
+                  <a:srgbClr val="888888"/>
+                </a:solidFill>
+                <a:latin typeface="Arial"/>
+              </a:defRPr>
+            </a:pPr>
+            <a:r>
+              <a:t>___</a:t>
+            </a:r>
+          </a:p>
+        </p:txBody>
+      </p:sp>
+      <p:sp>
+        <p:nvSpPr>
+          <p:cNvPr id="16" name="TextBox 15"/>
+          <p:cNvSpPr txBox="1"/>
+          <p:nvPr/>
+        </p:nvSpPr>
+        <p:spPr>
+          <a:xfrm>
+            <a:off x="640080" y="5029200"/>
+            <a:ext cx="10972800" cy="457200"/>
+          </a:xfrm>
+          <a:prstGeom prst="rect">
+            <a:avLst/>
+          </a:prstGeom>
+          <a:noFill/>
+        </p:spPr>
+        <p:txBody>
+          <a:bodyPr wrap="none">
+            <a:spAutoFit/>
+          </a:bodyPr>
+          <a:lstStyle/>
+          <a:p>
+            <a:pPr algn="l">
+              <a:defRPr sz="1600" b="0">
+                <a:solidFill>
+                  <a:srgbClr val="555555"/>
+                </a:solidFill>
+                <a:latin typeface="Arial"/>
+              </a:defRPr>
+            </a:pPr>
+            <a:r>
+              <a:t>Optionen: Buenos días / Buenas tardes / Buenas noches</a:t>
+            </a:r>
+          </a:p>
+        </p:txBody>
+      </p:sp>
+      <p:sp>
+        <p:nvSpPr>
+          <p:cNvPr id="17" name="Rectangle 16"/>
+          <p:cNvSpPr/>
+          <p:nvPr/>
+        </p:nvSpPr>
+        <p:spPr>
+          <a:xfrm>
+            <a:off x="457200" y="5943600"/>
+            <a:ext cx="11274552" cy="548640"/>
+          </a:xfrm>
+          <a:prstGeom prst="rect">
+            <a:avLst/>
+          </a:prstGeom>
+          <a:solidFill>
+            <a:srgbClr val="FDF2F4"/>
+          </a:solidFill>
+          <a:ln>
+            <a:solidFill>
+              <a:srgbClr val="C41E3A"/>
+            </a:solidFill>
+          </a:ln>
+        </p:spPr>
+        <p:style>
+          <a:lnRef idx="1">
+            <a:schemeClr val="accent1"/>
+          </a:lnRef>
+          <a:fillRef idx="3">
+            <a:schemeClr val="accent1"/>
+          </a:fillRef>
+          <a:effectRef idx="2">
+            <a:schemeClr val="accent1"/>
+          </a:effectRef>
+          <a:fontRef idx="minor">
+            <a:schemeClr val="lt1"/>
+          </a:fontRef>
+        </p:style>
+        <p:txBody>
+          <a:bodyPr rtlCol="0" anchor="ctr"/>
+          <a:lstStyle/>
+          <a:p>
+            <a:pPr algn="ctr"/>
+          </a:p>
+        </p:txBody>
+      </p:sp>
+      <p:sp>
+        <p:nvSpPr>
+          <p:cNvPr id="18" name="TextBox 17"/>
+          <p:cNvSpPr txBox="1"/>
+          <p:nvPr/>
+        </p:nvSpPr>
+        <p:spPr>
+          <a:xfrm>
+            <a:off x="640080" y="6053328"/>
+            <a:ext cx="10972800" cy="365760"/>
+          </a:xfrm>
+          <a:prstGeom prst="rect">
+            <a:avLst/>
+          </a:prstGeom>
+          <a:noFill/>
+        </p:spPr>
+        <p:txBody>
+          <a:bodyPr wrap="none">
+            <a:spAutoFit/>
+          </a:bodyPr>
+          <a:lstStyle/>
+          <a:p>
+            <a:pPr algn="l">
+              <a:defRPr sz="1400" b="1">
+                <a:solidFill>
+                  <a:srgbClr val="C41E3A"/>
+                </a:solidFill>
+                <a:latin typeface="Arial"/>
+              </a:defRPr>
+            </a:pPr>
+            <a:r>
+              <a:t>📝 AB-01a: Aufgabe 1</a:t>
+            </a:r>
+          </a:p>
+        </p:txBody>
+      </p:sp>
+    </p:spTree>
+  </p:cSld>
+  <p:clrMapOvr>
+    <a:masterClrMapping/>
+  </p:clrMapOvr>
+</p:sld>
+</file>
+
+<file path=ppt/slides/slide11.xml><?xml version="1.0" encoding="utf-8"?>
+<p:sld xmlns:a="http://schemas.openxmlformats.org/drawingml/2006/main" xmlns:p="http://schemas.openxmlformats.org/presentationml/2006/main" xmlns:r="http://schemas.openxmlformats.org/officeDocument/2006/relationships">
+  <p:cSld>
+    <p:spTree>
+      <p:nvGrpSpPr>
+        <p:cNvPr id="1" name=""/>
+        <p:cNvGrpSpPr/>
+        <p:nvPr/>
+      </p:nvGrpSpPr>
+      <p:grpSpPr/>
+      <p:sp>
+        <p:nvSpPr>
+          <p:cNvPr id="2" name="Rectangle 1"/>
+          <p:cNvSpPr/>
+          <p:nvPr/>
+        </p:nvSpPr>
+        <p:spPr>
+          <a:xfrm>
+            <a:off x="0" y="0"/>
+            <a:ext cx="12191695" cy="457200"/>
+          </a:xfrm>
+          <a:prstGeom prst="rect">
+            <a:avLst/>
+          </a:prstGeom>
+          <a:solidFill>
+            <a:srgbClr val="C41E3A"/>
+          </a:solidFill>
+          <a:ln>
+            <a:noFill/>
+          </a:ln>
+        </p:spPr>
+        <p:style>
+          <a:lnRef idx="1">
+            <a:schemeClr val="accent1"/>
+          </a:lnRef>
+          <a:fillRef idx="3">
+            <a:schemeClr val="accent1"/>
+          </a:fillRef>
+          <a:effectRef idx="2">
+            <a:schemeClr val="accent1"/>
+          </a:effectRef>
+          <a:fontRef idx="minor">
+            <a:schemeClr val="lt1"/>
+          </a:fontRef>
+        </p:style>
+        <p:txBody>
+          <a:bodyPr rtlCol="0" anchor="ctr"/>
+          <a:lstStyle/>
+          <a:p>
+            <a:pPr algn="ctr"/>
+          </a:p>
+        </p:txBody>
+      </p:sp>
+      <p:sp>
+        <p:nvSpPr>
+          <p:cNvPr id="3" name="TextBox 2"/>
+          <p:cNvSpPr txBox="1"/>
+          <p:nvPr/>
+        </p:nvSpPr>
+        <p:spPr>
+          <a:xfrm>
+            <a:off x="274320" y="91440"/>
+            <a:ext cx="3657600" cy="274320"/>
+          </a:xfrm>
+          <a:prstGeom prst="rect">
+            <a:avLst/>
+          </a:prstGeom>
+          <a:noFill/>
+        </p:spPr>
+        <p:txBody>
+          <a:bodyPr wrap="none">
+            <a:spAutoFit/>
+          </a:bodyPr>
+          <a:lstStyle/>
+          <a:p>
+            <a:pPr algn="l">
+              <a:defRPr sz="1400" b="1">
+                <a:solidFill>
+                  <a:srgbClr val="FFFFFF"/>
+                </a:solidFill>
+                <a:latin typeface="Arial"/>
+              </a:defRPr>
+            </a:pPr>
+            <a:r>
+              <a:t>Spanisch Klasse 7 · LP-01a</a:t>
+            </a:r>
+          </a:p>
+        </p:txBody>
+      </p:sp>
+      <p:sp>
+        <p:nvSpPr>
+          <p:cNvPr id="4" name="Rectangle 3"/>
+          <p:cNvSpPr/>
+          <p:nvPr/>
+        </p:nvSpPr>
+        <p:spPr>
+          <a:xfrm>
+            <a:off x="0" y="6583680"/>
+            <a:ext cx="12191695" cy="274320"/>
+          </a:xfrm>
+          <a:prstGeom prst="rect">
+            <a:avLst/>
+          </a:prstGeom>
+          <a:solidFill>
+            <a:srgbClr val="F5F5F5"/>
+          </a:solidFill>
+          <a:ln>
+            <a:noFill/>
+          </a:ln>
+        </p:spPr>
+        <p:style>
+          <a:lnRef idx="1">
+            <a:schemeClr val="accent1"/>
+          </a:lnRef>
+          <a:fillRef idx="3">
+            <a:schemeClr val="accent1"/>
+          </a:fillRef>
+          <a:effectRef idx="2">
+            <a:schemeClr val="accent1"/>
+          </a:effectRef>
+          <a:fontRef idx="minor">
+            <a:schemeClr val="lt1"/>
+          </a:fontRef>
+        </p:style>
+        <p:txBody>
+          <a:bodyPr rtlCol="0" anchor="ctr"/>
+          <a:lstStyle/>
+          <a:p>
+            <a:pPr algn="ctr"/>
+          </a:p>
+        </p:txBody>
+      </p:sp>
+      <p:sp>
+        <p:nvSpPr>
+          <p:cNvPr id="5" name="TextBox 4"/>
+          <p:cNvSpPr txBox="1"/>
+          <p:nvPr/>
+        </p:nvSpPr>
+        <p:spPr>
+          <a:xfrm>
+            <a:off x="274320" y="6601968"/>
+            <a:ext cx="4572000" cy="228600"/>
+          </a:xfrm>
+          <a:prstGeom prst="rect">
+            <a:avLst/>
+          </a:prstGeom>
+          <a:noFill/>
+        </p:spPr>
+        <p:txBody>
+          <a:bodyPr wrap="none">
+            <a:spAutoFit/>
+          </a:bodyPr>
+          <a:lstStyle/>
+          <a:p>
+            <a:pPr algn="l">
+              <a:defRPr sz="1000" b="0">
+                <a:solidFill>
+                  <a:srgbClr val="555555"/>
+                </a:solidFill>
+                <a:latin typeface="Arial"/>
+              </a:defRPr>
+            </a:pPr>
+            <a:r>
+              <a:t>¡Hola!</a:t>
+            </a:r>
+          </a:p>
+        </p:txBody>
+      </p:sp>
+      <p:sp>
+        <p:nvSpPr>
+          <p:cNvPr id="6" name="TextBox 5"/>
+          <p:cNvSpPr txBox="1"/>
+          <p:nvPr/>
+        </p:nvSpPr>
+        <p:spPr>
+          <a:xfrm>
+            <a:off x="9144000" y="6601968"/>
+            <a:ext cx="2743200" cy="228600"/>
+          </a:xfrm>
+          <a:prstGeom prst="rect">
+            <a:avLst/>
+          </a:prstGeom>
+          <a:noFill/>
+        </p:spPr>
+        <p:txBody>
+          <a:bodyPr wrap="none">
+            <a:spAutoFit/>
+          </a:bodyPr>
+          <a:lstStyle/>
+          <a:p>
+            <a:pPr algn="r">
+              <a:defRPr sz="1000" b="0">
+                <a:solidFill>
+                  <a:srgbClr val="555555"/>
+                </a:solidFill>
+                <a:latin typeface="Arial"/>
+              </a:defRPr>
+            </a:pPr>
+            <a:r>
+              <a:t>Sequenz 1</a:t>
+            </a:r>
+          </a:p>
+        </p:txBody>
+      </p:sp>
+      <p:sp>
+        <p:nvSpPr>
+          <p:cNvPr id="7" name="Rectangle 6"/>
+          <p:cNvSpPr/>
+          <p:nvPr/>
+        </p:nvSpPr>
+        <p:spPr>
+          <a:xfrm>
+            <a:off x="457200" y="640080"/>
+            <a:ext cx="1828800" cy="457200"/>
+          </a:xfrm>
+          <a:prstGeom prst="rect">
+            <a:avLst/>
+          </a:prstGeom>
+          <a:solidFill>
+            <a:srgbClr val="2A7A4B"/>
+          </a:solidFill>
+          <a:ln>
+            <a:noFill/>
+          </a:ln>
+        </p:spPr>
+        <p:style>
+          <a:lnRef idx="1">
+            <a:schemeClr val="accent1"/>
+          </a:lnRef>
+          <a:fillRef idx="3">
+            <a:schemeClr val="accent1"/>
+          </a:fillRef>
+          <a:effectRef idx="2">
+            <a:schemeClr val="accent1"/>
+          </a:effectRef>
+          <a:fontRef idx="minor">
+            <a:schemeClr val="lt1"/>
+          </a:fontRef>
+        </p:style>
+        <p:txBody>
+          <a:bodyPr rtlCol="0" anchor="ctr"/>
+          <a:lstStyle/>
+          <a:p>
+            <a:pPr algn="ctr"/>
+          </a:p>
+        </p:txBody>
+      </p:sp>
+      <p:sp>
+        <p:nvSpPr>
+          <p:cNvPr id="8" name="TextBox 7"/>
+          <p:cNvSpPr txBox="1"/>
+          <p:nvPr/>
+        </p:nvSpPr>
+        <p:spPr>
+          <a:xfrm>
+            <a:off x="548640" y="713231"/>
+            <a:ext cx="1645920" cy="320040"/>
+          </a:xfrm>
+          <a:prstGeom prst="rect">
+            <a:avLst/>
+          </a:prstGeom>
+          <a:noFill/>
+        </p:spPr>
+        <p:txBody>
+          <a:bodyPr wrap="none">
+            <a:spAutoFit/>
+          </a:bodyPr>
+          <a:lstStyle/>
+          <a:p>
+            <a:pPr algn="ctr">
+              <a:defRPr sz="1400" b="1">
+                <a:solidFill>
+                  <a:srgbClr val="FFFFFF"/>
+                </a:solidFill>
+                <a:latin typeface="Arial"/>
+              </a:defRPr>
+            </a:pPr>
+            <a:r>
+              <a:t>LÖSUNG</a:t>
+            </a:r>
+          </a:p>
+        </p:txBody>
+      </p:sp>
+      <p:sp>
+        <p:nvSpPr>
+          <p:cNvPr id="9" name="TextBox 8"/>
+          <p:cNvSpPr txBox="1"/>
+          <p:nvPr/>
+        </p:nvSpPr>
+        <p:spPr>
+          <a:xfrm>
+            <a:off x="457200" y="1280160"/>
+            <a:ext cx="11274552" cy="731520"/>
+          </a:xfrm>
+          <a:prstGeom prst="rect">
+            <a:avLst/>
+          </a:prstGeom>
+          <a:noFill/>
+        </p:spPr>
+        <p:txBody>
+          <a:bodyPr wrap="none">
+            <a:spAutoFit/>
+          </a:bodyPr>
+          <a:lstStyle/>
+          <a:p>
+            <a:pPr algn="l">
+              <a:defRPr sz="3200" b="1">
+                <a:solidFill>
+                  <a:srgbClr val="C41E3A"/>
+                </a:solidFill>
+                <a:latin typeface="Arial"/>
+              </a:defRPr>
+            </a:pPr>
+            <a:r>
+              <a:t>✅ Lösung</a:t>
+            </a:r>
+          </a:p>
+        </p:txBody>
+      </p:sp>
+      <p:sp>
+        <p:nvSpPr>
+          <p:cNvPr id="10" name="TextBox 9"/>
+          <p:cNvSpPr txBox="1"/>
+          <p:nvPr/>
+        </p:nvSpPr>
+        <p:spPr>
+          <a:xfrm>
+            <a:off x="640080" y="2011680"/>
+            <a:ext cx="5029200" cy="548640"/>
+          </a:xfrm>
+          <a:prstGeom prst="rect">
+            <a:avLst/>
+          </a:prstGeom>
+          <a:noFill/>
+        </p:spPr>
+        <p:txBody>
+          <a:bodyPr wrap="none">
+            <a:spAutoFit/>
+          </a:bodyPr>
+          <a:lstStyle/>
+          <a:p>
+            <a:pPr algn="l">
+              <a:defRPr sz="2400" b="1">
+                <a:solidFill>
+                  <a:srgbClr val="C41E3A"/>
+                </a:solidFill>
+                <a:latin typeface="Arial"/>
+              </a:defRPr>
+            </a:pPr>
+            <a:r>
+              <a:t>8:00 Uhr</a:t>
+            </a:r>
+          </a:p>
+        </p:txBody>
+      </p:sp>
+      <p:sp>
+        <p:nvSpPr>
+          <p:cNvPr id="11" name="TextBox 10"/>
+          <p:cNvSpPr txBox="1"/>
+          <p:nvPr/>
+        </p:nvSpPr>
+        <p:spPr>
+          <a:xfrm>
+            <a:off x="5943600" y="2011680"/>
+            <a:ext cx="5029200" cy="548640"/>
+          </a:xfrm>
+          <a:prstGeom prst="rect">
+            <a:avLst/>
+          </a:prstGeom>
+          <a:noFill/>
+        </p:spPr>
+        <p:txBody>
+          <a:bodyPr wrap="none">
+            <a:spAutoFit/>
+          </a:bodyPr>
+          <a:lstStyle/>
+          <a:p>
+            <a:pPr algn="l">
+              <a:defRPr sz="2400" b="1">
+                <a:solidFill>
+                  <a:srgbClr val="2A7A4B"/>
+                </a:solidFill>
+                <a:latin typeface="Arial"/>
+              </a:defRPr>
+            </a:pPr>
+            <a:r>
+              <a:t>Buenos días</a:t>
+            </a:r>
+          </a:p>
+        </p:txBody>
+      </p:sp>
+      <p:sp>
+        <p:nvSpPr>
+          <p:cNvPr id="12" name="TextBox 11"/>
+          <p:cNvSpPr txBox="1"/>
+          <p:nvPr/>
+        </p:nvSpPr>
+        <p:spPr>
+          <a:xfrm>
+            <a:off x="640080" y="3108960"/>
+            <a:ext cx="5029200" cy="548640"/>
+          </a:xfrm>
+          <a:prstGeom prst="rect">
+            <a:avLst/>
+          </a:prstGeom>
+          <a:noFill/>
+        </p:spPr>
+        <p:txBody>
+          <a:bodyPr wrap="none">
+            <a:spAutoFit/>
+          </a:bodyPr>
+          <a:lstStyle/>
+          <a:p>
+            <a:pPr algn="l">
+              <a:defRPr sz="2400" b="1">
+                <a:solidFill>
+                  <a:srgbClr val="C41E3A"/>
+                </a:solidFill>
+                <a:latin typeface="Arial"/>
+              </a:defRPr>
+            </a:pPr>
+            <a:r>
+              <a:t>15:00 Uhr</a:t>
+            </a:r>
+          </a:p>
+        </p:txBody>
+      </p:sp>
+      <p:sp>
+        <p:nvSpPr>
+          <p:cNvPr id="13" name="TextBox 12"/>
+          <p:cNvSpPr txBox="1"/>
+          <p:nvPr/>
+        </p:nvSpPr>
+        <p:spPr>
+          <a:xfrm>
+            <a:off x="5943600" y="3108960"/>
+            <a:ext cx="5029200" cy="548640"/>
+          </a:xfrm>
+          <a:prstGeom prst="rect">
+            <a:avLst/>
+          </a:prstGeom>
+          <a:noFill/>
+        </p:spPr>
+        <p:txBody>
+          <a:bodyPr wrap="none">
+            <a:spAutoFit/>
+          </a:bodyPr>
+          <a:lstStyle/>
+          <a:p>
+            <a:pPr algn="l">
+              <a:defRPr sz="2400" b="1">
+                <a:solidFill>
+                  <a:srgbClr val="2A7A4B"/>
+                </a:solidFill>
+                <a:latin typeface="Arial"/>
+              </a:defRPr>
+            </a:pPr>
+            <a:r>
+              <a:t>Buenas tardes</a:t>
+            </a:r>
+          </a:p>
+        </p:txBody>
+      </p:sp>
+      <p:sp>
+        <p:nvSpPr>
+          <p:cNvPr id="14" name="TextBox 13"/>
+          <p:cNvSpPr txBox="1"/>
+          <p:nvPr/>
+        </p:nvSpPr>
+        <p:spPr>
+          <a:xfrm>
+            <a:off x="640080" y="4206240"/>
+            <a:ext cx="5029200" cy="548640"/>
+          </a:xfrm>
+          <a:prstGeom prst="rect">
+            <a:avLst/>
+          </a:prstGeom>
+          <a:noFill/>
+        </p:spPr>
+        <p:txBody>
+          <a:bodyPr wrap="none">
+            <a:spAutoFit/>
+          </a:bodyPr>
+          <a:lstStyle/>
+          <a:p>
+            <a:pPr algn="l">
+              <a:defRPr sz="2400" b="1">
+                <a:solidFill>
+                  <a:srgbClr val="C41E3A"/>
+                </a:solidFill>
+                <a:latin typeface="Arial"/>
+              </a:defRPr>
+            </a:pPr>
+            <a:r>
+              <a:t>21:00 Uhr</a:t>
+            </a:r>
+          </a:p>
+        </p:txBody>
+      </p:sp>
+      <p:sp>
+        <p:nvSpPr>
+          <p:cNvPr id="15" name="TextBox 14"/>
+          <p:cNvSpPr txBox="1"/>
+          <p:nvPr/>
+        </p:nvSpPr>
+        <p:spPr>
+          <a:xfrm>
+            <a:off x="5943600" y="4206240"/>
+            <a:ext cx="5029200" cy="548640"/>
+          </a:xfrm>
+          <a:prstGeom prst="rect">
+            <a:avLst/>
+          </a:prstGeom>
+          <a:noFill/>
+        </p:spPr>
+        <p:txBody>
+          <a:bodyPr wrap="none">
+            <a:spAutoFit/>
+          </a:bodyPr>
+          <a:lstStyle/>
+          <a:p>
+            <a:pPr algn="l">
+              <a:defRPr sz="2400" b="1">
+                <a:solidFill>
+                  <a:srgbClr val="2A7A4B"/>
+                </a:solidFill>
+                <a:latin typeface="Arial"/>
+              </a:defRPr>
+            </a:pPr>
+            <a:r>
+              <a:t>Buenas noches</a:t>
+            </a:r>
+          </a:p>
+        </p:txBody>
+      </p:sp>
+    </p:spTree>
+  </p:cSld>
+  <p:clrMapOvr>
+    <a:masterClrMapping/>
+  </p:clrMapOvr>
+</p:sld>
+</file>
+
+<file path=ppt/slides/slide12.xml><?xml version="1.0" encoding="utf-8"?>
+<p:sld xmlns:a="http://schemas.openxmlformats.org/drawingml/2006/main" xmlns:p="http://schemas.openxmlformats.org/presentationml/2006/main" xmlns:r="http://schemas.openxmlformats.org/officeDocument/2006/relationships">
+  <p:cSld>
+    <p:spTree>
+      <p:nvGrpSpPr>
+        <p:cNvPr id="1" name=""/>
+        <p:cNvGrpSpPr/>
+        <p:nvPr/>
+      </p:nvGrpSpPr>
+      <p:grpSpPr/>
+      <p:sp>
+        <p:nvSpPr>
+          <p:cNvPr id="2" name="Rectangle 1"/>
+          <p:cNvSpPr/>
+          <p:nvPr/>
+        </p:nvSpPr>
+        <p:spPr>
+          <a:xfrm>
+            <a:off x="0" y="0"/>
+            <a:ext cx="12191695" cy="457200"/>
+          </a:xfrm>
+          <a:prstGeom prst="rect">
+            <a:avLst/>
+          </a:prstGeom>
+          <a:solidFill>
+            <a:srgbClr val="C41E3A"/>
+          </a:solidFill>
+          <a:ln>
+            <a:noFill/>
+          </a:ln>
+        </p:spPr>
+        <p:style>
+          <a:lnRef idx="1">
+            <a:schemeClr val="accent1"/>
+          </a:lnRef>
+          <a:fillRef idx="3">
+            <a:schemeClr val="accent1"/>
+          </a:fillRef>
+          <a:effectRef idx="2">
+            <a:schemeClr val="accent1"/>
+          </a:effectRef>
+          <a:fontRef idx="minor">
+            <a:schemeClr val="lt1"/>
+          </a:fontRef>
+        </p:style>
+        <p:txBody>
+          <a:bodyPr rtlCol="0" anchor="ctr"/>
+          <a:lstStyle/>
+          <a:p>
+            <a:pPr algn="ctr"/>
+          </a:p>
+        </p:txBody>
+      </p:sp>
+      <p:sp>
+        <p:nvSpPr>
+          <p:cNvPr id="3" name="TextBox 2"/>
+          <p:cNvSpPr txBox="1"/>
+          <p:nvPr/>
+        </p:nvSpPr>
+        <p:spPr>
+          <a:xfrm>
+            <a:off x="274320" y="91440"/>
+            <a:ext cx="3657600" cy="274320"/>
+          </a:xfrm>
+          <a:prstGeom prst="rect">
+            <a:avLst/>
+          </a:prstGeom>
+          <a:noFill/>
+        </p:spPr>
+        <p:txBody>
+          <a:bodyPr wrap="none">
+            <a:spAutoFit/>
+          </a:bodyPr>
+          <a:lstStyle/>
+          <a:p>
+            <a:pPr algn="l">
+              <a:defRPr sz="1400" b="1">
+                <a:solidFill>
+                  <a:srgbClr val="FFFFFF"/>
+                </a:solidFill>
+                <a:latin typeface="Arial"/>
+              </a:defRPr>
+            </a:pPr>
+            <a:r>
+              <a:t>Spanisch Klasse 7 · LP-01a</a:t>
+            </a:r>
+          </a:p>
+        </p:txBody>
+      </p:sp>
+      <p:sp>
+        <p:nvSpPr>
+          <p:cNvPr id="4" name="Rectangle 3"/>
+          <p:cNvSpPr/>
+          <p:nvPr/>
+        </p:nvSpPr>
+        <p:spPr>
+          <a:xfrm>
+            <a:off x="0" y="6583680"/>
+            <a:ext cx="12191695" cy="274320"/>
+          </a:xfrm>
+          <a:prstGeom prst="rect">
+            <a:avLst/>
+          </a:prstGeom>
+          <a:solidFill>
+            <a:srgbClr val="F5F5F5"/>
+          </a:solidFill>
+          <a:ln>
+            <a:noFill/>
+          </a:ln>
+        </p:spPr>
+        <p:style>
+          <a:lnRef idx="1">
+            <a:schemeClr val="accent1"/>
+          </a:lnRef>
+          <a:fillRef idx="3">
+            <a:schemeClr val="accent1"/>
+          </a:fillRef>
+          <a:effectRef idx="2">
+            <a:schemeClr val="accent1"/>
+          </a:effectRef>
+          <a:fontRef idx="minor">
+            <a:schemeClr val="lt1"/>
+          </a:fontRef>
+        </p:style>
+        <p:txBody>
+          <a:bodyPr rtlCol="0" anchor="ctr"/>
+          <a:lstStyle/>
+          <a:p>
+            <a:pPr algn="ctr"/>
+          </a:p>
+        </p:txBody>
+      </p:sp>
+      <p:sp>
+        <p:nvSpPr>
+          <p:cNvPr id="5" name="TextBox 4"/>
+          <p:cNvSpPr txBox="1"/>
+          <p:nvPr/>
+        </p:nvSpPr>
+        <p:spPr>
+          <a:xfrm>
+            <a:off x="274320" y="6601968"/>
+            <a:ext cx="4572000" cy="228600"/>
+          </a:xfrm>
+          <a:prstGeom prst="rect">
+            <a:avLst/>
+          </a:prstGeom>
+          <a:noFill/>
+        </p:spPr>
+        <p:txBody>
+          <a:bodyPr wrap="none">
+            <a:spAutoFit/>
+          </a:bodyPr>
+          <a:lstStyle/>
+          <a:p>
+            <a:pPr algn="l">
+              <a:defRPr sz="1000" b="0">
+                <a:solidFill>
+                  <a:srgbClr val="555555"/>
+                </a:solidFill>
+                <a:latin typeface="Arial"/>
+              </a:defRPr>
+            </a:pPr>
+            <a:r>
+              <a:t>¡Hola!</a:t>
+            </a:r>
+          </a:p>
+        </p:txBody>
+      </p:sp>
+      <p:sp>
+        <p:nvSpPr>
+          <p:cNvPr id="6" name="TextBox 5"/>
+          <p:cNvSpPr txBox="1"/>
+          <p:nvPr/>
+        </p:nvSpPr>
+        <p:spPr>
+          <a:xfrm>
+            <a:off x="9144000" y="6601968"/>
+            <a:ext cx="2743200" cy="228600"/>
+          </a:xfrm>
+          <a:prstGeom prst="rect">
+            <a:avLst/>
+          </a:prstGeom>
+          <a:noFill/>
+        </p:spPr>
+        <p:txBody>
+          <a:bodyPr wrap="none">
+            <a:spAutoFit/>
+          </a:bodyPr>
+          <a:lstStyle/>
+          <a:p>
+            <a:pPr algn="r">
+              <a:defRPr sz="1000" b="0">
+                <a:solidFill>
+                  <a:srgbClr val="555555"/>
+                </a:solidFill>
+                <a:latin typeface="Arial"/>
+              </a:defRPr>
+            </a:pPr>
+            <a:r>
+              <a:t>Sequenz 1</a:t>
+            </a:r>
+          </a:p>
+        </p:txBody>
+      </p:sp>
+      <p:sp>
+        <p:nvSpPr>
+          <p:cNvPr id="7" name="Rectangle 6"/>
+          <p:cNvSpPr/>
+          <p:nvPr/>
+        </p:nvSpPr>
+        <p:spPr>
+          <a:xfrm>
+            <a:off x="457200" y="640080"/>
+            <a:ext cx="1828800" cy="457200"/>
+          </a:xfrm>
+          <a:prstGeom prst="rect">
+            <a:avLst/>
+          </a:prstGeom>
+          <a:solidFill>
+            <a:srgbClr val="C41E3A"/>
+          </a:solidFill>
+          <a:ln>
+            <a:noFill/>
+          </a:ln>
+        </p:spPr>
+        <p:style>
+          <a:lnRef idx="1">
+            <a:schemeClr val="accent1"/>
+          </a:lnRef>
+          <a:fillRef idx="3">
+            <a:schemeClr val="accent1"/>
+          </a:fillRef>
+          <a:effectRef idx="2">
+            <a:schemeClr val="accent1"/>
+          </a:effectRef>
+          <a:fontRef idx="minor">
+            <a:schemeClr val="lt1"/>
+          </a:fontRef>
+        </p:style>
+        <p:txBody>
+          <a:bodyPr rtlCol="0" anchor="ctr"/>
+          <a:lstStyle/>
+          <a:p>
+            <a:pPr algn="ctr"/>
+          </a:p>
+        </p:txBody>
+      </p:sp>
+      <p:sp>
+        <p:nvSpPr>
+          <p:cNvPr id="8" name="TextBox 7"/>
+          <p:cNvSpPr txBox="1"/>
+          <p:nvPr/>
+        </p:nvSpPr>
+        <p:spPr>
+          <a:xfrm>
+            <a:off x="548640" y="713231"/>
+            <a:ext cx="1645920" cy="320040"/>
+          </a:xfrm>
+          <a:prstGeom prst="rect">
+            <a:avLst/>
+          </a:prstGeom>
+          <a:noFill/>
+        </p:spPr>
+        <p:txBody>
+          <a:bodyPr wrap="none">
+            <a:spAutoFit/>
+          </a:bodyPr>
+          <a:lstStyle/>
+          <a:p>
+            <a:pPr algn="ctr">
+              <a:defRPr sz="1400" b="1">
+                <a:solidFill>
+                  <a:srgbClr val="FFFFFF"/>
+                </a:solidFill>
+                <a:latin typeface="Arial"/>
+              </a:defRPr>
+            </a:pPr>
+            <a:r>
+              <a:t>ÜBUNG</a:t>
+            </a:r>
+          </a:p>
+        </p:txBody>
+      </p:sp>
+      <p:sp>
+        <p:nvSpPr>
+          <p:cNvPr id="9" name="TextBox 8"/>
+          <p:cNvSpPr txBox="1"/>
+          <p:nvPr/>
+        </p:nvSpPr>
+        <p:spPr>
+          <a:xfrm>
+            <a:off x="457200" y="1280160"/>
+            <a:ext cx="11274552" cy="731520"/>
+          </a:xfrm>
+          <a:prstGeom prst="rect">
+            <a:avLst/>
+          </a:prstGeom>
+          <a:noFill/>
+        </p:spPr>
+        <p:txBody>
+          <a:bodyPr wrap="none">
+            <a:spAutoFit/>
+          </a:bodyPr>
+          <a:lstStyle/>
+          <a:p>
+            <a:pPr algn="l">
+              <a:defRPr sz="3200" b="1">
+                <a:solidFill>
+                  <a:srgbClr val="C41E3A"/>
+                </a:solidFill>
+                <a:latin typeface="Arial"/>
+              </a:defRPr>
+            </a:pPr>
+            <a:r>
+              <a:t>✏️ Übung: Übersetzen</a:t>
+            </a:r>
+          </a:p>
+        </p:txBody>
+      </p:sp>
+      <p:sp>
+        <p:nvSpPr>
+          <p:cNvPr id="10" name="TextBox 9"/>
+          <p:cNvSpPr txBox="1"/>
+          <p:nvPr/>
+        </p:nvSpPr>
+        <p:spPr>
+          <a:xfrm>
+            <a:off x="640080" y="2011680"/>
+            <a:ext cx="5029200" cy="548640"/>
+          </a:xfrm>
+          <a:prstGeom prst="rect">
+            <a:avLst/>
+          </a:prstGeom>
+          <a:noFill/>
+        </p:spPr>
+        <p:txBody>
+          <a:bodyPr wrap="none">
+            <a:spAutoFit/>
+          </a:bodyPr>
+          <a:lstStyle/>
+          <a:p>
+            <a:pPr algn="l">
+              <a:defRPr sz="2200" b="1">
+                <a:solidFill>
+                  <a:srgbClr val="C41E3A"/>
+                </a:solidFill>
+                <a:latin typeface="Arial"/>
+              </a:defRPr>
+            </a:pPr>
+            <a:r>
+              <a:t>Hallo!</a:t>
+            </a:r>
+          </a:p>
+        </p:txBody>
+      </p:sp>
+      <p:sp>
+        <p:nvSpPr>
+          <p:cNvPr id="11" name="TextBox 10"/>
+          <p:cNvSpPr txBox="1"/>
+          <p:nvPr/>
+        </p:nvSpPr>
+        <p:spPr>
+          <a:xfrm>
+            <a:off x="5943600" y="2011680"/>
+            <a:ext cx="5029200" cy="548640"/>
+          </a:xfrm>
+          <a:prstGeom prst="rect">
+            <a:avLst/>
+          </a:prstGeom>
+          <a:noFill/>
+        </p:spPr>
+        <p:txBody>
+          <a:bodyPr wrap="none">
+            <a:spAutoFit/>
+          </a:bodyPr>
+          <a:lstStyle/>
+          <a:p>
+            <a:pPr algn="l">
+              <a:defRPr sz="2200" b="0">
+                <a:solidFill>
+                  <a:srgbClr val="888888"/>
+                </a:solidFill>
+                <a:latin typeface="Arial"/>
+              </a:defRPr>
+            </a:pPr>
+            <a:r>
+              <a:t>___</a:t>
+            </a:r>
+          </a:p>
+        </p:txBody>
+      </p:sp>
+      <p:sp>
+        <p:nvSpPr>
+          <p:cNvPr id="12" name="TextBox 11"/>
+          <p:cNvSpPr txBox="1"/>
+          <p:nvPr/>
+        </p:nvSpPr>
+        <p:spPr>
+          <a:xfrm>
+            <a:off x="640080" y="2926080"/>
+            <a:ext cx="5029200" cy="548640"/>
+          </a:xfrm>
+          <a:prstGeom prst="rect">
+            <a:avLst/>
+          </a:prstGeom>
+          <a:noFill/>
+        </p:spPr>
+        <p:txBody>
+          <a:bodyPr wrap="none">
+            <a:spAutoFit/>
+          </a:bodyPr>
+          <a:lstStyle/>
+          <a:p>
+            <a:pPr algn="l">
+              <a:defRPr sz="2200" b="1">
+                <a:solidFill>
+                  <a:srgbClr val="C41E3A"/>
+                </a:solidFill>
+                <a:latin typeface="Arial"/>
+              </a:defRPr>
+            </a:pPr>
+            <a:r>
+              <a:t>Tschüss!</a:t>
+            </a:r>
+          </a:p>
+        </p:txBody>
+      </p:sp>
+      <p:sp>
+        <p:nvSpPr>
+          <p:cNvPr id="13" name="TextBox 12"/>
+          <p:cNvSpPr txBox="1"/>
+          <p:nvPr/>
+        </p:nvSpPr>
+        <p:spPr>
+          <a:xfrm>
+            <a:off x="5943600" y="2926080"/>
+            <a:ext cx="5029200" cy="548640"/>
+          </a:xfrm>
+          <a:prstGeom prst="rect">
+            <a:avLst/>
+          </a:prstGeom>
+          <a:noFill/>
+        </p:spPr>
+        <p:txBody>
+          <a:bodyPr wrap="none">
+            <a:spAutoFit/>
+          </a:bodyPr>
+          <a:lstStyle/>
+          <a:p>
+            <a:pPr algn="l">
+              <a:defRPr sz="2200" b="0">
+                <a:solidFill>
+                  <a:srgbClr val="888888"/>
+                </a:solidFill>
+                <a:latin typeface="Arial"/>
+              </a:defRPr>
+            </a:pPr>
+            <a:r>
+              <a:t>___</a:t>
+            </a:r>
+          </a:p>
+        </p:txBody>
+      </p:sp>
+      <p:sp>
+        <p:nvSpPr>
+          <p:cNvPr id="14" name="TextBox 13"/>
+          <p:cNvSpPr txBox="1"/>
+          <p:nvPr/>
+        </p:nvSpPr>
+        <p:spPr>
+          <a:xfrm>
+            <a:off x="640080" y="3840480"/>
+            <a:ext cx="5029200" cy="548640"/>
+          </a:xfrm>
+          <a:prstGeom prst="rect">
+            <a:avLst/>
+          </a:prstGeom>
+          <a:noFill/>
+        </p:spPr>
+        <p:txBody>
+          <a:bodyPr wrap="none">
+            <a:spAutoFit/>
+          </a:bodyPr>
+          <a:lstStyle/>
+          <a:p>
+            <a:pPr algn="l">
+              <a:defRPr sz="2200" b="1">
+                <a:solidFill>
+                  <a:srgbClr val="C41E3A"/>
+                </a:solidFill>
+                <a:latin typeface="Arial"/>
+              </a:defRPr>
+            </a:pPr>
+            <a:r>
+              <a:t>Bis morgen!</a:t>
+            </a:r>
+          </a:p>
+        </p:txBody>
+      </p:sp>
+      <p:sp>
+        <p:nvSpPr>
+          <p:cNvPr id="15" name="TextBox 14"/>
+          <p:cNvSpPr txBox="1"/>
+          <p:nvPr/>
+        </p:nvSpPr>
+        <p:spPr>
+          <a:xfrm>
+            <a:off x="5943600" y="3840480"/>
+            <a:ext cx="5029200" cy="548640"/>
+          </a:xfrm>
+          <a:prstGeom prst="rect">
+            <a:avLst/>
+          </a:prstGeom>
+          <a:noFill/>
+        </p:spPr>
+        <p:txBody>
+          <a:bodyPr wrap="none">
+            <a:spAutoFit/>
+          </a:bodyPr>
+          <a:lstStyle/>
+          <a:p>
+            <a:pPr algn="l">
+              <a:defRPr sz="2200" b="0">
+                <a:solidFill>
+                  <a:srgbClr val="888888"/>
+                </a:solidFill>
+                <a:latin typeface="Arial"/>
+              </a:defRPr>
+            </a:pPr>
+            <a:r>
+              <a:t>___</a:t>
+            </a:r>
+          </a:p>
+        </p:txBody>
+      </p:sp>
+      <p:sp>
+        <p:nvSpPr>
+          <p:cNvPr id="16" name="Rectangle 15"/>
+          <p:cNvSpPr/>
+          <p:nvPr/>
+        </p:nvSpPr>
+        <p:spPr>
+          <a:xfrm>
+            <a:off x="457200" y="5943600"/>
+            <a:ext cx="11274552" cy="548640"/>
+          </a:xfrm>
+          <a:prstGeom prst="rect">
+            <a:avLst/>
+          </a:prstGeom>
+          <a:solidFill>
+            <a:srgbClr val="FDF2F4"/>
+          </a:solidFill>
+          <a:ln>
+            <a:solidFill>
+              <a:srgbClr val="C41E3A"/>
+            </a:solidFill>
+          </a:ln>
+        </p:spPr>
+        <p:style>
+          <a:lnRef idx="1">
+            <a:schemeClr val="accent1"/>
+          </a:lnRef>
+          <a:fillRef idx="3">
+            <a:schemeClr val="accent1"/>
+          </a:fillRef>
+          <a:effectRef idx="2">
+            <a:schemeClr val="accent1"/>
+          </a:effectRef>
+          <a:fontRef idx="minor">
+            <a:schemeClr val="lt1"/>
+          </a:fontRef>
+        </p:style>
+        <p:txBody>
+          <a:bodyPr rtlCol="0" anchor="ctr"/>
+          <a:lstStyle/>
+          <a:p>
+            <a:pPr algn="ctr"/>
+          </a:p>
+        </p:txBody>
+      </p:sp>
+      <p:sp>
+        <p:nvSpPr>
+          <p:cNvPr id="17" name="TextBox 16"/>
+          <p:cNvSpPr txBox="1"/>
+          <p:nvPr/>
+        </p:nvSpPr>
+        <p:spPr>
+          <a:xfrm>
+            <a:off x="640080" y="6053328"/>
+            <a:ext cx="10972800" cy="365760"/>
+          </a:xfrm>
+          <a:prstGeom prst="rect">
+            <a:avLst/>
+          </a:prstGeom>
+          <a:noFill/>
+        </p:spPr>
+        <p:txBody>
+          <a:bodyPr wrap="none">
+            <a:spAutoFit/>
+          </a:bodyPr>
+          <a:lstStyle/>
+          <a:p>
+            <a:pPr algn="l">
+              <a:defRPr sz="1400" b="1">
+                <a:solidFill>
+                  <a:srgbClr val="C41E3A"/>
+                </a:solidFill>
+                <a:latin typeface="Arial"/>
+              </a:defRPr>
+            </a:pPr>
+            <a:r>
+              <a:t>📝 AB-01a: Aufgabe 2</a:t>
+            </a:r>
+          </a:p>
+        </p:txBody>
+      </p:sp>
+    </p:spTree>
+  </p:cSld>
+  <p:clrMapOvr>
+    <a:masterClrMapping/>
+  </p:clrMapOvr>
+</p:sld>
+</file>
+
+<file path=ppt/slides/slide13.xml><?xml version="1.0" encoding="utf-8"?>
+<p:sld xmlns:a="http://schemas.openxmlformats.org/drawingml/2006/main" xmlns:p="http://schemas.openxmlformats.org/presentationml/2006/main" xmlns:r="http://schemas.openxmlformats.org/officeDocument/2006/relationships">
+  <p:cSld>
+    <p:spTree>
+      <p:nvGrpSpPr>
+        <p:cNvPr id="1" name=""/>
+        <p:cNvGrpSpPr/>
+        <p:nvPr/>
+      </p:nvGrpSpPr>
+      <p:grpSpPr/>
+      <p:sp>
+        <p:nvSpPr>
+          <p:cNvPr id="2" name="Rectangle 1"/>
+          <p:cNvSpPr/>
+          <p:nvPr/>
+        </p:nvSpPr>
+        <p:spPr>
+          <a:xfrm>
+            <a:off x="0" y="0"/>
+            <a:ext cx="12191695" cy="457200"/>
+          </a:xfrm>
+          <a:prstGeom prst="rect">
+            <a:avLst/>
+          </a:prstGeom>
+          <a:solidFill>
+            <a:srgbClr val="C41E3A"/>
+          </a:solidFill>
+          <a:ln>
+            <a:noFill/>
+          </a:ln>
+        </p:spPr>
+        <p:style>
+          <a:lnRef idx="1">
+            <a:schemeClr val="accent1"/>
+          </a:lnRef>
+          <a:fillRef idx="3">
+            <a:schemeClr val="accent1"/>
+          </a:fillRef>
+          <a:effectRef idx="2">
+            <a:schemeClr val="accent1"/>
+          </a:effectRef>
+          <a:fontRef idx="minor">
+            <a:schemeClr val="lt1"/>
+          </a:fontRef>
+        </p:style>
+        <p:txBody>
+          <a:bodyPr rtlCol="0" anchor="ctr"/>
+          <a:lstStyle/>
+          <a:p>
+            <a:pPr algn="ctr"/>
+          </a:p>
+        </p:txBody>
+      </p:sp>
+      <p:sp>
+        <p:nvSpPr>
+          <p:cNvPr id="3" name="TextBox 2"/>
+          <p:cNvSpPr txBox="1"/>
+          <p:nvPr/>
+        </p:nvSpPr>
+        <p:spPr>
+          <a:xfrm>
+            <a:off x="274320" y="91440"/>
+            <a:ext cx="3657600" cy="274320"/>
+          </a:xfrm>
+          <a:prstGeom prst="rect">
+            <a:avLst/>
+          </a:prstGeom>
+          <a:noFill/>
+        </p:spPr>
+        <p:txBody>
+          <a:bodyPr wrap="none">
+            <a:spAutoFit/>
+          </a:bodyPr>
+          <a:lstStyle/>
+          <a:p>
+            <a:pPr algn="l">
+              <a:defRPr sz="1400" b="1">
+                <a:solidFill>
+                  <a:srgbClr val="FFFFFF"/>
+                </a:solidFill>
+                <a:latin typeface="Arial"/>
+              </a:defRPr>
+            </a:pPr>
+            <a:r>
+              <a:t>Spanisch Klasse 7 · LP-01a</a:t>
+            </a:r>
+          </a:p>
+        </p:txBody>
+      </p:sp>
+      <p:sp>
+        <p:nvSpPr>
+          <p:cNvPr id="4" name="Rectangle 3"/>
+          <p:cNvSpPr/>
+          <p:nvPr/>
+        </p:nvSpPr>
+        <p:spPr>
+          <a:xfrm>
+            <a:off x="0" y="6583680"/>
+            <a:ext cx="12191695" cy="274320"/>
+          </a:xfrm>
+          <a:prstGeom prst="rect">
+            <a:avLst/>
+          </a:prstGeom>
+          <a:solidFill>
+            <a:srgbClr val="F5F5F5"/>
+          </a:solidFill>
+          <a:ln>
+            <a:noFill/>
+          </a:ln>
+        </p:spPr>
+        <p:style>
+          <a:lnRef idx="1">
+            <a:schemeClr val="accent1"/>
+          </a:lnRef>
+          <a:fillRef idx="3">
+            <a:schemeClr val="accent1"/>
+          </a:fillRef>
+          <a:effectRef idx="2">
+            <a:schemeClr val="accent1"/>
+          </a:effectRef>
+          <a:fontRef idx="minor">
+            <a:schemeClr val="lt1"/>
+          </a:fontRef>
+        </p:style>
+        <p:txBody>
+          <a:bodyPr rtlCol="0" anchor="ctr"/>
+          <a:lstStyle/>
+          <a:p>
+            <a:pPr algn="ctr"/>
+          </a:p>
+        </p:txBody>
+      </p:sp>
+      <p:sp>
+        <p:nvSpPr>
+          <p:cNvPr id="5" name="TextBox 4"/>
+          <p:cNvSpPr txBox="1"/>
+          <p:nvPr/>
+        </p:nvSpPr>
+        <p:spPr>
+          <a:xfrm>
+            <a:off x="274320" y="6601968"/>
+            <a:ext cx="4572000" cy="228600"/>
+          </a:xfrm>
+          <a:prstGeom prst="rect">
+            <a:avLst/>
+          </a:prstGeom>
+          <a:noFill/>
+        </p:spPr>
+        <p:txBody>
+          <a:bodyPr wrap="none">
+            <a:spAutoFit/>
+          </a:bodyPr>
+          <a:lstStyle/>
+          <a:p>
+            <a:pPr algn="l">
+              <a:defRPr sz="1000" b="0">
+                <a:solidFill>
+                  <a:srgbClr val="555555"/>
+                </a:solidFill>
+                <a:latin typeface="Arial"/>
+              </a:defRPr>
+            </a:pPr>
+            <a:r>
+              <a:t>¡Hola!</a:t>
+            </a:r>
+          </a:p>
+        </p:txBody>
+      </p:sp>
+      <p:sp>
+        <p:nvSpPr>
+          <p:cNvPr id="6" name="TextBox 5"/>
+          <p:cNvSpPr txBox="1"/>
+          <p:nvPr/>
+        </p:nvSpPr>
+        <p:spPr>
+          <a:xfrm>
+            <a:off x="9144000" y="6601968"/>
+            <a:ext cx="2743200" cy="228600"/>
+          </a:xfrm>
+          <a:prstGeom prst="rect">
+            <a:avLst/>
+          </a:prstGeom>
+          <a:noFill/>
+        </p:spPr>
+        <p:txBody>
+          <a:bodyPr wrap="none">
+            <a:spAutoFit/>
+          </a:bodyPr>
+          <a:lstStyle/>
+          <a:p>
+            <a:pPr algn="r">
+              <a:defRPr sz="1000" b="0">
+                <a:solidFill>
+                  <a:srgbClr val="555555"/>
+                </a:solidFill>
+                <a:latin typeface="Arial"/>
+              </a:defRPr>
+            </a:pPr>
+            <a:r>
+              <a:t>Sequenz 1</a:t>
+            </a:r>
+          </a:p>
+        </p:txBody>
+      </p:sp>
+      <p:sp>
+        <p:nvSpPr>
+          <p:cNvPr id="7" name="Rectangle 6"/>
+          <p:cNvSpPr/>
+          <p:nvPr/>
+        </p:nvSpPr>
+        <p:spPr>
+          <a:xfrm>
+            <a:off x="457200" y="640080"/>
+            <a:ext cx="1828800" cy="457200"/>
+          </a:xfrm>
+          <a:prstGeom prst="rect">
+            <a:avLst/>
+          </a:prstGeom>
+          <a:solidFill>
+            <a:srgbClr val="2A7A4B"/>
+          </a:solidFill>
+          <a:ln>
+            <a:noFill/>
+          </a:ln>
+        </p:spPr>
+        <p:style>
+          <a:lnRef idx="1">
+            <a:schemeClr val="accent1"/>
+          </a:lnRef>
+          <a:fillRef idx="3">
+            <a:schemeClr val="accent1"/>
+          </a:fillRef>
+          <a:effectRef idx="2">
+            <a:schemeClr val="accent1"/>
+          </a:effectRef>
+          <a:fontRef idx="minor">
+            <a:schemeClr val="lt1"/>
+          </a:fontRef>
+        </p:style>
+        <p:txBody>
+          <a:bodyPr rtlCol="0" anchor="ctr"/>
+          <a:lstStyle/>
+          <a:p>
+            <a:pPr algn="ctr"/>
+          </a:p>
+        </p:txBody>
+      </p:sp>
+      <p:sp>
+        <p:nvSpPr>
+          <p:cNvPr id="8" name="TextBox 7"/>
+          <p:cNvSpPr txBox="1"/>
+          <p:nvPr/>
+        </p:nvSpPr>
+        <p:spPr>
+          <a:xfrm>
+            <a:off x="548640" y="713231"/>
+            <a:ext cx="1645920" cy="320040"/>
+          </a:xfrm>
+          <a:prstGeom prst="rect">
+            <a:avLst/>
+          </a:prstGeom>
+          <a:noFill/>
+        </p:spPr>
+        <p:txBody>
+          <a:bodyPr wrap="none">
+            <a:spAutoFit/>
+          </a:bodyPr>
+          <a:lstStyle/>
+          <a:p>
+            <a:pPr algn="ctr">
+              <a:defRPr sz="1400" b="1">
+                <a:solidFill>
+                  <a:srgbClr val="FFFFFF"/>
+                </a:solidFill>
+                <a:latin typeface="Arial"/>
+              </a:defRPr>
+            </a:pPr>
+            <a:r>
+              <a:t>LÖSUNG</a:t>
+            </a:r>
+          </a:p>
+        </p:txBody>
+      </p:sp>
+      <p:sp>
+        <p:nvSpPr>
+          <p:cNvPr id="9" name="TextBox 8"/>
+          <p:cNvSpPr txBox="1"/>
+          <p:nvPr/>
+        </p:nvSpPr>
+        <p:spPr>
+          <a:xfrm>
+            <a:off x="457200" y="1280160"/>
+            <a:ext cx="11274552" cy="731520"/>
+          </a:xfrm>
+          <a:prstGeom prst="rect">
+            <a:avLst/>
+          </a:prstGeom>
+          <a:noFill/>
+        </p:spPr>
+        <p:txBody>
+          <a:bodyPr wrap="none">
+            <a:spAutoFit/>
+          </a:bodyPr>
+          <a:lstStyle/>
+          <a:p>
+            <a:pPr algn="l">
+              <a:defRPr sz="3200" b="1">
+                <a:solidFill>
+                  <a:srgbClr val="C41E3A"/>
+                </a:solidFill>
+                <a:latin typeface="Arial"/>
+              </a:defRPr>
+            </a:pPr>
+            <a:r>
+              <a:t>✅ Lösung</a:t>
+            </a:r>
+          </a:p>
+        </p:txBody>
+      </p:sp>
+      <p:sp>
+        <p:nvSpPr>
+          <p:cNvPr id="10" name="TextBox 9"/>
+          <p:cNvSpPr txBox="1"/>
+          <p:nvPr/>
+        </p:nvSpPr>
+        <p:spPr>
+          <a:xfrm>
+            <a:off x="640080" y="2011680"/>
+            <a:ext cx="5029200" cy="548640"/>
+          </a:xfrm>
+          <a:prstGeom prst="rect">
+            <a:avLst/>
+          </a:prstGeom>
+          <a:noFill/>
+        </p:spPr>
+        <p:txBody>
+          <a:bodyPr wrap="none">
+            <a:spAutoFit/>
+          </a:bodyPr>
+          <a:lstStyle/>
+          <a:p>
+            <a:pPr algn="l">
+              <a:defRPr sz="2400" b="1">
+                <a:solidFill>
+                  <a:srgbClr val="C41E3A"/>
+                </a:solidFill>
+                <a:latin typeface="Arial"/>
+              </a:defRPr>
+            </a:pPr>
+            <a:r>
+              <a:t>Hallo!</a:t>
+            </a:r>
+          </a:p>
+        </p:txBody>
+      </p:sp>
+      <p:sp>
+        <p:nvSpPr>
+          <p:cNvPr id="11" name="TextBox 10"/>
+          <p:cNvSpPr txBox="1"/>
+          <p:nvPr/>
+        </p:nvSpPr>
+        <p:spPr>
+          <a:xfrm>
+            <a:off x="5943600" y="2011680"/>
+            <a:ext cx="5029200" cy="548640"/>
+          </a:xfrm>
+          <a:prstGeom prst="rect">
+            <a:avLst/>
+          </a:prstGeom>
+          <a:noFill/>
+        </p:spPr>
+        <p:txBody>
+          <a:bodyPr wrap="none">
+            <a:spAutoFit/>
+          </a:bodyPr>
+          <a:lstStyle/>
+          <a:p>
+            <a:pPr algn="l">
+              <a:defRPr sz="2400" b="1">
+                <a:solidFill>
+                  <a:srgbClr val="2A7A4B"/>
+                </a:solidFill>
+                <a:latin typeface="Arial"/>
+              </a:defRPr>
+            </a:pPr>
+            <a:r>
+              <a:t>¡Hola!</a:t>
+            </a:r>
+          </a:p>
+        </p:txBody>
+      </p:sp>
+      <p:sp>
+        <p:nvSpPr>
+          <p:cNvPr id="12" name="TextBox 11"/>
+          <p:cNvSpPr txBox="1"/>
+          <p:nvPr/>
+        </p:nvSpPr>
+        <p:spPr>
+          <a:xfrm>
+            <a:off x="640080" y="3108960"/>
+            <a:ext cx="5029200" cy="548640"/>
+          </a:xfrm>
+          <a:prstGeom prst="rect">
+            <a:avLst/>
+          </a:prstGeom>
+          <a:noFill/>
+        </p:spPr>
+        <p:txBody>
+          <a:bodyPr wrap="none">
+            <a:spAutoFit/>
+          </a:bodyPr>
+          <a:lstStyle/>
+          <a:p>
+            <a:pPr algn="l">
+              <a:defRPr sz="2400" b="1">
+                <a:solidFill>
+                  <a:srgbClr val="C41E3A"/>
+                </a:solidFill>
+                <a:latin typeface="Arial"/>
+              </a:defRPr>
+            </a:pPr>
+            <a:r>
+              <a:t>Tschüss!</a:t>
+            </a:r>
+          </a:p>
+        </p:txBody>
+      </p:sp>
+      <p:sp>
+        <p:nvSpPr>
+          <p:cNvPr id="13" name="TextBox 12"/>
+          <p:cNvSpPr txBox="1"/>
+          <p:nvPr/>
+        </p:nvSpPr>
+        <p:spPr>
+          <a:xfrm>
+            <a:off x="5943600" y="3108960"/>
+            <a:ext cx="5029200" cy="548640"/>
+          </a:xfrm>
+          <a:prstGeom prst="rect">
+            <a:avLst/>
+          </a:prstGeom>
+          <a:noFill/>
+        </p:spPr>
+        <p:txBody>
+          <a:bodyPr wrap="none">
+            <a:spAutoFit/>
+          </a:bodyPr>
+          <a:lstStyle/>
+          <a:p>
+            <a:pPr algn="l">
+              <a:defRPr sz="2400" b="1">
+                <a:solidFill>
+                  <a:srgbClr val="2A7A4B"/>
+                </a:solidFill>
+                <a:latin typeface="Arial"/>
+              </a:defRPr>
+            </a:pPr>
+            <a:r>
+              <a:t>¡Adiós!</a:t>
+            </a:r>
+          </a:p>
+        </p:txBody>
+      </p:sp>
+      <p:sp>
+        <p:nvSpPr>
+          <p:cNvPr id="14" name="TextBox 13"/>
+          <p:cNvSpPr txBox="1"/>
+          <p:nvPr/>
+        </p:nvSpPr>
+        <p:spPr>
+          <a:xfrm>
+            <a:off x="640080" y="4206240"/>
+            <a:ext cx="5029200" cy="548640"/>
+          </a:xfrm>
+          <a:prstGeom prst="rect">
+            <a:avLst/>
+          </a:prstGeom>
+          <a:noFill/>
+        </p:spPr>
+        <p:txBody>
+          <a:bodyPr wrap="none">
+            <a:spAutoFit/>
+          </a:bodyPr>
+          <a:lstStyle/>
+          <a:p>
+            <a:pPr algn="l">
+              <a:defRPr sz="2400" b="1">
+                <a:solidFill>
+                  <a:srgbClr val="C41E3A"/>
+                </a:solidFill>
+                <a:latin typeface="Arial"/>
+              </a:defRPr>
+            </a:pPr>
+            <a:r>
+              <a:t>Bis morgen!</a:t>
+            </a:r>
+          </a:p>
+        </p:txBody>
+      </p:sp>
+      <p:sp>
+        <p:nvSpPr>
+          <p:cNvPr id="15" name="TextBox 14"/>
+          <p:cNvSpPr txBox="1"/>
+          <p:nvPr/>
+        </p:nvSpPr>
+        <p:spPr>
+          <a:xfrm>
+            <a:off x="5943600" y="4206240"/>
+            <a:ext cx="5029200" cy="548640"/>
+          </a:xfrm>
+          <a:prstGeom prst="rect">
+            <a:avLst/>
+          </a:prstGeom>
+          <a:noFill/>
+        </p:spPr>
+        <p:txBody>
+          <a:bodyPr wrap="none">
+            <a:spAutoFit/>
+          </a:bodyPr>
+          <a:lstStyle/>
+          <a:p>
+            <a:pPr algn="l">
+              <a:defRPr sz="2400" b="1">
+                <a:solidFill>
+                  <a:srgbClr val="2A7A4B"/>
+                </a:solidFill>
+                <a:latin typeface="Arial"/>
+              </a:defRPr>
+            </a:pPr>
+            <a:r>
+              <a:t>¡Hasta mañana!</a:t>
+            </a:r>
+          </a:p>
+        </p:txBody>
+      </p:sp>
+    </p:spTree>
+  </p:cSld>
+  <p:clrMapOvr>
+    <a:masterClrMapping/>
+  </p:clrMapOvr>
+</p:sld>
+</file>
+
+<file path=ppt/slides/slide14.xml><?xml version="1.0" encoding="utf-8"?>
+<p:sld xmlns:a="http://schemas.openxmlformats.org/drawingml/2006/main" xmlns:p="http://schemas.openxmlformats.org/presentationml/2006/main" xmlns:r="http://schemas.openxmlformats.org/officeDocument/2006/relationships">
+  <p:cSld>
+    <p:spTree>
+      <p:nvGrpSpPr>
+        <p:cNvPr id="1" name=""/>
+        <p:cNvGrpSpPr/>
+        <p:nvPr/>
+      </p:nvGrpSpPr>
+      <p:grpSpPr/>
+      <p:sp>
+        <p:nvSpPr>
+          <p:cNvPr id="2" name="Rectangle 1"/>
+          <p:cNvSpPr/>
+          <p:nvPr/>
+        </p:nvSpPr>
+        <p:spPr>
+          <a:xfrm>
+            <a:off x="0" y="0"/>
+            <a:ext cx="12191695" cy="457200"/>
+          </a:xfrm>
+          <a:prstGeom prst="rect">
+            <a:avLst/>
+          </a:prstGeom>
+          <a:solidFill>
+            <a:srgbClr val="C41E3A"/>
+          </a:solidFill>
+          <a:ln>
+            <a:noFill/>
+          </a:ln>
+        </p:spPr>
+        <p:style>
+          <a:lnRef idx="1">
+            <a:schemeClr val="accent1"/>
+          </a:lnRef>
+          <a:fillRef idx="3">
+            <a:schemeClr val="accent1"/>
+          </a:fillRef>
+          <a:effectRef idx="2">
+            <a:schemeClr val="accent1"/>
+          </a:effectRef>
+          <a:fontRef idx="minor">
+            <a:schemeClr val="lt1"/>
+          </a:fontRef>
+        </p:style>
+        <p:txBody>
+          <a:bodyPr rtlCol="0" anchor="ctr"/>
+          <a:lstStyle/>
+          <a:p>
+            <a:pPr algn="ctr"/>
+          </a:p>
+        </p:txBody>
+      </p:sp>
+      <p:sp>
+        <p:nvSpPr>
+          <p:cNvPr id="3" name="TextBox 2"/>
+          <p:cNvSpPr txBox="1"/>
+          <p:nvPr/>
+        </p:nvSpPr>
+        <p:spPr>
+          <a:xfrm>
+            <a:off x="274320" y="91440"/>
+            <a:ext cx="3657600" cy="274320"/>
+          </a:xfrm>
+          <a:prstGeom prst="rect">
+            <a:avLst/>
+          </a:prstGeom>
+          <a:noFill/>
+        </p:spPr>
+        <p:txBody>
+          <a:bodyPr wrap="none">
+            <a:spAutoFit/>
+          </a:bodyPr>
+          <a:lstStyle/>
+          <a:p>
+            <a:pPr algn="l">
+              <a:defRPr sz="1400" b="1">
+                <a:solidFill>
+                  <a:srgbClr val="FFFFFF"/>
+                </a:solidFill>
+                <a:latin typeface="Arial"/>
+              </a:defRPr>
+            </a:pPr>
+            <a:r>
+              <a:t>Spanisch Klasse 7 · LP-01a</a:t>
+            </a:r>
+          </a:p>
+        </p:txBody>
+      </p:sp>
+      <p:sp>
+        <p:nvSpPr>
+          <p:cNvPr id="4" name="Rectangle 3"/>
+          <p:cNvSpPr/>
+          <p:nvPr/>
+        </p:nvSpPr>
+        <p:spPr>
+          <a:xfrm>
+            <a:off x="0" y="6583680"/>
+            <a:ext cx="12191695" cy="274320"/>
+          </a:xfrm>
+          <a:prstGeom prst="rect">
+            <a:avLst/>
+          </a:prstGeom>
+          <a:solidFill>
+            <a:srgbClr val="F5F5F5"/>
+          </a:solidFill>
+          <a:ln>
+            <a:noFill/>
+          </a:ln>
+        </p:spPr>
+        <p:style>
+          <a:lnRef idx="1">
+            <a:schemeClr val="accent1"/>
+          </a:lnRef>
+          <a:fillRef idx="3">
+            <a:schemeClr val="accent1"/>
+          </a:fillRef>
+          <a:effectRef idx="2">
+            <a:schemeClr val="accent1"/>
+          </a:effectRef>
+          <a:fontRef idx="minor">
+            <a:schemeClr val="lt1"/>
+          </a:fontRef>
+        </p:style>
+        <p:txBody>
+          <a:bodyPr rtlCol="0" anchor="ctr"/>
+          <a:lstStyle/>
+          <a:p>
+            <a:pPr algn="ctr"/>
+          </a:p>
+        </p:txBody>
+      </p:sp>
+      <p:sp>
+        <p:nvSpPr>
+          <p:cNvPr id="5" name="TextBox 4"/>
+          <p:cNvSpPr txBox="1"/>
+          <p:nvPr/>
+        </p:nvSpPr>
+        <p:spPr>
+          <a:xfrm>
+            <a:off x="274320" y="6601968"/>
+            <a:ext cx="4572000" cy="228600"/>
+          </a:xfrm>
+          <a:prstGeom prst="rect">
+            <a:avLst/>
+          </a:prstGeom>
+          <a:noFill/>
+        </p:spPr>
+        <p:txBody>
+          <a:bodyPr wrap="none">
+            <a:spAutoFit/>
+          </a:bodyPr>
+          <a:lstStyle/>
+          <a:p>
+            <a:pPr algn="l">
+              <a:defRPr sz="1000" b="0">
+                <a:solidFill>
+                  <a:srgbClr val="555555"/>
+                </a:solidFill>
+                <a:latin typeface="Arial"/>
+              </a:defRPr>
+            </a:pPr>
+            <a:r>
+              <a:t>¡Hola!</a:t>
+            </a:r>
+          </a:p>
+        </p:txBody>
+      </p:sp>
+      <p:sp>
+        <p:nvSpPr>
+          <p:cNvPr id="6" name="TextBox 5"/>
+          <p:cNvSpPr txBox="1"/>
+          <p:nvPr/>
+        </p:nvSpPr>
+        <p:spPr>
+          <a:xfrm>
+            <a:off x="9144000" y="6601968"/>
+            <a:ext cx="2743200" cy="228600"/>
+          </a:xfrm>
+          <a:prstGeom prst="rect">
+            <a:avLst/>
+          </a:prstGeom>
+          <a:noFill/>
+        </p:spPr>
+        <p:txBody>
+          <a:bodyPr wrap="none">
+            <a:spAutoFit/>
+          </a:bodyPr>
+          <a:lstStyle/>
+          <a:p>
+            <a:pPr algn="r">
+              <a:defRPr sz="1000" b="0">
+                <a:solidFill>
+                  <a:srgbClr val="555555"/>
+                </a:solidFill>
+                <a:latin typeface="Arial"/>
+              </a:defRPr>
+            </a:pPr>
+            <a:r>
+              <a:t>Sequenz 1</a:t>
+            </a:r>
+          </a:p>
+        </p:txBody>
+      </p:sp>
+      <p:sp>
+        <p:nvSpPr>
+          <p:cNvPr id="7" name="TextBox 6"/>
+          <p:cNvSpPr txBox="1"/>
+          <p:nvPr/>
+        </p:nvSpPr>
+        <p:spPr>
+          <a:xfrm>
+            <a:off x="457200" y="640080"/>
+            <a:ext cx="11274552" cy="731520"/>
+          </a:xfrm>
+          <a:prstGeom prst="rect">
+            <a:avLst/>
+          </a:prstGeom>
+          <a:noFill/>
+        </p:spPr>
+        <p:txBody>
+          <a:bodyPr wrap="none">
+            <a:spAutoFit/>
+          </a:bodyPr>
+          <a:lstStyle/>
+          <a:p>
+            <a:pPr algn="l">
+              <a:defRPr sz="3200" b="1">
+                <a:solidFill>
+                  <a:srgbClr val="C41E3A"/>
+                </a:solidFill>
+                <a:latin typeface="Arial"/>
+              </a:defRPr>
+            </a:pPr>
+            <a:r>
+              <a:t>📋 Zusammenfassung</a:t>
+            </a:r>
+          </a:p>
+        </p:txBody>
+      </p:sp>
+      <p:sp>
+        <p:nvSpPr>
+          <p:cNvPr id="8" name="TextBox 7"/>
+          <p:cNvSpPr txBox="1"/>
+          <p:nvPr/>
+        </p:nvSpPr>
+        <p:spPr>
+          <a:xfrm>
+            <a:off x="640080" y="1463040"/>
+            <a:ext cx="5029200" cy="457200"/>
+          </a:xfrm>
+          <a:prstGeom prst="rect">
+            <a:avLst/>
+          </a:prstGeom>
+          <a:noFill/>
+        </p:spPr>
+        <p:txBody>
+          <a:bodyPr wrap="none">
+            <a:spAutoFit/>
+          </a:bodyPr>
+          <a:lstStyle/>
+          <a:p>
+            <a:pPr algn="l">
+              <a:defRPr sz="2000" b="1">
+                <a:solidFill>
+                  <a:srgbClr val="C41E3A"/>
+                </a:solidFill>
+                <a:latin typeface="Arial"/>
+              </a:defRPr>
+            </a:pPr>
+            <a:r>
+              <a:t>Vokabeln</a:t>
+            </a:r>
+          </a:p>
+        </p:txBody>
+      </p:sp>
+      <p:sp>
+        <p:nvSpPr>
+          <p:cNvPr id="9" name="TextBox 8"/>
+          <p:cNvSpPr txBox="1"/>
+          <p:nvPr/>
+        </p:nvSpPr>
+        <p:spPr>
+          <a:xfrm>
+            <a:off x="822960" y="2011680"/>
+            <a:ext cx="4846320" cy="457200"/>
+          </a:xfrm>
+          <a:prstGeom prst="rect">
+            <a:avLst/>
+          </a:prstGeom>
+          <a:noFill/>
+        </p:spPr>
+        <p:txBody>
+          <a:bodyPr wrap="none">
+            <a:spAutoFit/>
+          </a:bodyPr>
+          <a:lstStyle/>
+          <a:p>
+            <a:pPr algn="l">
+              <a:defRPr sz="1800" b="0">
+                <a:solidFill>
+                  <a:srgbClr val="222222"/>
+                </a:solidFill>
+                <a:latin typeface="Arial"/>
+              </a:defRPr>
+            </a:pPr>
+            <a:r>
+              <a:t>•  ¡Hola! – Hallo</a:t>
+            </a:r>
+          </a:p>
+        </p:txBody>
+      </p:sp>
+      <p:sp>
+        <p:nvSpPr>
+          <p:cNvPr id="10" name="TextBox 9"/>
+          <p:cNvSpPr txBox="1"/>
+          <p:nvPr/>
+        </p:nvSpPr>
+        <p:spPr>
+          <a:xfrm>
+            <a:off x="822960" y="2560320"/>
+            <a:ext cx="4846320" cy="457200"/>
+          </a:xfrm>
+          <a:prstGeom prst="rect">
+            <a:avLst/>
+          </a:prstGeom>
+          <a:noFill/>
+        </p:spPr>
+        <p:txBody>
+          <a:bodyPr wrap="none">
+            <a:spAutoFit/>
+          </a:bodyPr>
+          <a:lstStyle/>
+          <a:p>
+            <a:pPr algn="l">
+              <a:defRPr sz="1800" b="0">
+                <a:solidFill>
+                  <a:srgbClr val="222222"/>
+                </a:solidFill>
+                <a:latin typeface="Arial"/>
+              </a:defRPr>
+            </a:pPr>
+            <a:r>
+              <a:t>•  Buenos días – Guten Morgen</a:t>
+            </a:r>
+          </a:p>
+        </p:txBody>
+      </p:sp>
+      <p:sp>
+        <p:nvSpPr>
+          <p:cNvPr id="11" name="TextBox 10"/>
+          <p:cNvSpPr txBox="1"/>
+          <p:nvPr/>
+        </p:nvSpPr>
+        <p:spPr>
+          <a:xfrm>
+            <a:off x="822960" y="3108960"/>
+            <a:ext cx="4846320" cy="457200"/>
+          </a:xfrm>
+          <a:prstGeom prst="rect">
+            <a:avLst/>
+          </a:prstGeom>
+          <a:noFill/>
+        </p:spPr>
+        <p:txBody>
+          <a:bodyPr wrap="none">
+            <a:spAutoFit/>
+          </a:bodyPr>
+          <a:lstStyle/>
+          <a:p>
+            <a:pPr algn="l">
+              <a:defRPr sz="1800" b="0">
+                <a:solidFill>
+                  <a:srgbClr val="222222"/>
+                </a:solidFill>
+                <a:latin typeface="Arial"/>
+              </a:defRPr>
+            </a:pPr>
+            <a:r>
+              <a:t>•  Buenas tardes – Guten Tag</a:t>
+            </a:r>
+          </a:p>
+        </p:txBody>
+      </p:sp>
+      <p:sp>
+        <p:nvSpPr>
+          <p:cNvPr id="12" name="TextBox 11"/>
+          <p:cNvSpPr txBox="1"/>
+          <p:nvPr/>
+        </p:nvSpPr>
+        <p:spPr>
+          <a:xfrm>
+            <a:off x="822960" y="3657600"/>
+            <a:ext cx="4846320" cy="457200"/>
+          </a:xfrm>
+          <a:prstGeom prst="rect">
+            <a:avLst/>
+          </a:prstGeom>
+          <a:noFill/>
+        </p:spPr>
+        <p:txBody>
+          <a:bodyPr wrap="none">
+            <a:spAutoFit/>
+          </a:bodyPr>
+          <a:lstStyle/>
+          <a:p>
+            <a:pPr algn="l">
+              <a:defRPr sz="1800" b="0">
+                <a:solidFill>
+                  <a:srgbClr val="222222"/>
+                </a:solidFill>
+                <a:latin typeface="Arial"/>
+              </a:defRPr>
+            </a:pPr>
+            <a:r>
+              <a:t>•  Buenas noches – Gute Nacht</a:t>
+            </a:r>
+          </a:p>
+        </p:txBody>
+      </p:sp>
+      <p:sp>
+        <p:nvSpPr>
+          <p:cNvPr id="13" name="TextBox 12"/>
+          <p:cNvSpPr txBox="1"/>
+          <p:nvPr/>
+        </p:nvSpPr>
+        <p:spPr>
+          <a:xfrm>
+            <a:off x="6400800" y="1463040"/>
+            <a:ext cx="5029200" cy="457200"/>
+          </a:xfrm>
+          <a:prstGeom prst="rect">
+            <a:avLst/>
+          </a:prstGeom>
+          <a:noFill/>
+        </p:spPr>
+        <p:txBody>
+          <a:bodyPr wrap="none">
+            <a:spAutoFit/>
+          </a:bodyPr>
+          <a:lstStyle/>
+          <a:p>
+            <a:pPr algn="l">
+              <a:defRPr sz="2000" b="1">
+                <a:solidFill>
+                  <a:srgbClr val="C41E3A"/>
+                </a:solidFill>
+                <a:latin typeface="Arial"/>
+              </a:defRPr>
+            </a:pPr>
+            <a:r>
+              <a:t>Grammatik</a:t>
+            </a:r>
+          </a:p>
+        </p:txBody>
+      </p:sp>
+      <p:sp>
+        <p:nvSpPr>
+          <p:cNvPr id="14" name="TextBox 13"/>
+          <p:cNvSpPr txBox="1"/>
+          <p:nvPr/>
+        </p:nvSpPr>
+        <p:spPr>
+          <a:xfrm>
+            <a:off x="6583680" y="2011680"/>
+            <a:ext cx="4846320" cy="457200"/>
+          </a:xfrm>
+          <a:prstGeom prst="rect">
+            <a:avLst/>
+          </a:prstGeom>
+          <a:noFill/>
+        </p:spPr>
+        <p:txBody>
+          <a:bodyPr wrap="none">
+            <a:spAutoFit/>
+          </a:bodyPr>
+          <a:lstStyle/>
+          <a:p>
+            <a:pPr algn="l">
+              <a:defRPr sz="1800" b="0">
+                <a:solidFill>
+                  <a:srgbClr val="222222"/>
+                </a:solidFill>
+                <a:latin typeface="Arial"/>
+              </a:defRPr>
+            </a:pPr>
+            <a:r>
+              <a:t>•  ¡Adiós! – Tschüss</a:t>
+            </a:r>
+          </a:p>
+        </p:txBody>
+      </p:sp>
+      <p:sp>
+        <p:nvSpPr>
+          <p:cNvPr id="15" name="TextBox 14"/>
+          <p:cNvSpPr txBox="1"/>
+          <p:nvPr/>
+        </p:nvSpPr>
+        <p:spPr>
+          <a:xfrm>
+            <a:off x="6583680" y="2560320"/>
+            <a:ext cx="4846320" cy="457200"/>
+          </a:xfrm>
+          <a:prstGeom prst="rect">
+            <a:avLst/>
+          </a:prstGeom>
+          <a:noFill/>
+        </p:spPr>
+        <p:txBody>
+          <a:bodyPr wrap="none">
+            <a:spAutoFit/>
+          </a:bodyPr>
+          <a:lstStyle/>
+          <a:p>
+            <a:pPr algn="l">
+              <a:defRPr sz="1800" b="0">
+                <a:solidFill>
+                  <a:srgbClr val="222222"/>
+                </a:solidFill>
+                <a:latin typeface="Arial"/>
+              </a:defRPr>
+            </a:pPr>
+            <a:r>
+              <a:t>•  ¡Hasta luego! – Bis später</a:t>
+            </a:r>
+          </a:p>
+        </p:txBody>
+      </p:sp>
+      <p:sp>
+        <p:nvSpPr>
+          <p:cNvPr id="16" name="TextBox 15"/>
+          <p:cNvSpPr txBox="1"/>
+          <p:nvPr/>
+        </p:nvSpPr>
+        <p:spPr>
+          <a:xfrm>
+            <a:off x="6583680" y="3108960"/>
+            <a:ext cx="4846320" cy="457200"/>
+          </a:xfrm>
+          <a:prstGeom prst="rect">
+            <a:avLst/>
+          </a:prstGeom>
+          <a:noFill/>
+        </p:spPr>
+        <p:txBody>
+          <a:bodyPr wrap="none">
+            <a:spAutoFit/>
+          </a:bodyPr>
+          <a:lstStyle/>
+          <a:p>
+            <a:pPr algn="l">
+              <a:defRPr sz="1800" b="0">
+                <a:solidFill>
+                  <a:srgbClr val="222222"/>
+                </a:solidFill>
+                <a:latin typeface="Arial"/>
+              </a:defRPr>
+            </a:pPr>
+            <a:r>
+              <a:t>•  ¡Hasta mañana! – Bis morgen</a:t>
+            </a:r>
+          </a:p>
+        </p:txBody>
+      </p:sp>
+    </p:spTree>
+  </p:cSld>
+  <p:clrMapOvr>
+    <a:masterClrMapping/>
+  </p:clrMapOvr>
+</p:sld>
+</file>
+
+<file path=ppt/slides/slide15.xml><?xml version="1.0" encoding="utf-8"?>
+<p:sld xmlns:a="http://schemas.openxmlformats.org/drawingml/2006/main" xmlns:p="http://schemas.openxmlformats.org/presentationml/2006/main" xmlns:r="http://schemas.openxmlformats.org/officeDocument/2006/relationships">
+  <p:cSld>
+    <p:spTree>
+      <p:nvGrpSpPr>
+        <p:cNvPr id="1" name=""/>
+        <p:cNvGrpSpPr/>
+        <p:nvPr/>
+      </p:nvGrpSpPr>
+      <p:grpSpPr/>
+      <p:sp>
+        <p:nvSpPr>
+          <p:cNvPr id="2" name="Rectangle 1"/>
+          <p:cNvSpPr/>
+          <p:nvPr/>
+        </p:nvSpPr>
+        <p:spPr>
+          <a:xfrm>
+            <a:off x="0" y="0"/>
+            <a:ext cx="12191695" cy="457200"/>
+          </a:xfrm>
+          <a:prstGeom prst="rect">
+            <a:avLst/>
+          </a:prstGeom>
+          <a:solidFill>
+            <a:srgbClr val="C41E3A"/>
+          </a:solidFill>
+          <a:ln>
+            <a:noFill/>
+          </a:ln>
+        </p:spPr>
+        <p:style>
+          <a:lnRef idx="1">
+            <a:schemeClr val="accent1"/>
+          </a:lnRef>
+          <a:fillRef idx="3">
+            <a:schemeClr val="accent1"/>
+          </a:fillRef>
+          <a:effectRef idx="2">
+            <a:schemeClr val="accent1"/>
+          </a:effectRef>
+          <a:fontRef idx="minor">
+            <a:schemeClr val="lt1"/>
+          </a:fontRef>
+        </p:style>
+        <p:txBody>
+          <a:bodyPr rtlCol="0" anchor="ctr"/>
+          <a:lstStyle/>
+          <a:p>
+            <a:pPr algn="ctr"/>
+          </a:p>
+        </p:txBody>
+      </p:sp>
+      <p:sp>
+        <p:nvSpPr>
+          <p:cNvPr id="3" name="TextBox 2"/>
+          <p:cNvSpPr txBox="1"/>
+          <p:nvPr/>
+        </p:nvSpPr>
+        <p:spPr>
+          <a:xfrm>
+            <a:off x="274320" y="91440"/>
+            <a:ext cx="3657600" cy="274320"/>
+          </a:xfrm>
+          <a:prstGeom prst="rect">
+            <a:avLst/>
+          </a:prstGeom>
+          <a:noFill/>
+        </p:spPr>
+        <p:txBody>
+          <a:bodyPr wrap="none">
+            <a:spAutoFit/>
+          </a:bodyPr>
+          <a:lstStyle/>
+          <a:p>
+            <a:pPr algn="l">
+              <a:defRPr sz="1400" b="1">
+                <a:solidFill>
+                  <a:srgbClr val="FFFFFF"/>
+                </a:solidFill>
+                <a:latin typeface="Arial"/>
+              </a:defRPr>
+            </a:pPr>
+            <a:r>
+              <a:t>Spanisch Klasse 7 · LP-01a</a:t>
+            </a:r>
+          </a:p>
+        </p:txBody>
+      </p:sp>
+      <p:sp>
+        <p:nvSpPr>
+          <p:cNvPr id="4" name="Rectangle 3"/>
+          <p:cNvSpPr/>
+          <p:nvPr/>
+        </p:nvSpPr>
+        <p:spPr>
+          <a:xfrm>
+            <a:off x="0" y="6583680"/>
+            <a:ext cx="12191695" cy="274320"/>
+          </a:xfrm>
+          <a:prstGeom prst="rect">
+            <a:avLst/>
+          </a:prstGeom>
+          <a:solidFill>
+            <a:srgbClr val="F5F5F5"/>
+          </a:solidFill>
+          <a:ln>
+            <a:noFill/>
+          </a:ln>
+        </p:spPr>
+        <p:style>
+          <a:lnRef idx="1">
+            <a:schemeClr val="accent1"/>
+          </a:lnRef>
+          <a:fillRef idx="3">
+            <a:schemeClr val="accent1"/>
+          </a:fillRef>
+          <a:effectRef idx="2">
+            <a:schemeClr val="accent1"/>
+          </a:effectRef>
+          <a:fontRef idx="minor">
+            <a:schemeClr val="lt1"/>
+          </a:fontRef>
+        </p:style>
+        <p:txBody>
+          <a:bodyPr rtlCol="0" anchor="ctr"/>
+          <a:lstStyle/>
+          <a:p>
+            <a:pPr algn="ctr"/>
+          </a:p>
+        </p:txBody>
+      </p:sp>
+      <p:sp>
+        <p:nvSpPr>
+          <p:cNvPr id="5" name="TextBox 4"/>
+          <p:cNvSpPr txBox="1"/>
+          <p:nvPr/>
+        </p:nvSpPr>
+        <p:spPr>
+          <a:xfrm>
+            <a:off x="274320" y="6601968"/>
+            <a:ext cx="4572000" cy="228600"/>
+          </a:xfrm>
+          <a:prstGeom prst="rect">
+            <a:avLst/>
+          </a:prstGeom>
+          <a:noFill/>
+        </p:spPr>
+        <p:txBody>
+          <a:bodyPr wrap="none">
+            <a:spAutoFit/>
+          </a:bodyPr>
+          <a:lstStyle/>
+          <a:p>
+            <a:pPr algn="l">
+              <a:defRPr sz="1000" b="0">
+                <a:solidFill>
+                  <a:srgbClr val="555555"/>
+                </a:solidFill>
+                <a:latin typeface="Arial"/>
+              </a:defRPr>
+            </a:pPr>
+            <a:r>
+              <a:t>¡Hola!</a:t>
+            </a:r>
+          </a:p>
+        </p:txBody>
+      </p:sp>
+      <p:sp>
+        <p:nvSpPr>
+          <p:cNvPr id="6" name="TextBox 5"/>
+          <p:cNvSpPr txBox="1"/>
+          <p:nvPr/>
+        </p:nvSpPr>
+        <p:spPr>
+          <a:xfrm>
+            <a:off x="9144000" y="6601968"/>
+            <a:ext cx="2743200" cy="228600"/>
+          </a:xfrm>
+          <a:prstGeom prst="rect">
+            <a:avLst/>
+          </a:prstGeom>
+          <a:noFill/>
+        </p:spPr>
+        <p:txBody>
+          <a:bodyPr wrap="none">
+            <a:spAutoFit/>
+          </a:bodyPr>
+          <a:lstStyle/>
+          <a:p>
+            <a:pPr algn="r">
+              <a:defRPr sz="1000" b="0">
+                <a:solidFill>
+                  <a:srgbClr val="555555"/>
+                </a:solidFill>
+                <a:latin typeface="Arial"/>
+              </a:defRPr>
+            </a:pPr>
+            <a:r>
+              <a:t>Sequenz 1</a:t>
+            </a:r>
+          </a:p>
+        </p:txBody>
+      </p:sp>
+      <p:sp>
+        <p:nvSpPr>
+          <p:cNvPr id="7" name="Rectangle 6"/>
+          <p:cNvSpPr/>
+          <p:nvPr/>
+        </p:nvSpPr>
+        <p:spPr>
+          <a:xfrm>
+            <a:off x="457200" y="640080"/>
+            <a:ext cx="1828800" cy="457200"/>
+          </a:xfrm>
+          <a:prstGeom prst="rect">
+            <a:avLst/>
+          </a:prstGeom>
+          <a:solidFill>
+            <a:srgbClr val="C41E3A"/>
+          </a:solidFill>
+          <a:ln>
+            <a:noFill/>
+          </a:ln>
+        </p:spPr>
+        <p:style>
+          <a:lnRef idx="1">
+            <a:schemeClr val="accent1"/>
+          </a:lnRef>
+          <a:fillRef idx="3">
+            <a:schemeClr val="accent1"/>
+          </a:fillRef>
+          <a:effectRef idx="2">
+            <a:schemeClr val="accent1"/>
+          </a:effectRef>
+          <a:fontRef idx="minor">
+            <a:schemeClr val="lt1"/>
+          </a:fontRef>
+        </p:style>
+        <p:txBody>
+          <a:bodyPr rtlCol="0" anchor="ctr"/>
+          <a:lstStyle/>
+          <a:p>
+            <a:pPr algn="ctr"/>
+          </a:p>
+        </p:txBody>
+      </p:sp>
+      <p:sp>
+        <p:nvSpPr>
+          <p:cNvPr id="8" name="TextBox 7"/>
+          <p:cNvSpPr txBox="1"/>
+          <p:nvPr/>
+        </p:nvSpPr>
+        <p:spPr>
+          <a:xfrm>
+            <a:off x="548640" y="713231"/>
+            <a:ext cx="1645920" cy="320040"/>
+          </a:xfrm>
+          <a:prstGeom prst="rect">
+            <a:avLst/>
+          </a:prstGeom>
+          <a:noFill/>
+        </p:spPr>
+        <p:txBody>
+          <a:bodyPr wrap="none">
+            <a:spAutoFit/>
+          </a:bodyPr>
+          <a:lstStyle/>
+          <a:p>
+            <a:pPr algn="ctr">
+              <a:defRPr sz="1400" b="1">
+                <a:solidFill>
+                  <a:srgbClr val="FFFFFF"/>
+                </a:solidFill>
+                <a:latin typeface="Arial"/>
+              </a:defRPr>
+            </a:pPr>
+            <a:r>
+              <a:t>HAUSAUFGABE</a:t>
+            </a:r>
+          </a:p>
+        </p:txBody>
+      </p:sp>
+      <p:sp>
+        <p:nvSpPr>
+          <p:cNvPr id="9" name="TextBox 8"/>
+          <p:cNvSpPr txBox="1"/>
+          <p:nvPr/>
+        </p:nvSpPr>
+        <p:spPr>
+          <a:xfrm>
+            <a:off x="457200" y="1280160"/>
+            <a:ext cx="11274552" cy="731520"/>
+          </a:xfrm>
+          <a:prstGeom prst="rect">
+            <a:avLst/>
+          </a:prstGeom>
+          <a:noFill/>
+        </p:spPr>
+        <p:txBody>
+          <a:bodyPr wrap="none">
+            <a:spAutoFit/>
+          </a:bodyPr>
+          <a:lstStyle/>
+          <a:p>
+            <a:pPr algn="l">
+              <a:defRPr sz="3200" b="1">
+                <a:solidFill>
+                  <a:srgbClr val="C41E3A"/>
+                </a:solidFill>
+                <a:latin typeface="Arial"/>
+              </a:defRPr>
+            </a:pPr>
+            <a:r>
+              <a:t>📚 Para casa</a:t>
+            </a:r>
+          </a:p>
+        </p:txBody>
+      </p:sp>
+      <p:sp>
+        <p:nvSpPr>
+          <p:cNvPr id="10" name="TextBox 9"/>
+          <p:cNvSpPr txBox="1"/>
+          <p:nvPr/>
+        </p:nvSpPr>
+        <p:spPr>
+          <a:xfrm>
+            <a:off x="640080" y="2103120"/>
+            <a:ext cx="457200" cy="457200"/>
+          </a:xfrm>
+          <a:prstGeom prst="rect">
+            <a:avLst/>
+          </a:prstGeom>
+          <a:noFill/>
+        </p:spPr>
+        <p:txBody>
+          <a:bodyPr wrap="none">
+            <a:spAutoFit/>
+          </a:bodyPr>
+          <a:lstStyle/>
+          <a:p>
+            <a:pPr algn="l">
+              <a:defRPr sz="2400" b="1">
+                <a:solidFill>
+                  <a:srgbClr val="2A7A4B"/>
+                </a:solidFill>
+                <a:latin typeface="Arial"/>
+              </a:defRPr>
+            </a:pPr>
+            <a:r>
+              <a:t>✓</a:t>
+            </a:r>
+          </a:p>
+        </p:txBody>
+      </p:sp>
+      <p:sp>
+        <p:nvSpPr>
+          <p:cNvPr id="11" name="TextBox 10"/>
+          <p:cNvSpPr txBox="1"/>
+          <p:nvPr/>
+        </p:nvSpPr>
+        <p:spPr>
+          <a:xfrm>
+            <a:off x="1188720" y="2103120"/>
+            <a:ext cx="10058400" cy="457200"/>
+          </a:xfrm>
+          <a:prstGeom prst="rect">
+            <a:avLst/>
+          </a:prstGeom>
+          <a:noFill/>
+        </p:spPr>
+        <p:txBody>
+          <a:bodyPr wrap="none">
+            <a:spAutoFit/>
+          </a:bodyPr>
+          <a:lstStyle/>
+          <a:p>
+            <a:pPr algn="l">
+              <a:defRPr sz="2000" b="0">
+                <a:solidFill>
+                  <a:srgbClr val="222222"/>
+                </a:solidFill>
+                <a:latin typeface="Arial"/>
+              </a:defRPr>
+            </a:pPr>
+            <a:r>
+              <a:t>AB-01a vollständig ausfüllen</a:t>
+            </a:r>
+          </a:p>
+        </p:txBody>
+      </p:sp>
+      <p:sp>
+        <p:nvSpPr>
+          <p:cNvPr id="12" name="TextBox 11"/>
+          <p:cNvSpPr txBox="1"/>
+          <p:nvPr/>
+        </p:nvSpPr>
+        <p:spPr>
+          <a:xfrm>
+            <a:off x="640080" y="2926079"/>
+            <a:ext cx="457200" cy="457200"/>
+          </a:xfrm>
+          <a:prstGeom prst="rect">
+            <a:avLst/>
+          </a:prstGeom>
+          <a:noFill/>
+        </p:spPr>
+        <p:txBody>
+          <a:bodyPr wrap="none">
+            <a:spAutoFit/>
+          </a:bodyPr>
+          <a:lstStyle/>
+          <a:p>
+            <a:pPr algn="l">
+              <a:defRPr sz="2400" b="1">
+                <a:solidFill>
+                  <a:srgbClr val="2A7A4B"/>
+                </a:solidFill>
+                <a:latin typeface="Arial"/>
+              </a:defRPr>
+            </a:pPr>
+            <a:r>
+              <a:t>✓</a:t>
+            </a:r>
+          </a:p>
+        </p:txBody>
+      </p:sp>
+      <p:sp>
+        <p:nvSpPr>
+          <p:cNvPr id="13" name="TextBox 12"/>
+          <p:cNvSpPr txBox="1"/>
+          <p:nvPr/>
+        </p:nvSpPr>
+        <p:spPr>
+          <a:xfrm>
+            <a:off x="1188720" y="2926079"/>
+            <a:ext cx="10058400" cy="457200"/>
+          </a:xfrm>
+          <a:prstGeom prst="rect">
+            <a:avLst/>
+          </a:prstGeom>
+          <a:noFill/>
+        </p:spPr>
+        <p:txBody>
+          <a:bodyPr wrap="none">
+            <a:spAutoFit/>
+          </a:bodyPr>
+          <a:lstStyle/>
+          <a:p>
+            <a:pPr algn="l">
+              <a:defRPr sz="2000" b="0">
+                <a:solidFill>
+                  <a:srgbClr val="222222"/>
+                </a:solidFill>
+                <a:latin typeface="Arial"/>
+              </a:defRPr>
+            </a:pPr>
+            <a:r>
+              <a:t>Begrüßungsvokabeln auswendig lernen</a:t>
+            </a:r>
+          </a:p>
+        </p:txBody>
+      </p:sp>
+      <p:sp>
+        <p:nvSpPr>
+          <p:cNvPr id="14" name="TextBox 13"/>
+          <p:cNvSpPr txBox="1"/>
+          <p:nvPr/>
+        </p:nvSpPr>
+        <p:spPr>
+          <a:xfrm>
+            <a:off x="640080" y="3749039"/>
+            <a:ext cx="457200" cy="457200"/>
+          </a:xfrm>
+          <a:prstGeom prst="rect">
+            <a:avLst/>
+          </a:prstGeom>
+          <a:noFill/>
+        </p:spPr>
+        <p:txBody>
+          <a:bodyPr wrap="none">
+            <a:spAutoFit/>
+          </a:bodyPr>
+          <a:lstStyle/>
+          <a:p>
+            <a:pPr algn="l">
+              <a:defRPr sz="2400" b="1">
+                <a:solidFill>
+                  <a:srgbClr val="2A7A4B"/>
+                </a:solidFill>
+                <a:latin typeface="Arial"/>
+              </a:defRPr>
+            </a:pPr>
+            <a:r>
+              <a:t>✓</a:t>
+            </a:r>
+          </a:p>
+        </p:txBody>
+      </p:sp>
+      <p:sp>
+        <p:nvSpPr>
+          <p:cNvPr id="15" name="TextBox 14"/>
+          <p:cNvSpPr txBox="1"/>
+          <p:nvPr/>
+        </p:nvSpPr>
+        <p:spPr>
+          <a:xfrm>
+            <a:off x="1188720" y="3749039"/>
+            <a:ext cx="10058400" cy="457200"/>
+          </a:xfrm>
+          <a:prstGeom prst="rect">
+            <a:avLst/>
+          </a:prstGeom>
+          <a:noFill/>
+        </p:spPr>
+        <p:txBody>
+          <a:bodyPr wrap="none">
+            <a:spAutoFit/>
+          </a:bodyPr>
+          <a:lstStyle/>
+          <a:p>
+            <a:pPr algn="l">
+              <a:defRPr sz="2000" b="0">
+                <a:solidFill>
+                  <a:srgbClr val="222222"/>
+                </a:solidFill>
+                <a:latin typeface="Arial"/>
+              </a:defRPr>
+            </a:pPr>
+            <a:r>
+              <a:t>Sonderzeichen ¡ ¿ üben</a:t>
+            </a:r>
+          </a:p>
+        </p:txBody>
+      </p:sp>
+      <p:sp>
+        <p:nvSpPr>
+          <p:cNvPr id="16" name="TextBox 15"/>
+          <p:cNvSpPr txBox="1"/>
+          <p:nvPr/>
+        </p:nvSpPr>
+        <p:spPr>
+          <a:xfrm>
+            <a:off x="457200" y="5760720"/>
+            <a:ext cx="11274552" cy="548640"/>
+          </a:xfrm>
+          <a:prstGeom prst="rect">
+            <a:avLst/>
+          </a:prstGeom>
+          <a:noFill/>
+        </p:spPr>
+        <p:txBody>
+          <a:bodyPr wrap="none">
+            <a:spAutoFit/>
+          </a:bodyPr>
+          <a:lstStyle/>
+          <a:p>
+            <a:pPr algn="ctr">
+              <a:defRPr sz="3200" b="1">
+                <a:solidFill>
+                  <a:srgbClr val="C41E3A"/>
+                </a:solidFill>
+                <a:latin typeface="Arial"/>
+              </a:defRPr>
+            </a:pPr>
+            <a:r>
+              <a:t>¡Hasta luego!</a:t>
+            </a:r>
+          </a:p>
+        </p:txBody>
+      </p:sp>
+    </p:spTree>
+  </p:cSld>
+  <p:clrMapOvr>
+    <a:masterClrMapping/>
+  </p:clrMapOvr>
+</p:sld>
+</file>
+
 <file path=ppt/slides/slide2.xml><?xml version="1.0" encoding="utf-8"?>
 <p:sld xmlns:a="http://schemas.openxmlformats.org/drawingml/2006/main" xmlns:p="http://schemas.openxmlformats.org/presentationml/2006/main" xmlns:r="http://schemas.openxmlformats.org/officeDocument/2006/relationships">
   <p:cSld>
@@ -3561,7 +7089,7 @@
               </a:defRPr>
             </a:pPr>
             <a:r>
-              <a:t>🌍 Wo spricht man Spanisch?</a:t>
+              <a:t>Lernziele</a:t>
             </a:r>
           </a:p>
         </p:txBody>
@@ -3574,76 +7102,67 @@
         </p:nvSpPr>
         <p:spPr>
           <a:xfrm>
-            <a:off x="457200" y="1188720"/>
-            <a:ext cx="11274552" cy="457200"/>
-          </a:xfrm>
-          <a:prstGeom prst="rect">
-            <a:avLst/>
-          </a:prstGeom>
-          <a:noFill/>
-        </p:spPr>
-        <p:txBody>
-          <a:bodyPr wrap="none">
-            <a:spAutoFit/>
-          </a:bodyPr>
-          <a:lstStyle/>
-          <a:p>
-            <a:pPr algn="l">
-              <a:defRPr sz="1800" b="0">
-                <a:solidFill>
-                  <a:srgbClr val="555555"/>
-                </a:solidFill>
-                <a:latin typeface="Arial"/>
-              </a:defRPr>
-            </a:pPr>
-            <a:r>
-              <a:t>21 Länder, 480 Mio. Sprecher</a:t>
-            </a:r>
-          </a:p>
-        </p:txBody>
-      </p:sp>
-      <p:sp>
-        <p:nvSpPr>
-          <p:cNvPr id="9" name="Rectangle 8"/>
-          <p:cNvSpPr/>
-          <p:nvPr/>
-        </p:nvSpPr>
-        <p:spPr>
-          <a:xfrm>
-            <a:off x="1371600" y="1828800"/>
-            <a:ext cx="9144000" cy="4114800"/>
-          </a:xfrm>
-          <a:prstGeom prst="rect">
-            <a:avLst/>
-          </a:prstGeom>
-          <a:solidFill>
-            <a:srgbClr val="F5F5F5"/>
-          </a:solidFill>
-          <a:ln>
-            <a:solidFill>
-              <a:srgbClr val="555555"/>
-            </a:solidFill>
-          </a:ln>
-        </p:spPr>
-        <p:style>
-          <a:lnRef idx="1">
-            <a:schemeClr val="accent1"/>
-          </a:lnRef>
-          <a:fillRef idx="3">
-            <a:schemeClr val="accent1"/>
-          </a:fillRef>
-          <a:effectRef idx="2">
-            <a:schemeClr val="accent1"/>
-          </a:effectRef>
-          <a:fontRef idx="minor">
-            <a:schemeClr val="lt1"/>
-          </a:fontRef>
-        </p:style>
-        <p:txBody>
-          <a:bodyPr rtlCol="0" anchor="ctr"/>
-          <a:lstStyle/>
-          <a:p>
-            <a:pPr algn="ctr"/>
+            <a:off x="640080" y="1463040"/>
+            <a:ext cx="10972800" cy="548640"/>
+          </a:xfrm>
+          <a:prstGeom prst="rect">
+            <a:avLst/>
+          </a:prstGeom>
+          <a:noFill/>
+        </p:spPr>
+        <p:txBody>
+          <a:bodyPr wrap="none">
+            <a:spAutoFit/>
+          </a:bodyPr>
+          <a:lstStyle/>
+          <a:p>
+            <a:pPr algn="l">
+              <a:defRPr sz="2000" b="0">
+                <a:solidFill>
+                  <a:srgbClr val="222222"/>
+                </a:solidFill>
+                <a:latin typeface="Arial"/>
+              </a:defRPr>
+            </a:pPr>
+            <a:r>
+              <a:t>Begrüßen und verabschieden auf Spanisch</a:t>
+            </a:r>
+          </a:p>
+        </p:txBody>
+      </p:sp>
+      <p:sp>
+        <p:nvSpPr>
+          <p:cNvPr id="9" name="TextBox 8"/>
+          <p:cNvSpPr txBox="1"/>
+          <p:nvPr/>
+        </p:nvSpPr>
+        <p:spPr>
+          <a:xfrm>
+            <a:off x="640080" y="2194560"/>
+            <a:ext cx="10972800" cy="548640"/>
+          </a:xfrm>
+          <a:prstGeom prst="rect">
+            <a:avLst/>
+          </a:prstGeom>
+          <a:noFill/>
+        </p:spPr>
+        <p:txBody>
+          <a:bodyPr wrap="none">
+            <a:spAutoFit/>
+          </a:bodyPr>
+          <a:lstStyle/>
+          <a:p>
+            <a:pPr algn="l">
+              <a:defRPr sz="2000" b="0">
+                <a:solidFill>
+                  <a:srgbClr val="222222"/>
+                </a:solidFill>
+                <a:latin typeface="Arial"/>
+              </a:defRPr>
+            </a:pPr>
+            <a:r>
+              <a:t>Tageszeiten unterscheiden</a:t>
+            </a:r>
           </a:p>
         </p:txBody>
       </p:sp>
@@ -3655,30 +7174,30 @@
         </p:nvSpPr>
         <p:spPr>
           <a:xfrm>
-            <a:off x="4572000" y="3657600"/>
-            <a:ext cx="3657600" cy="457200"/>
-          </a:xfrm>
-          <a:prstGeom prst="rect">
-            <a:avLst/>
-          </a:prstGeom>
-          <a:noFill/>
-        </p:spPr>
-        <p:txBody>
-          <a:bodyPr wrap="none">
-            <a:spAutoFit/>
-          </a:bodyPr>
-          <a:lstStyle/>
-          <a:p>
-            <a:pPr algn="ctr">
-              <a:defRPr sz="1600" b="0">
-                <a:solidFill>
-                  <a:srgbClr val="555555"/>
-                </a:solidFill>
-                <a:latin typeface="Arial"/>
-              </a:defRPr>
-            </a:pPr>
-            <a:r>
-              <a:t>[Bild nicht gefunden]</a:t>
+            <a:off x="640080" y="2926080"/>
+            <a:ext cx="10972800" cy="548640"/>
+          </a:xfrm>
+          <a:prstGeom prst="rect">
+            <a:avLst/>
+          </a:prstGeom>
+          <a:noFill/>
+        </p:spPr>
+        <p:txBody>
+          <a:bodyPr wrap="none">
+            <a:spAutoFit/>
+          </a:bodyPr>
+          <a:lstStyle/>
+          <a:p>
+            <a:pPr algn="l">
+              <a:defRPr sz="2000" b="0">
+                <a:solidFill>
+                  <a:srgbClr val="222222"/>
+                </a:solidFill>
+                <a:latin typeface="Arial"/>
+              </a:defRPr>
+            </a:pPr>
+            <a:r>
+              <a:t>Spanische Sonderzeichen kennen</a:t>
             </a:r>
           </a:p>
         </p:txBody>
@@ -3926,577 +7445,43 @@
               </a:defRPr>
             </a:pPr>
             <a:r>
-              <a:t>📚 Begrüßen</a:t>
-            </a:r>
-          </a:p>
-        </p:txBody>
-      </p:sp>
-      <p:sp>
-        <p:nvSpPr>
-          <p:cNvPr id="8" name="Rectangle 7"/>
-          <p:cNvSpPr/>
-          <p:nvPr/>
-        </p:nvSpPr>
-        <p:spPr>
-          <a:xfrm>
-            <a:off x="457200" y="1371600"/>
-            <a:ext cx="11274552" cy="594360"/>
-          </a:xfrm>
-          <a:prstGeom prst="rect">
-            <a:avLst/>
-          </a:prstGeom>
-          <a:solidFill>
-            <a:srgbClr val="C41E3A"/>
-          </a:solidFill>
-          <a:ln>
-            <a:noFill/>
-          </a:ln>
-        </p:spPr>
-        <p:style>
-          <a:lnRef idx="1">
-            <a:schemeClr val="accent1"/>
-          </a:lnRef>
-          <a:fillRef idx="3">
-            <a:schemeClr val="accent1"/>
-          </a:fillRef>
-          <a:effectRef idx="2">
-            <a:schemeClr val="accent1"/>
-          </a:effectRef>
-          <a:fontRef idx="minor">
-            <a:schemeClr val="lt1"/>
-          </a:fontRef>
-        </p:style>
-        <p:txBody>
-          <a:bodyPr rtlCol="0" anchor="ctr"/>
-          <a:lstStyle/>
-          <a:p>
-            <a:pPr algn="ctr"/>
-          </a:p>
-        </p:txBody>
-      </p:sp>
-      <p:sp>
-        <p:nvSpPr>
-          <p:cNvPr id="9" name="TextBox 8"/>
-          <p:cNvSpPr txBox="1"/>
-          <p:nvPr/>
-        </p:nvSpPr>
-        <p:spPr>
-          <a:xfrm>
-            <a:off x="640080" y="1481328"/>
-            <a:ext cx="5029200" cy="365760"/>
-          </a:xfrm>
-          <a:prstGeom prst="rect">
-            <a:avLst/>
-          </a:prstGeom>
-          <a:noFill/>
-        </p:spPr>
-        <p:txBody>
-          <a:bodyPr wrap="none">
-            <a:spAutoFit/>
-          </a:bodyPr>
-          <a:lstStyle/>
-          <a:p>
-            <a:pPr algn="l">
-              <a:defRPr sz="1800" b="1">
-                <a:solidFill>
-                  <a:srgbClr val="FFFFFF"/>
-                </a:solidFill>
-                <a:latin typeface="Arial"/>
-              </a:defRPr>
-            </a:pPr>
-            <a:r>
-              <a:t>Spanisch</a:t>
-            </a:r>
-          </a:p>
-        </p:txBody>
-      </p:sp>
-      <p:sp>
-        <p:nvSpPr>
-          <p:cNvPr id="10" name="TextBox 9"/>
-          <p:cNvSpPr txBox="1"/>
-          <p:nvPr/>
-        </p:nvSpPr>
-        <p:spPr>
-          <a:xfrm>
-            <a:off x="5943600" y="1481328"/>
-            <a:ext cx="5029200" cy="365760"/>
-          </a:xfrm>
-          <a:prstGeom prst="rect">
-            <a:avLst/>
-          </a:prstGeom>
-          <a:noFill/>
-        </p:spPr>
-        <p:txBody>
-          <a:bodyPr wrap="none">
-            <a:spAutoFit/>
-          </a:bodyPr>
-          <a:lstStyle/>
-          <a:p>
-            <a:pPr algn="l">
-              <a:defRPr sz="1800" b="1">
-                <a:solidFill>
-                  <a:srgbClr val="FFFFFF"/>
-                </a:solidFill>
-                <a:latin typeface="Arial"/>
-              </a:defRPr>
-            </a:pPr>
-            <a:r>
-              <a:t>Deutsch</a:t>
-            </a:r>
-          </a:p>
-        </p:txBody>
-      </p:sp>
-      <p:sp>
-        <p:nvSpPr>
-          <p:cNvPr id="11" name="TextBox 10"/>
-          <p:cNvSpPr txBox="1"/>
-          <p:nvPr/>
-        </p:nvSpPr>
-        <p:spPr>
-          <a:xfrm>
-            <a:off x="640080" y="2075688"/>
-            <a:ext cx="5029200" cy="365760"/>
-          </a:xfrm>
-          <a:prstGeom prst="rect">
-            <a:avLst/>
-          </a:prstGeom>
-          <a:noFill/>
-        </p:spPr>
-        <p:txBody>
-          <a:bodyPr wrap="none">
-            <a:spAutoFit/>
-          </a:bodyPr>
-          <a:lstStyle/>
-          <a:p>
-            <a:pPr algn="l">
-              <a:defRPr sz="2000" b="1">
-                <a:solidFill>
-                  <a:srgbClr val="C41E3A"/>
-                </a:solidFill>
-                <a:latin typeface="Arial"/>
-              </a:defRPr>
-            </a:pPr>
-            <a:r>
-              <a:t>¡Hola!</a:t>
-            </a:r>
-          </a:p>
-        </p:txBody>
-      </p:sp>
-      <p:sp>
-        <p:nvSpPr>
-          <p:cNvPr id="12" name="TextBox 11"/>
-          <p:cNvSpPr txBox="1"/>
-          <p:nvPr/>
-        </p:nvSpPr>
-        <p:spPr>
-          <a:xfrm>
-            <a:off x="5943600" y="2075688"/>
-            <a:ext cx="5029200" cy="365760"/>
-          </a:xfrm>
-          <a:prstGeom prst="rect">
-            <a:avLst/>
-          </a:prstGeom>
-          <a:noFill/>
-        </p:spPr>
-        <p:txBody>
-          <a:bodyPr wrap="none">
-            <a:spAutoFit/>
-          </a:bodyPr>
-          <a:lstStyle/>
-          <a:p>
-            <a:pPr algn="l">
-              <a:defRPr sz="2000" b="0">
-                <a:solidFill>
-                  <a:srgbClr val="222222"/>
-                </a:solidFill>
-                <a:latin typeface="Arial"/>
-              </a:defRPr>
-            </a:pPr>
-            <a:r>
-              <a:t>Hallo!</a:t>
-            </a:r>
-          </a:p>
-        </p:txBody>
-      </p:sp>
-      <p:sp>
-        <p:nvSpPr>
-          <p:cNvPr id="13" name="Rectangle 12"/>
-          <p:cNvSpPr/>
-          <p:nvPr/>
-        </p:nvSpPr>
-        <p:spPr>
-          <a:xfrm>
-            <a:off x="457200" y="2560320"/>
-            <a:ext cx="11274552" cy="594360"/>
-          </a:xfrm>
-          <a:prstGeom prst="rect">
-            <a:avLst/>
-          </a:prstGeom>
-          <a:solidFill>
-            <a:srgbClr val="F5F5F5"/>
-          </a:solidFill>
-          <a:ln>
-            <a:noFill/>
-          </a:ln>
-        </p:spPr>
-        <p:style>
-          <a:lnRef idx="1">
-            <a:schemeClr val="accent1"/>
-          </a:lnRef>
-          <a:fillRef idx="3">
-            <a:schemeClr val="accent1"/>
-          </a:fillRef>
-          <a:effectRef idx="2">
-            <a:schemeClr val="accent1"/>
-          </a:effectRef>
-          <a:fontRef idx="minor">
-            <a:schemeClr val="lt1"/>
-          </a:fontRef>
-        </p:style>
-        <p:txBody>
-          <a:bodyPr rtlCol="0" anchor="ctr"/>
-          <a:lstStyle/>
-          <a:p>
-            <a:pPr algn="ctr"/>
-          </a:p>
-        </p:txBody>
-      </p:sp>
-      <p:sp>
-        <p:nvSpPr>
-          <p:cNvPr id="14" name="TextBox 13"/>
-          <p:cNvSpPr txBox="1"/>
-          <p:nvPr/>
-        </p:nvSpPr>
-        <p:spPr>
-          <a:xfrm>
-            <a:off x="640080" y="2670048"/>
-            <a:ext cx="5029200" cy="365760"/>
-          </a:xfrm>
-          <a:prstGeom prst="rect">
-            <a:avLst/>
-          </a:prstGeom>
-          <a:noFill/>
-        </p:spPr>
-        <p:txBody>
-          <a:bodyPr wrap="none">
-            <a:spAutoFit/>
-          </a:bodyPr>
-          <a:lstStyle/>
-          <a:p>
-            <a:pPr algn="l">
-              <a:defRPr sz="2000" b="1">
-                <a:solidFill>
-                  <a:srgbClr val="C41E3A"/>
-                </a:solidFill>
-                <a:latin typeface="Arial"/>
-              </a:defRPr>
-            </a:pPr>
-            <a:r>
-              <a:t>Buenos días</a:t>
-            </a:r>
-          </a:p>
-        </p:txBody>
-      </p:sp>
-      <p:sp>
-        <p:nvSpPr>
-          <p:cNvPr id="15" name="TextBox 14"/>
-          <p:cNvSpPr txBox="1"/>
-          <p:nvPr/>
-        </p:nvSpPr>
-        <p:spPr>
-          <a:xfrm>
-            <a:off x="5943600" y="2670048"/>
-            <a:ext cx="5029200" cy="365760"/>
-          </a:xfrm>
-          <a:prstGeom prst="rect">
-            <a:avLst/>
-          </a:prstGeom>
-          <a:noFill/>
-        </p:spPr>
-        <p:txBody>
-          <a:bodyPr wrap="none">
-            <a:spAutoFit/>
-          </a:bodyPr>
-          <a:lstStyle/>
-          <a:p>
-            <a:pPr algn="l">
-              <a:defRPr sz="2000" b="0">
-                <a:solidFill>
-                  <a:srgbClr val="222222"/>
-                </a:solidFill>
-                <a:latin typeface="Arial"/>
-              </a:defRPr>
-            </a:pPr>
-            <a:r>
-              <a:t>Guten Morgen</a:t>
-            </a:r>
-          </a:p>
-        </p:txBody>
-      </p:sp>
-      <p:sp>
-        <p:nvSpPr>
-          <p:cNvPr id="16" name="TextBox 15"/>
-          <p:cNvSpPr txBox="1"/>
-          <p:nvPr/>
-        </p:nvSpPr>
-        <p:spPr>
-          <a:xfrm>
-            <a:off x="640080" y="3264408"/>
-            <a:ext cx="5029200" cy="365760"/>
-          </a:xfrm>
-          <a:prstGeom prst="rect">
-            <a:avLst/>
-          </a:prstGeom>
-          <a:noFill/>
-        </p:spPr>
-        <p:txBody>
-          <a:bodyPr wrap="none">
-            <a:spAutoFit/>
-          </a:bodyPr>
-          <a:lstStyle/>
-          <a:p>
-            <a:pPr algn="l">
-              <a:defRPr sz="2000" b="1">
-                <a:solidFill>
-                  <a:srgbClr val="C41E3A"/>
-                </a:solidFill>
-                <a:latin typeface="Arial"/>
-              </a:defRPr>
-            </a:pPr>
-            <a:r>
-              <a:t>Buenas tardes</a:t>
-            </a:r>
-          </a:p>
-        </p:txBody>
-      </p:sp>
-      <p:sp>
-        <p:nvSpPr>
-          <p:cNvPr id="17" name="TextBox 16"/>
-          <p:cNvSpPr txBox="1"/>
-          <p:nvPr/>
-        </p:nvSpPr>
-        <p:spPr>
-          <a:xfrm>
-            <a:off x="5943600" y="3264408"/>
-            <a:ext cx="5029200" cy="365760"/>
-          </a:xfrm>
-          <a:prstGeom prst="rect">
-            <a:avLst/>
-          </a:prstGeom>
-          <a:noFill/>
-        </p:spPr>
-        <p:txBody>
-          <a:bodyPr wrap="none">
-            <a:spAutoFit/>
-          </a:bodyPr>
-          <a:lstStyle/>
-          <a:p>
-            <a:pPr algn="l">
-              <a:defRPr sz="2000" b="0">
-                <a:solidFill>
-                  <a:srgbClr val="222222"/>
-                </a:solidFill>
-                <a:latin typeface="Arial"/>
-              </a:defRPr>
-            </a:pPr>
-            <a:r>
-              <a:t>Guten Tag</a:t>
-            </a:r>
-          </a:p>
-        </p:txBody>
-      </p:sp>
-      <p:sp>
-        <p:nvSpPr>
-          <p:cNvPr id="18" name="Rectangle 17"/>
-          <p:cNvSpPr/>
-          <p:nvPr/>
-        </p:nvSpPr>
-        <p:spPr>
-          <a:xfrm>
-            <a:off x="457200" y="3749039"/>
-            <a:ext cx="11274552" cy="594360"/>
-          </a:xfrm>
-          <a:prstGeom prst="rect">
-            <a:avLst/>
-          </a:prstGeom>
-          <a:solidFill>
-            <a:srgbClr val="F5F5F5"/>
-          </a:solidFill>
-          <a:ln>
-            <a:noFill/>
-          </a:ln>
-        </p:spPr>
-        <p:style>
-          <a:lnRef idx="1">
-            <a:schemeClr val="accent1"/>
-          </a:lnRef>
-          <a:fillRef idx="3">
-            <a:schemeClr val="accent1"/>
-          </a:fillRef>
-          <a:effectRef idx="2">
-            <a:schemeClr val="accent1"/>
-          </a:effectRef>
-          <a:fontRef idx="minor">
-            <a:schemeClr val="lt1"/>
-          </a:fontRef>
-        </p:style>
-        <p:txBody>
-          <a:bodyPr rtlCol="0" anchor="ctr"/>
-          <a:lstStyle/>
-          <a:p>
-            <a:pPr algn="ctr"/>
-          </a:p>
-        </p:txBody>
-      </p:sp>
-      <p:sp>
-        <p:nvSpPr>
-          <p:cNvPr id="19" name="TextBox 18"/>
-          <p:cNvSpPr txBox="1"/>
-          <p:nvPr/>
-        </p:nvSpPr>
-        <p:spPr>
-          <a:xfrm>
-            <a:off x="640080" y="3858768"/>
-            <a:ext cx="5029200" cy="365760"/>
-          </a:xfrm>
-          <a:prstGeom prst="rect">
-            <a:avLst/>
-          </a:prstGeom>
-          <a:noFill/>
-        </p:spPr>
-        <p:txBody>
-          <a:bodyPr wrap="none">
-            <a:spAutoFit/>
-          </a:bodyPr>
-          <a:lstStyle/>
-          <a:p>
-            <a:pPr algn="l">
-              <a:defRPr sz="2000" b="1">
-                <a:solidFill>
-                  <a:srgbClr val="C41E3A"/>
-                </a:solidFill>
-                <a:latin typeface="Arial"/>
-              </a:defRPr>
-            </a:pPr>
-            <a:r>
-              <a:t>Buenas noches</a:t>
-            </a:r>
-          </a:p>
-        </p:txBody>
-      </p:sp>
-      <p:sp>
-        <p:nvSpPr>
-          <p:cNvPr id="20" name="TextBox 19"/>
-          <p:cNvSpPr txBox="1"/>
-          <p:nvPr/>
-        </p:nvSpPr>
-        <p:spPr>
-          <a:xfrm>
-            <a:off x="5943600" y="3858768"/>
-            <a:ext cx="5029200" cy="365760"/>
-          </a:xfrm>
-          <a:prstGeom prst="rect">
-            <a:avLst/>
-          </a:prstGeom>
-          <a:noFill/>
-        </p:spPr>
-        <p:txBody>
-          <a:bodyPr wrap="none">
-            <a:spAutoFit/>
-          </a:bodyPr>
-          <a:lstStyle/>
-          <a:p>
-            <a:pPr algn="l">
-              <a:defRPr sz="2000" b="0">
-                <a:solidFill>
-                  <a:srgbClr val="222222"/>
-                </a:solidFill>
-                <a:latin typeface="Arial"/>
-              </a:defRPr>
-            </a:pPr>
-            <a:r>
-              <a:t>Guten Abend</a:t>
-            </a:r>
-          </a:p>
-        </p:txBody>
-      </p:sp>
-      <p:sp>
-        <p:nvSpPr>
-          <p:cNvPr id="21" name="Rectangle 20"/>
-          <p:cNvSpPr/>
-          <p:nvPr/>
-        </p:nvSpPr>
-        <p:spPr>
-          <a:xfrm>
-            <a:off x="457200" y="5943600"/>
-            <a:ext cx="11274552" cy="548640"/>
-          </a:xfrm>
-          <a:prstGeom prst="rect">
-            <a:avLst/>
-          </a:prstGeom>
-          <a:solidFill>
-            <a:srgbClr val="FDF2F4"/>
-          </a:solidFill>
-          <a:ln>
-            <a:solidFill>
-              <a:srgbClr val="C41E3A"/>
-            </a:solidFill>
-          </a:ln>
-        </p:spPr>
-        <p:style>
-          <a:lnRef idx="1">
-            <a:schemeClr val="accent1"/>
-          </a:lnRef>
-          <a:fillRef idx="3">
-            <a:schemeClr val="accent1"/>
-          </a:fillRef>
-          <a:effectRef idx="2">
-            <a:schemeClr val="accent1"/>
-          </a:effectRef>
-          <a:fontRef idx="minor">
-            <a:schemeClr val="lt1"/>
-          </a:fontRef>
-        </p:style>
-        <p:txBody>
-          <a:bodyPr rtlCol="0" anchor="ctr"/>
-          <a:lstStyle/>
-          <a:p>
-            <a:pPr algn="ctr"/>
-          </a:p>
-        </p:txBody>
-      </p:sp>
-      <p:sp>
-        <p:nvSpPr>
-          <p:cNvPr id="22" name="TextBox 21"/>
-          <p:cNvSpPr txBox="1"/>
-          <p:nvPr/>
-        </p:nvSpPr>
-        <p:spPr>
-          <a:xfrm>
-            <a:off x="640080" y="6053328"/>
-            <a:ext cx="10972800" cy="365760"/>
-          </a:xfrm>
-          <a:prstGeom prst="rect">
-            <a:avLst/>
-          </a:prstGeom>
-          <a:noFill/>
-        </p:spPr>
-        <p:txBody>
-          <a:bodyPr wrap="none">
-            <a:spAutoFit/>
-          </a:bodyPr>
-          <a:lstStyle/>
-          <a:p>
-            <a:pPr algn="l">
-              <a:defRPr sz="1400" b="1">
-                <a:solidFill>
-                  <a:srgbClr val="C41E3A"/>
-                </a:solidFill>
-                <a:latin typeface="Arial"/>
-              </a:defRPr>
-            </a:pPr>
-            <a:r>
-              <a:t>📝 AB-01a: Kasten 1</a:t>
+              <a:t>🌍 Wo spricht man Spanisch?</a:t>
+            </a:r>
+          </a:p>
+        </p:txBody>
+      </p:sp>
+      <p:sp>
+        <p:nvSpPr>
+          <p:cNvPr id="8" name="TextBox 7"/>
+          <p:cNvSpPr txBox="1"/>
+          <p:nvPr/>
+        </p:nvSpPr>
+        <p:spPr>
+          <a:xfrm>
+            <a:off x="457200" y="1188720"/>
+            <a:ext cx="11274552" cy="457200"/>
+          </a:xfrm>
+          <a:prstGeom prst="rect">
+            <a:avLst/>
+          </a:prstGeom>
+          <a:noFill/>
+        </p:spPr>
+        <p:txBody>
+          <a:bodyPr wrap="none">
+            <a:spAutoFit/>
+          </a:bodyPr>
+          <a:lstStyle/>
+          <a:p>
+            <a:pPr algn="l">
+              <a:defRPr sz="1800" b="0">
+                <a:solidFill>
+                  <a:srgbClr val="555555"/>
+                </a:solidFill>
+                <a:latin typeface="Arial"/>
+              </a:defRPr>
+            </a:pPr>
+            <a:r>
+              <a:t>21 Länder, 480 Mio. Sprecher weltweit</a:t>
             </a:r>
           </a:p>
         </p:txBody>
@@ -4744,51 +7729,44 @@
               </a:defRPr>
             </a:pPr>
             <a:r>
-              <a:t>📚 Verabschieden</a:t>
-            </a:r>
-          </a:p>
-        </p:txBody>
-      </p:sp>
-      <p:sp>
-        <p:nvSpPr>
-          <p:cNvPr id="8" name="Rectangle 7"/>
-          <p:cNvSpPr/>
-          <p:nvPr/>
-        </p:nvSpPr>
-        <p:spPr>
-          <a:xfrm>
-            <a:off x="457200" y="1371600"/>
-            <a:ext cx="11274552" cy="594360"/>
-          </a:xfrm>
-          <a:prstGeom prst="rect">
-            <a:avLst/>
-          </a:prstGeom>
-          <a:solidFill>
-            <a:srgbClr val="C41E3A"/>
-          </a:solidFill>
-          <a:ln>
-            <a:noFill/>
-          </a:ln>
-        </p:spPr>
-        <p:style>
-          <a:lnRef idx="1">
-            <a:schemeClr val="accent1"/>
-          </a:lnRef>
-          <a:fillRef idx="3">
-            <a:schemeClr val="accent1"/>
-          </a:fillRef>
-          <a:effectRef idx="2">
-            <a:schemeClr val="accent1"/>
-          </a:effectRef>
-          <a:fontRef idx="minor">
-            <a:schemeClr val="lt1"/>
-          </a:fontRef>
-        </p:style>
-        <p:txBody>
-          <a:bodyPr rtlCol="0" anchor="ctr"/>
-          <a:lstStyle/>
-          <a:p>
-            <a:pPr algn="ctr"/>
+              <a:t>Die spanischsprachige Welt</a:t>
+            </a:r>
+          </a:p>
+        </p:txBody>
+      </p:sp>
+      <p:sp>
+        <p:nvSpPr>
+          <p:cNvPr id="8" name="TextBox 7"/>
+          <p:cNvSpPr txBox="1"/>
+          <p:nvPr/>
+        </p:nvSpPr>
+        <p:spPr>
+          <a:xfrm>
+            <a:off x="640080" y="1463040"/>
+            <a:ext cx="10972800" cy="548640"/>
+          </a:xfrm>
+          <a:prstGeom prst="rect">
+            <a:avLst/>
+          </a:prstGeom>
+          <a:noFill/>
+        </p:spPr>
+        <p:txBody>
+          <a:bodyPr wrap="none">
+            <a:spAutoFit/>
+          </a:bodyPr>
+          <a:lstStyle/>
+          <a:p>
+            <a:pPr algn="l">
+              <a:defRPr sz="2000" b="0">
+                <a:solidFill>
+                  <a:srgbClr val="222222"/>
+                </a:solidFill>
+                <a:latin typeface="Arial"/>
+              </a:defRPr>
+            </a:pPr>
+            <a:r>
+              <a:t>Spanien (Europa)</a:t>
+            </a:r>
           </a:p>
         </p:txBody>
       </p:sp>
@@ -4800,30 +7778,30 @@
         </p:nvSpPr>
         <p:spPr>
           <a:xfrm>
-            <a:off x="640080" y="1481328"/>
-            <a:ext cx="5029200" cy="365760"/>
-          </a:xfrm>
-          <a:prstGeom prst="rect">
-            <a:avLst/>
-          </a:prstGeom>
-          <a:noFill/>
-        </p:spPr>
-        <p:txBody>
-          <a:bodyPr wrap="none">
-            <a:spAutoFit/>
-          </a:bodyPr>
-          <a:lstStyle/>
-          <a:p>
-            <a:pPr algn="l">
-              <a:defRPr sz="1800" b="1">
-                <a:solidFill>
-                  <a:srgbClr val="FFFFFF"/>
-                </a:solidFill>
-                <a:latin typeface="Arial"/>
-              </a:defRPr>
-            </a:pPr>
-            <a:r>
-              <a:t>Spanisch</a:t>
+            <a:off x="640080" y="2194560"/>
+            <a:ext cx="10972800" cy="548640"/>
+          </a:xfrm>
+          <a:prstGeom prst="rect">
+            <a:avLst/>
+          </a:prstGeom>
+          <a:noFill/>
+        </p:spPr>
+        <p:txBody>
+          <a:bodyPr wrap="none">
+            <a:spAutoFit/>
+          </a:bodyPr>
+          <a:lstStyle/>
+          <a:p>
+            <a:pPr algn="l">
+              <a:defRPr sz="2000" b="0">
+                <a:solidFill>
+                  <a:srgbClr val="222222"/>
+                </a:solidFill>
+                <a:latin typeface="Arial"/>
+              </a:defRPr>
+            </a:pPr>
+            <a:r>
+              <a:t>Mexiko, Argentinien, Chile... (Lateinamerika)</a:t>
             </a:r>
           </a:p>
         </p:txBody>
@@ -4836,80 +7814,8 @@
         </p:nvSpPr>
         <p:spPr>
           <a:xfrm>
-            <a:off x="5943600" y="1481328"/>
-            <a:ext cx="5029200" cy="365760"/>
-          </a:xfrm>
-          <a:prstGeom prst="rect">
-            <a:avLst/>
-          </a:prstGeom>
-          <a:noFill/>
-        </p:spPr>
-        <p:txBody>
-          <a:bodyPr wrap="none">
-            <a:spAutoFit/>
-          </a:bodyPr>
-          <a:lstStyle/>
-          <a:p>
-            <a:pPr algn="l">
-              <a:defRPr sz="1800" b="1">
-                <a:solidFill>
-                  <a:srgbClr val="FFFFFF"/>
-                </a:solidFill>
-                <a:latin typeface="Arial"/>
-              </a:defRPr>
-            </a:pPr>
-            <a:r>
-              <a:t>Deutsch</a:t>
-            </a:r>
-          </a:p>
-        </p:txBody>
-      </p:sp>
-      <p:sp>
-        <p:nvSpPr>
-          <p:cNvPr id="11" name="TextBox 10"/>
-          <p:cNvSpPr txBox="1"/>
-          <p:nvPr/>
-        </p:nvSpPr>
-        <p:spPr>
-          <a:xfrm>
-            <a:off x="640080" y="2075688"/>
-            <a:ext cx="5029200" cy="365760"/>
-          </a:xfrm>
-          <a:prstGeom prst="rect">
-            <a:avLst/>
-          </a:prstGeom>
-          <a:noFill/>
-        </p:spPr>
-        <p:txBody>
-          <a:bodyPr wrap="none">
-            <a:spAutoFit/>
-          </a:bodyPr>
-          <a:lstStyle/>
-          <a:p>
-            <a:pPr algn="l">
-              <a:defRPr sz="2000" b="1">
-                <a:solidFill>
-                  <a:srgbClr val="C41E3A"/>
-                </a:solidFill>
-                <a:latin typeface="Arial"/>
-              </a:defRPr>
-            </a:pPr>
-            <a:r>
-              <a:t>¡Adiós!</a:t>
-            </a:r>
-          </a:p>
-        </p:txBody>
-      </p:sp>
-      <p:sp>
-        <p:nvSpPr>
-          <p:cNvPr id="12" name="TextBox 11"/>
-          <p:cNvSpPr txBox="1"/>
-          <p:nvPr/>
-        </p:nvSpPr>
-        <p:spPr>
-          <a:xfrm>
-            <a:off x="5943600" y="2075688"/>
-            <a:ext cx="5029200" cy="365760"/>
+            <a:off x="640080" y="2926080"/>
+            <a:ext cx="10972800" cy="548640"/>
           </a:xfrm>
           <a:prstGeom prst="rect">
             <a:avLst/>
@@ -4931,275 +7837,7 @@
               </a:defRPr>
             </a:pPr>
             <a:r>
-              <a:t>Tschüss!</a:t>
-            </a:r>
-          </a:p>
-        </p:txBody>
-      </p:sp>
-      <p:sp>
-        <p:nvSpPr>
-          <p:cNvPr id="13" name="Rectangle 12"/>
-          <p:cNvSpPr/>
-          <p:nvPr/>
-        </p:nvSpPr>
-        <p:spPr>
-          <a:xfrm>
-            <a:off x="457200" y="2560320"/>
-            <a:ext cx="11274552" cy="594360"/>
-          </a:xfrm>
-          <a:prstGeom prst="rect">
-            <a:avLst/>
-          </a:prstGeom>
-          <a:solidFill>
-            <a:srgbClr val="F5F5F5"/>
-          </a:solidFill>
-          <a:ln>
-            <a:noFill/>
-          </a:ln>
-        </p:spPr>
-        <p:style>
-          <a:lnRef idx="1">
-            <a:schemeClr val="accent1"/>
-          </a:lnRef>
-          <a:fillRef idx="3">
-            <a:schemeClr val="accent1"/>
-          </a:fillRef>
-          <a:effectRef idx="2">
-            <a:schemeClr val="accent1"/>
-          </a:effectRef>
-          <a:fontRef idx="minor">
-            <a:schemeClr val="lt1"/>
-          </a:fontRef>
-        </p:style>
-        <p:txBody>
-          <a:bodyPr rtlCol="0" anchor="ctr"/>
-          <a:lstStyle/>
-          <a:p>
-            <a:pPr algn="ctr"/>
-          </a:p>
-        </p:txBody>
-      </p:sp>
-      <p:sp>
-        <p:nvSpPr>
-          <p:cNvPr id="14" name="TextBox 13"/>
-          <p:cNvSpPr txBox="1"/>
-          <p:nvPr/>
-        </p:nvSpPr>
-        <p:spPr>
-          <a:xfrm>
-            <a:off x="640080" y="2670048"/>
-            <a:ext cx="5029200" cy="365760"/>
-          </a:xfrm>
-          <a:prstGeom prst="rect">
-            <a:avLst/>
-          </a:prstGeom>
-          <a:noFill/>
-        </p:spPr>
-        <p:txBody>
-          <a:bodyPr wrap="none">
-            <a:spAutoFit/>
-          </a:bodyPr>
-          <a:lstStyle/>
-          <a:p>
-            <a:pPr algn="l">
-              <a:defRPr sz="2000" b="1">
-                <a:solidFill>
-                  <a:srgbClr val="C41E3A"/>
-                </a:solidFill>
-                <a:latin typeface="Arial"/>
-              </a:defRPr>
-            </a:pPr>
-            <a:r>
-              <a:t>¡Hasta luego!</a:t>
-            </a:r>
-          </a:p>
-        </p:txBody>
-      </p:sp>
-      <p:sp>
-        <p:nvSpPr>
-          <p:cNvPr id="15" name="TextBox 14"/>
-          <p:cNvSpPr txBox="1"/>
-          <p:nvPr/>
-        </p:nvSpPr>
-        <p:spPr>
-          <a:xfrm>
-            <a:off x="5943600" y="2670048"/>
-            <a:ext cx="5029200" cy="365760"/>
-          </a:xfrm>
-          <a:prstGeom prst="rect">
-            <a:avLst/>
-          </a:prstGeom>
-          <a:noFill/>
-        </p:spPr>
-        <p:txBody>
-          <a:bodyPr wrap="none">
-            <a:spAutoFit/>
-          </a:bodyPr>
-          <a:lstStyle/>
-          <a:p>
-            <a:pPr algn="l">
-              <a:defRPr sz="2000" b="0">
-                <a:solidFill>
-                  <a:srgbClr val="222222"/>
-                </a:solidFill>
-                <a:latin typeface="Arial"/>
-              </a:defRPr>
-            </a:pPr>
-            <a:r>
-              <a:t>Bis später!</a:t>
-            </a:r>
-          </a:p>
-        </p:txBody>
-      </p:sp>
-      <p:sp>
-        <p:nvSpPr>
-          <p:cNvPr id="16" name="TextBox 15"/>
-          <p:cNvSpPr txBox="1"/>
-          <p:nvPr/>
-        </p:nvSpPr>
-        <p:spPr>
-          <a:xfrm>
-            <a:off x="640080" y="3264408"/>
-            <a:ext cx="5029200" cy="365760"/>
-          </a:xfrm>
-          <a:prstGeom prst="rect">
-            <a:avLst/>
-          </a:prstGeom>
-          <a:noFill/>
-        </p:spPr>
-        <p:txBody>
-          <a:bodyPr wrap="none">
-            <a:spAutoFit/>
-          </a:bodyPr>
-          <a:lstStyle/>
-          <a:p>
-            <a:pPr algn="l">
-              <a:defRPr sz="2000" b="1">
-                <a:solidFill>
-                  <a:srgbClr val="C41E3A"/>
-                </a:solidFill>
-                <a:latin typeface="Arial"/>
-              </a:defRPr>
-            </a:pPr>
-            <a:r>
-              <a:t>¡Hasta mañana!</a:t>
-            </a:r>
-          </a:p>
-        </p:txBody>
-      </p:sp>
-      <p:sp>
-        <p:nvSpPr>
-          <p:cNvPr id="17" name="TextBox 16"/>
-          <p:cNvSpPr txBox="1"/>
-          <p:nvPr/>
-        </p:nvSpPr>
-        <p:spPr>
-          <a:xfrm>
-            <a:off x="5943600" y="3264408"/>
-            <a:ext cx="5029200" cy="365760"/>
-          </a:xfrm>
-          <a:prstGeom prst="rect">
-            <a:avLst/>
-          </a:prstGeom>
-          <a:noFill/>
-        </p:spPr>
-        <p:txBody>
-          <a:bodyPr wrap="none">
-            <a:spAutoFit/>
-          </a:bodyPr>
-          <a:lstStyle/>
-          <a:p>
-            <a:pPr algn="l">
-              <a:defRPr sz="2000" b="0">
-                <a:solidFill>
-                  <a:srgbClr val="222222"/>
-                </a:solidFill>
-                <a:latin typeface="Arial"/>
-              </a:defRPr>
-            </a:pPr>
-            <a:r>
-              <a:t>Bis morgen!</a:t>
-            </a:r>
-          </a:p>
-        </p:txBody>
-      </p:sp>
-      <p:sp>
-        <p:nvSpPr>
-          <p:cNvPr id="18" name="Rectangle 17"/>
-          <p:cNvSpPr/>
-          <p:nvPr/>
-        </p:nvSpPr>
-        <p:spPr>
-          <a:xfrm>
-            <a:off x="457200" y="5943600"/>
-            <a:ext cx="11274552" cy="548640"/>
-          </a:xfrm>
-          <a:prstGeom prst="rect">
-            <a:avLst/>
-          </a:prstGeom>
-          <a:solidFill>
-            <a:srgbClr val="FDF2F4"/>
-          </a:solidFill>
-          <a:ln>
-            <a:solidFill>
-              <a:srgbClr val="C41E3A"/>
-            </a:solidFill>
-          </a:ln>
-        </p:spPr>
-        <p:style>
-          <a:lnRef idx="1">
-            <a:schemeClr val="accent1"/>
-          </a:lnRef>
-          <a:fillRef idx="3">
-            <a:schemeClr val="accent1"/>
-          </a:fillRef>
-          <a:effectRef idx="2">
-            <a:schemeClr val="accent1"/>
-          </a:effectRef>
-          <a:fontRef idx="minor">
-            <a:schemeClr val="lt1"/>
-          </a:fontRef>
-        </p:style>
-        <p:txBody>
-          <a:bodyPr rtlCol="0" anchor="ctr"/>
-          <a:lstStyle/>
-          <a:p>
-            <a:pPr algn="ctr"/>
-          </a:p>
-        </p:txBody>
-      </p:sp>
-      <p:sp>
-        <p:nvSpPr>
-          <p:cNvPr id="19" name="TextBox 18"/>
-          <p:cNvSpPr txBox="1"/>
-          <p:nvPr/>
-        </p:nvSpPr>
-        <p:spPr>
-          <a:xfrm>
-            <a:off x="640080" y="6053328"/>
-            <a:ext cx="10972800" cy="365760"/>
-          </a:xfrm>
-          <a:prstGeom prst="rect">
-            <a:avLst/>
-          </a:prstGeom>
-          <a:noFill/>
-        </p:spPr>
-        <p:txBody>
-          <a:bodyPr wrap="none">
-            <a:spAutoFit/>
-          </a:bodyPr>
-          <a:lstStyle/>
-          <a:p>
-            <a:pPr algn="l">
-              <a:defRPr sz="1400" b="1">
-                <a:solidFill>
-                  <a:srgbClr val="C41E3A"/>
-                </a:solidFill>
-                <a:latin typeface="Arial"/>
-              </a:defRPr>
-            </a:pPr>
-            <a:r>
-              <a:t>📝 AB-01a: Kasten 2</a:t>
+              <a:t>USA: 40 Mio. Sprecher!</a:t>
             </a:r>
           </a:p>
         </p:txBody>
@@ -5447,176 +8085,30 @@
               </a:defRPr>
             </a:pPr>
             <a:r>
-              <a:t>📝 Grammatik</a:t>
-            </a:r>
-          </a:p>
-        </p:txBody>
-      </p:sp>
-      <p:sp>
-        <p:nvSpPr>
-          <p:cNvPr id="8" name="TextBox 7"/>
-          <p:cNvSpPr txBox="1"/>
-          <p:nvPr/>
-        </p:nvSpPr>
-        <p:spPr>
-          <a:xfrm>
-            <a:off x="640080" y="1463040"/>
-            <a:ext cx="5029200" cy="731520"/>
-          </a:xfrm>
-          <a:prstGeom prst="rect">
-            <a:avLst/>
-          </a:prstGeom>
-          <a:noFill/>
-        </p:spPr>
-        <p:txBody>
-          <a:bodyPr wrap="none">
-            <a:spAutoFit/>
-          </a:bodyPr>
-          <a:lstStyle/>
-          <a:p>
-            <a:pPr algn="l">
-              <a:defRPr sz="2800" b="1">
-                <a:solidFill>
-                  <a:srgbClr val="C41E3A"/>
-                </a:solidFill>
-                <a:latin typeface="Arial"/>
-              </a:defRPr>
-            </a:pPr>
-            <a:r>
-              <a:t>Buenos días</a:t>
-            </a:r>
-          </a:p>
-        </p:txBody>
-      </p:sp>
-      <p:sp>
-        <p:nvSpPr>
-          <p:cNvPr id="9" name="TextBox 8"/>
-          <p:cNvSpPr txBox="1"/>
-          <p:nvPr/>
-        </p:nvSpPr>
-        <p:spPr>
-          <a:xfrm>
-            <a:off x="5943600" y="1554480"/>
-            <a:ext cx="5486400" cy="548640"/>
-          </a:xfrm>
-          <a:prstGeom prst="rect">
-            <a:avLst/>
-          </a:prstGeom>
-          <a:noFill/>
-        </p:spPr>
-        <p:txBody>
-          <a:bodyPr wrap="none">
-            <a:spAutoFit/>
-          </a:bodyPr>
-          <a:lstStyle/>
-          <a:p>
-            <a:pPr algn="l">
-              <a:defRPr sz="1800" b="0">
-                <a:solidFill>
-                  <a:srgbClr val="555555"/>
-                </a:solidFill>
-                <a:latin typeface="Arial"/>
-              </a:defRPr>
-            </a:pPr>
-            <a:r>
-              <a:t>← maskulin</a:t>
-            </a:r>
-          </a:p>
-        </p:txBody>
-      </p:sp>
-      <p:sp>
-        <p:nvSpPr>
-          <p:cNvPr id="10" name="TextBox 9"/>
-          <p:cNvSpPr txBox="1"/>
-          <p:nvPr/>
-        </p:nvSpPr>
-        <p:spPr>
-          <a:xfrm>
-            <a:off x="640080" y="2560320"/>
-            <a:ext cx="5029200" cy="731520"/>
-          </a:xfrm>
-          <a:prstGeom prst="rect">
-            <a:avLst/>
-          </a:prstGeom>
-          <a:noFill/>
-        </p:spPr>
-        <p:txBody>
-          <a:bodyPr wrap="none">
-            <a:spAutoFit/>
-          </a:bodyPr>
-          <a:lstStyle/>
-          <a:p>
-            <a:pPr algn="l">
-              <a:defRPr sz="2800" b="1">
-                <a:solidFill>
-                  <a:srgbClr val="C41E3A"/>
-                </a:solidFill>
-                <a:latin typeface="Arial"/>
-              </a:defRPr>
-            </a:pPr>
-            <a:r>
-              <a:t>Buenas tardes</a:t>
-            </a:r>
-          </a:p>
-        </p:txBody>
-      </p:sp>
-      <p:sp>
-        <p:nvSpPr>
-          <p:cNvPr id="11" name="TextBox 10"/>
-          <p:cNvSpPr txBox="1"/>
-          <p:nvPr/>
-        </p:nvSpPr>
-        <p:spPr>
-          <a:xfrm>
-            <a:off x="5943600" y="2651760"/>
-            <a:ext cx="5486400" cy="548640"/>
-          </a:xfrm>
-          <a:prstGeom prst="rect">
-            <a:avLst/>
-          </a:prstGeom>
-          <a:noFill/>
-        </p:spPr>
-        <p:txBody>
-          <a:bodyPr wrap="none">
-            <a:spAutoFit/>
-          </a:bodyPr>
-          <a:lstStyle/>
-          <a:p>
-            <a:pPr algn="l">
-              <a:defRPr sz="1800" b="0">
-                <a:solidFill>
-                  <a:srgbClr val="555555"/>
-                </a:solidFill>
-                <a:latin typeface="Arial"/>
-              </a:defRPr>
-            </a:pPr>
-            <a:r>
-              <a:t>← feminin</a:t>
-            </a:r>
-          </a:p>
-        </p:txBody>
-      </p:sp>
-      <p:sp>
-        <p:nvSpPr>
-          <p:cNvPr id="12" name="Rectangle 11"/>
+              <a:t>📚 Begrüßen am Tag</a:t>
+            </a:r>
+          </a:p>
+        </p:txBody>
+      </p:sp>
+      <p:sp>
+        <p:nvSpPr>
+          <p:cNvPr id="8" name="Rectangle 7"/>
           <p:cNvSpPr/>
           <p:nvPr/>
         </p:nvSpPr>
         <p:spPr>
           <a:xfrm>
-            <a:off x="457200" y="5029200"/>
-            <a:ext cx="11274552" cy="1097280"/>
+            <a:off x="457200" y="1371600"/>
+            <a:ext cx="11274552" cy="594360"/>
           </a:xfrm>
           <a:prstGeom prst="rect">
             <a:avLst/>
           </a:prstGeom>
           <a:solidFill>
-            <a:srgbClr val="FFF8F0"/>
+            <a:srgbClr val="C41E3A"/>
           </a:solidFill>
           <a:ln>
-            <a:solidFill>
-              <a:srgbClr val="B35C00"/>
-            </a:solidFill>
+            <a:noFill/>
           </a:ln>
         </p:spPr>
         <p:style>
@@ -5643,28 +8135,136 @@
       </p:sp>
       <p:sp>
         <p:nvSpPr>
-          <p:cNvPr id="13" name="TextBox 12"/>
-          <p:cNvSpPr txBox="1"/>
-          <p:nvPr/>
-        </p:nvSpPr>
-        <p:spPr>
-          <a:xfrm>
-            <a:off x="640080" y="5212080"/>
-            <a:ext cx="10972800" cy="731520"/>
-          </a:xfrm>
-          <a:prstGeom prst="rect">
-            <a:avLst/>
-          </a:prstGeom>
-          <a:noFill/>
-        </p:spPr>
-        <p:txBody>
-          <a:bodyPr wrap="none">
-            <a:spAutoFit/>
-          </a:bodyPr>
-          <a:lstStyle/>
-          <a:p>
-            <a:pPr algn="l">
-              <a:defRPr sz="1600" b="0">
+          <p:cNvPr id="9" name="TextBox 8"/>
+          <p:cNvSpPr txBox="1"/>
+          <p:nvPr/>
+        </p:nvSpPr>
+        <p:spPr>
+          <a:xfrm>
+            <a:off x="640080" y="1481328"/>
+            <a:ext cx="5029200" cy="365760"/>
+          </a:xfrm>
+          <a:prstGeom prst="rect">
+            <a:avLst/>
+          </a:prstGeom>
+          <a:noFill/>
+        </p:spPr>
+        <p:txBody>
+          <a:bodyPr wrap="none">
+            <a:spAutoFit/>
+          </a:bodyPr>
+          <a:lstStyle/>
+          <a:p>
+            <a:pPr algn="l">
+              <a:defRPr sz="1800" b="1">
+                <a:solidFill>
+                  <a:srgbClr val="FFFFFF"/>
+                </a:solidFill>
+                <a:latin typeface="Arial"/>
+              </a:defRPr>
+            </a:pPr>
+            <a:r>
+              <a:t>Spanisch</a:t>
+            </a:r>
+          </a:p>
+        </p:txBody>
+      </p:sp>
+      <p:sp>
+        <p:nvSpPr>
+          <p:cNvPr id="10" name="TextBox 9"/>
+          <p:cNvSpPr txBox="1"/>
+          <p:nvPr/>
+        </p:nvSpPr>
+        <p:spPr>
+          <a:xfrm>
+            <a:off x="5943600" y="1481328"/>
+            <a:ext cx="5029200" cy="365760"/>
+          </a:xfrm>
+          <a:prstGeom prst="rect">
+            <a:avLst/>
+          </a:prstGeom>
+          <a:noFill/>
+        </p:spPr>
+        <p:txBody>
+          <a:bodyPr wrap="none">
+            <a:spAutoFit/>
+          </a:bodyPr>
+          <a:lstStyle/>
+          <a:p>
+            <a:pPr algn="l">
+              <a:defRPr sz="1800" b="1">
+                <a:solidFill>
+                  <a:srgbClr val="FFFFFF"/>
+                </a:solidFill>
+                <a:latin typeface="Arial"/>
+              </a:defRPr>
+            </a:pPr>
+            <a:r>
+              <a:t>Deutsch</a:t>
+            </a:r>
+          </a:p>
+        </p:txBody>
+      </p:sp>
+      <p:sp>
+        <p:nvSpPr>
+          <p:cNvPr id="11" name="TextBox 10"/>
+          <p:cNvSpPr txBox="1"/>
+          <p:nvPr/>
+        </p:nvSpPr>
+        <p:spPr>
+          <a:xfrm>
+            <a:off x="640080" y="2075688"/>
+            <a:ext cx="5029200" cy="365760"/>
+          </a:xfrm>
+          <a:prstGeom prst="rect">
+            <a:avLst/>
+          </a:prstGeom>
+          <a:noFill/>
+        </p:spPr>
+        <p:txBody>
+          <a:bodyPr wrap="none">
+            <a:spAutoFit/>
+          </a:bodyPr>
+          <a:lstStyle/>
+          <a:p>
+            <a:pPr algn="l">
+              <a:defRPr sz="2000" b="1">
+                <a:solidFill>
+                  <a:srgbClr val="C41E3A"/>
+                </a:solidFill>
+                <a:latin typeface="Arial"/>
+              </a:defRPr>
+            </a:pPr>
+            <a:r>
+              <a:t>¡Hola!</a:t>
+            </a:r>
+          </a:p>
+        </p:txBody>
+      </p:sp>
+      <p:sp>
+        <p:nvSpPr>
+          <p:cNvPr id="12" name="TextBox 11"/>
+          <p:cNvSpPr txBox="1"/>
+          <p:nvPr/>
+        </p:nvSpPr>
+        <p:spPr>
+          <a:xfrm>
+            <a:off x="5943600" y="2075688"/>
+            <a:ext cx="5029200" cy="365760"/>
+          </a:xfrm>
+          <a:prstGeom prst="rect">
+            <a:avLst/>
+          </a:prstGeom>
+          <a:noFill/>
+        </p:spPr>
+        <p:txBody>
+          <a:bodyPr wrap="none">
+            <a:spAutoFit/>
+          </a:bodyPr>
+          <a:lstStyle/>
+          <a:p>
+            <a:pPr algn="l">
+              <a:defRPr sz="2000" b="0">
                 <a:solidFill>
                   <a:srgbClr val="222222"/>
                 </a:solidFill>
@@ -5672,7 +8272,275 @@
               </a:defRPr>
             </a:pPr>
             <a:r>
-              <a:t>💡 ¡...! und ¿...? am Anfang UND Ende</a:t>
+              <a:t>Hallo!</a:t>
+            </a:r>
+          </a:p>
+        </p:txBody>
+      </p:sp>
+      <p:sp>
+        <p:nvSpPr>
+          <p:cNvPr id="13" name="Rectangle 12"/>
+          <p:cNvSpPr/>
+          <p:nvPr/>
+        </p:nvSpPr>
+        <p:spPr>
+          <a:xfrm>
+            <a:off x="457200" y="2560320"/>
+            <a:ext cx="11274552" cy="594360"/>
+          </a:xfrm>
+          <a:prstGeom prst="rect">
+            <a:avLst/>
+          </a:prstGeom>
+          <a:solidFill>
+            <a:srgbClr val="F5F5F5"/>
+          </a:solidFill>
+          <a:ln>
+            <a:noFill/>
+          </a:ln>
+        </p:spPr>
+        <p:style>
+          <a:lnRef idx="1">
+            <a:schemeClr val="accent1"/>
+          </a:lnRef>
+          <a:fillRef idx="3">
+            <a:schemeClr val="accent1"/>
+          </a:fillRef>
+          <a:effectRef idx="2">
+            <a:schemeClr val="accent1"/>
+          </a:effectRef>
+          <a:fontRef idx="minor">
+            <a:schemeClr val="lt1"/>
+          </a:fontRef>
+        </p:style>
+        <p:txBody>
+          <a:bodyPr rtlCol="0" anchor="ctr"/>
+          <a:lstStyle/>
+          <a:p>
+            <a:pPr algn="ctr"/>
+          </a:p>
+        </p:txBody>
+      </p:sp>
+      <p:sp>
+        <p:nvSpPr>
+          <p:cNvPr id="14" name="TextBox 13"/>
+          <p:cNvSpPr txBox="1"/>
+          <p:nvPr/>
+        </p:nvSpPr>
+        <p:spPr>
+          <a:xfrm>
+            <a:off x="640080" y="2670048"/>
+            <a:ext cx="5029200" cy="365760"/>
+          </a:xfrm>
+          <a:prstGeom prst="rect">
+            <a:avLst/>
+          </a:prstGeom>
+          <a:noFill/>
+        </p:spPr>
+        <p:txBody>
+          <a:bodyPr wrap="none">
+            <a:spAutoFit/>
+          </a:bodyPr>
+          <a:lstStyle/>
+          <a:p>
+            <a:pPr algn="l">
+              <a:defRPr sz="2000" b="1">
+                <a:solidFill>
+                  <a:srgbClr val="C41E3A"/>
+                </a:solidFill>
+                <a:latin typeface="Arial"/>
+              </a:defRPr>
+            </a:pPr>
+            <a:r>
+              <a:t>Buenos días</a:t>
+            </a:r>
+          </a:p>
+        </p:txBody>
+      </p:sp>
+      <p:sp>
+        <p:nvSpPr>
+          <p:cNvPr id="15" name="TextBox 14"/>
+          <p:cNvSpPr txBox="1"/>
+          <p:nvPr/>
+        </p:nvSpPr>
+        <p:spPr>
+          <a:xfrm>
+            <a:off x="5943600" y="2670048"/>
+            <a:ext cx="5029200" cy="365760"/>
+          </a:xfrm>
+          <a:prstGeom prst="rect">
+            <a:avLst/>
+          </a:prstGeom>
+          <a:noFill/>
+        </p:spPr>
+        <p:txBody>
+          <a:bodyPr wrap="none">
+            <a:spAutoFit/>
+          </a:bodyPr>
+          <a:lstStyle/>
+          <a:p>
+            <a:pPr algn="l">
+              <a:defRPr sz="2000" b="0">
+                <a:solidFill>
+                  <a:srgbClr val="222222"/>
+                </a:solidFill>
+                <a:latin typeface="Arial"/>
+              </a:defRPr>
+            </a:pPr>
+            <a:r>
+              <a:t>Guten Morgen (bis 12 Uhr)</a:t>
+            </a:r>
+          </a:p>
+        </p:txBody>
+      </p:sp>
+      <p:sp>
+        <p:nvSpPr>
+          <p:cNvPr id="16" name="TextBox 15"/>
+          <p:cNvSpPr txBox="1"/>
+          <p:nvPr/>
+        </p:nvSpPr>
+        <p:spPr>
+          <a:xfrm>
+            <a:off x="640080" y="3264408"/>
+            <a:ext cx="5029200" cy="365760"/>
+          </a:xfrm>
+          <a:prstGeom prst="rect">
+            <a:avLst/>
+          </a:prstGeom>
+          <a:noFill/>
+        </p:spPr>
+        <p:txBody>
+          <a:bodyPr wrap="none">
+            <a:spAutoFit/>
+          </a:bodyPr>
+          <a:lstStyle/>
+          <a:p>
+            <a:pPr algn="l">
+              <a:defRPr sz="2000" b="1">
+                <a:solidFill>
+                  <a:srgbClr val="C41E3A"/>
+                </a:solidFill>
+                <a:latin typeface="Arial"/>
+              </a:defRPr>
+            </a:pPr>
+            <a:r>
+              <a:t>Buenas tardes</a:t>
+            </a:r>
+          </a:p>
+        </p:txBody>
+      </p:sp>
+      <p:sp>
+        <p:nvSpPr>
+          <p:cNvPr id="17" name="TextBox 16"/>
+          <p:cNvSpPr txBox="1"/>
+          <p:nvPr/>
+        </p:nvSpPr>
+        <p:spPr>
+          <a:xfrm>
+            <a:off x="5943600" y="3264408"/>
+            <a:ext cx="5029200" cy="365760"/>
+          </a:xfrm>
+          <a:prstGeom prst="rect">
+            <a:avLst/>
+          </a:prstGeom>
+          <a:noFill/>
+        </p:spPr>
+        <p:txBody>
+          <a:bodyPr wrap="none">
+            <a:spAutoFit/>
+          </a:bodyPr>
+          <a:lstStyle/>
+          <a:p>
+            <a:pPr algn="l">
+              <a:defRPr sz="2000" b="0">
+                <a:solidFill>
+                  <a:srgbClr val="222222"/>
+                </a:solidFill>
+                <a:latin typeface="Arial"/>
+              </a:defRPr>
+            </a:pPr>
+            <a:r>
+              <a:t>Guten Tag (12-20 Uhr)</a:t>
+            </a:r>
+          </a:p>
+        </p:txBody>
+      </p:sp>
+      <p:sp>
+        <p:nvSpPr>
+          <p:cNvPr id="18" name="Rectangle 17"/>
+          <p:cNvSpPr/>
+          <p:nvPr/>
+        </p:nvSpPr>
+        <p:spPr>
+          <a:xfrm>
+            <a:off x="457200" y="5943600"/>
+            <a:ext cx="11274552" cy="548640"/>
+          </a:xfrm>
+          <a:prstGeom prst="rect">
+            <a:avLst/>
+          </a:prstGeom>
+          <a:solidFill>
+            <a:srgbClr val="FDF2F4"/>
+          </a:solidFill>
+          <a:ln>
+            <a:solidFill>
+              <a:srgbClr val="C41E3A"/>
+            </a:solidFill>
+          </a:ln>
+        </p:spPr>
+        <p:style>
+          <a:lnRef idx="1">
+            <a:schemeClr val="accent1"/>
+          </a:lnRef>
+          <a:fillRef idx="3">
+            <a:schemeClr val="accent1"/>
+          </a:fillRef>
+          <a:effectRef idx="2">
+            <a:schemeClr val="accent1"/>
+          </a:effectRef>
+          <a:fontRef idx="minor">
+            <a:schemeClr val="lt1"/>
+          </a:fontRef>
+        </p:style>
+        <p:txBody>
+          <a:bodyPr rtlCol="0" anchor="ctr"/>
+          <a:lstStyle/>
+          <a:p>
+            <a:pPr algn="ctr"/>
+          </a:p>
+        </p:txBody>
+      </p:sp>
+      <p:sp>
+        <p:nvSpPr>
+          <p:cNvPr id="19" name="TextBox 18"/>
+          <p:cNvSpPr txBox="1"/>
+          <p:nvPr/>
+        </p:nvSpPr>
+        <p:spPr>
+          <a:xfrm>
+            <a:off x="640080" y="6053328"/>
+            <a:ext cx="10972800" cy="365760"/>
+          </a:xfrm>
+          <a:prstGeom prst="rect">
+            <a:avLst/>
+          </a:prstGeom>
+          <a:noFill/>
+        </p:spPr>
+        <p:txBody>
+          <a:bodyPr wrap="none">
+            <a:spAutoFit/>
+          </a:bodyPr>
+          <a:lstStyle/>
+          <a:p>
+            <a:pPr algn="l">
+              <a:defRPr sz="1400" b="1">
+                <a:solidFill>
+                  <a:srgbClr val="C41E3A"/>
+                </a:solidFill>
+                <a:latin typeface="Arial"/>
+              </a:defRPr>
+            </a:pPr>
+            <a:r>
+              <a:t>📝 AB-01a: Kasten 1</a:t>
             </a:r>
           </a:p>
         </p:txBody>
@@ -5891,14 +8759,50 @@
       </p:sp>
       <p:sp>
         <p:nvSpPr>
-          <p:cNvPr id="7" name="Rectangle 6"/>
+          <p:cNvPr id="7" name="TextBox 6"/>
+          <p:cNvSpPr txBox="1"/>
+          <p:nvPr/>
+        </p:nvSpPr>
+        <p:spPr>
+          <a:xfrm>
+            <a:off x="457200" y="640080"/>
+            <a:ext cx="11274552" cy="731520"/>
+          </a:xfrm>
+          <a:prstGeom prst="rect">
+            <a:avLst/>
+          </a:prstGeom>
+          <a:noFill/>
+        </p:spPr>
+        <p:txBody>
+          <a:bodyPr wrap="none">
+            <a:spAutoFit/>
+          </a:bodyPr>
+          <a:lstStyle/>
+          <a:p>
+            <a:pPr algn="l">
+              <a:defRPr sz="3200" b="1">
+                <a:solidFill>
+                  <a:srgbClr val="C41E3A"/>
+                </a:solidFill>
+                <a:latin typeface="Arial"/>
+              </a:defRPr>
+            </a:pPr>
+            <a:r>
+              <a:t>📚 Begrüßen am Abend</a:t>
+            </a:r>
+          </a:p>
+        </p:txBody>
+      </p:sp>
+      <p:sp>
+        <p:nvSpPr>
+          <p:cNvPr id="8" name="Rectangle 7"/>
           <p:cNvSpPr/>
           <p:nvPr/>
         </p:nvSpPr>
         <p:spPr>
           <a:xfrm>
-            <a:off x="457200" y="640080"/>
-            <a:ext cx="1828800" cy="457200"/>
+            <a:off x="457200" y="1371600"/>
+            <a:ext cx="11274552" cy="594360"/>
           </a:xfrm>
           <a:prstGeom prst="rect">
             <a:avLst/>
@@ -5934,28 +8838,28 @@
       </p:sp>
       <p:sp>
         <p:nvSpPr>
-          <p:cNvPr id="8" name="TextBox 7"/>
-          <p:cNvSpPr txBox="1"/>
-          <p:nvPr/>
-        </p:nvSpPr>
-        <p:spPr>
-          <a:xfrm>
-            <a:off x="548640" y="713231"/>
-            <a:ext cx="1645920" cy="320040"/>
-          </a:xfrm>
-          <a:prstGeom prst="rect">
-            <a:avLst/>
-          </a:prstGeom>
-          <a:noFill/>
-        </p:spPr>
-        <p:txBody>
-          <a:bodyPr wrap="none">
-            <a:spAutoFit/>
-          </a:bodyPr>
-          <a:lstStyle/>
-          <a:p>
-            <a:pPr algn="ctr">
-              <a:defRPr sz="1400" b="1">
+          <p:cNvPr id="9" name="TextBox 8"/>
+          <p:cNvSpPr txBox="1"/>
+          <p:nvPr/>
+        </p:nvSpPr>
+        <p:spPr>
+          <a:xfrm>
+            <a:off x="640080" y="1481328"/>
+            <a:ext cx="5029200" cy="365760"/>
+          </a:xfrm>
+          <a:prstGeom prst="rect">
+            <a:avLst/>
+          </a:prstGeom>
+          <a:noFill/>
+        </p:spPr>
+        <p:txBody>
+          <a:bodyPr wrap="none">
+            <a:spAutoFit/>
+          </a:bodyPr>
+          <a:lstStyle/>
+          <a:p>
+            <a:pPr algn="l">
+              <a:defRPr sz="1800" b="1">
                 <a:solidFill>
                   <a:srgbClr val="FFFFFF"/>
                 </a:solidFill>
@@ -5963,35 +8867,71 @@
               </a:defRPr>
             </a:pPr>
             <a:r>
-              <a:t>ÜBUNG</a:t>
-            </a:r>
-          </a:p>
-        </p:txBody>
-      </p:sp>
-      <p:sp>
-        <p:nvSpPr>
-          <p:cNvPr id="9" name="TextBox 8"/>
-          <p:cNvSpPr txBox="1"/>
-          <p:nvPr/>
-        </p:nvSpPr>
-        <p:spPr>
-          <a:xfrm>
-            <a:off x="457200" y="1280160"/>
-            <a:ext cx="11274552" cy="731520"/>
-          </a:xfrm>
-          <a:prstGeom prst="rect">
-            <a:avLst/>
-          </a:prstGeom>
-          <a:noFill/>
-        </p:spPr>
-        <p:txBody>
-          <a:bodyPr wrap="none">
-            <a:spAutoFit/>
-          </a:bodyPr>
-          <a:lstStyle/>
-          <a:p>
-            <a:pPr algn="l">
-              <a:defRPr sz="3200" b="1">
+              <a:t>Spanisch</a:t>
+            </a:r>
+          </a:p>
+        </p:txBody>
+      </p:sp>
+      <p:sp>
+        <p:nvSpPr>
+          <p:cNvPr id="10" name="TextBox 9"/>
+          <p:cNvSpPr txBox="1"/>
+          <p:nvPr/>
+        </p:nvSpPr>
+        <p:spPr>
+          <a:xfrm>
+            <a:off x="5943600" y="1481328"/>
+            <a:ext cx="5029200" cy="365760"/>
+          </a:xfrm>
+          <a:prstGeom prst="rect">
+            <a:avLst/>
+          </a:prstGeom>
+          <a:noFill/>
+        </p:spPr>
+        <p:txBody>
+          <a:bodyPr wrap="none">
+            <a:spAutoFit/>
+          </a:bodyPr>
+          <a:lstStyle/>
+          <a:p>
+            <a:pPr algn="l">
+              <a:defRPr sz="1800" b="1">
+                <a:solidFill>
+                  <a:srgbClr val="FFFFFF"/>
+                </a:solidFill>
+                <a:latin typeface="Arial"/>
+              </a:defRPr>
+            </a:pPr>
+            <a:r>
+              <a:t>Deutsch</a:t>
+            </a:r>
+          </a:p>
+        </p:txBody>
+      </p:sp>
+      <p:sp>
+        <p:nvSpPr>
+          <p:cNvPr id="11" name="TextBox 10"/>
+          <p:cNvSpPr txBox="1"/>
+          <p:nvPr/>
+        </p:nvSpPr>
+        <p:spPr>
+          <a:xfrm>
+            <a:off x="640080" y="2075688"/>
+            <a:ext cx="5029200" cy="365760"/>
+          </a:xfrm>
+          <a:prstGeom prst="rect">
+            <a:avLst/>
+          </a:prstGeom>
+          <a:noFill/>
+        </p:spPr>
+        <p:txBody>
+          <a:bodyPr wrap="none">
+            <a:spAutoFit/>
+          </a:bodyPr>
+          <a:lstStyle/>
+          <a:p>
+            <a:pPr algn="l">
+              <a:defRPr sz="2000" b="1">
                 <a:solidFill>
                   <a:srgbClr val="C41E3A"/>
                 </a:solidFill>
@@ -5999,35 +8939,114 @@
               </a:defRPr>
             </a:pPr>
             <a:r>
-              <a:t>✏️ Zuordnung</a:t>
-            </a:r>
-          </a:p>
-        </p:txBody>
-      </p:sp>
-      <p:sp>
-        <p:nvSpPr>
-          <p:cNvPr id="10" name="TextBox 9"/>
-          <p:cNvSpPr txBox="1"/>
-          <p:nvPr/>
-        </p:nvSpPr>
-        <p:spPr>
-          <a:xfrm>
-            <a:off x="640080" y="2011680"/>
-            <a:ext cx="5029200" cy="548640"/>
-          </a:xfrm>
-          <a:prstGeom prst="rect">
-            <a:avLst/>
-          </a:prstGeom>
-          <a:noFill/>
-        </p:spPr>
-        <p:txBody>
-          <a:bodyPr wrap="none">
-            <a:spAutoFit/>
-          </a:bodyPr>
-          <a:lstStyle/>
-          <a:p>
-            <a:pPr algn="l">
-              <a:defRPr sz="2200" b="1">
+              <a:t>Buenas noches</a:t>
+            </a:r>
+          </a:p>
+        </p:txBody>
+      </p:sp>
+      <p:sp>
+        <p:nvSpPr>
+          <p:cNvPr id="12" name="TextBox 11"/>
+          <p:cNvSpPr txBox="1"/>
+          <p:nvPr/>
+        </p:nvSpPr>
+        <p:spPr>
+          <a:xfrm>
+            <a:off x="5943600" y="2075688"/>
+            <a:ext cx="5029200" cy="365760"/>
+          </a:xfrm>
+          <a:prstGeom prst="rect">
+            <a:avLst/>
+          </a:prstGeom>
+          <a:noFill/>
+        </p:spPr>
+        <p:txBody>
+          <a:bodyPr wrap="none">
+            <a:spAutoFit/>
+          </a:bodyPr>
+          <a:lstStyle/>
+          <a:p>
+            <a:pPr algn="l">
+              <a:defRPr sz="2000" b="0">
+                <a:solidFill>
+                  <a:srgbClr val="222222"/>
+                </a:solidFill>
+                <a:latin typeface="Arial"/>
+              </a:defRPr>
+            </a:pPr>
+            <a:r>
+              <a:t>Guten Abend / Gute Nacht</a:t>
+            </a:r>
+          </a:p>
+        </p:txBody>
+      </p:sp>
+      <p:sp>
+        <p:nvSpPr>
+          <p:cNvPr id="13" name="Rectangle 12"/>
+          <p:cNvSpPr/>
+          <p:nvPr/>
+        </p:nvSpPr>
+        <p:spPr>
+          <a:xfrm>
+            <a:off x="457200" y="2560320"/>
+            <a:ext cx="11274552" cy="594360"/>
+          </a:xfrm>
+          <a:prstGeom prst="rect">
+            <a:avLst/>
+          </a:prstGeom>
+          <a:solidFill>
+            <a:srgbClr val="F5F5F5"/>
+          </a:solidFill>
+          <a:ln>
+            <a:noFill/>
+          </a:ln>
+        </p:spPr>
+        <p:style>
+          <a:lnRef idx="1">
+            <a:schemeClr val="accent1"/>
+          </a:lnRef>
+          <a:fillRef idx="3">
+            <a:schemeClr val="accent1"/>
+          </a:fillRef>
+          <a:effectRef idx="2">
+            <a:schemeClr val="accent1"/>
+          </a:effectRef>
+          <a:fontRef idx="minor">
+            <a:schemeClr val="lt1"/>
+          </a:fontRef>
+        </p:style>
+        <p:txBody>
+          <a:bodyPr rtlCol="0" anchor="ctr"/>
+          <a:lstStyle/>
+          <a:p>
+            <a:pPr algn="ctr"/>
+          </a:p>
+        </p:txBody>
+      </p:sp>
+      <p:sp>
+        <p:nvSpPr>
+          <p:cNvPr id="14" name="TextBox 13"/>
+          <p:cNvSpPr txBox="1"/>
+          <p:nvPr/>
+        </p:nvSpPr>
+        <p:spPr>
+          <a:xfrm>
+            <a:off x="640080" y="2670048"/>
+            <a:ext cx="5029200" cy="365760"/>
+          </a:xfrm>
+          <a:prstGeom prst="rect">
+            <a:avLst/>
+          </a:prstGeom>
+          <a:noFill/>
+        </p:spPr>
+        <p:txBody>
+          <a:bodyPr wrap="none">
+            <a:spAutoFit/>
+          </a:bodyPr>
+          <a:lstStyle/>
+          <a:p>
+            <a:pPr algn="l">
+              <a:defRPr sz="2000" b="1">
                 <a:solidFill>
                   <a:srgbClr val="C41E3A"/>
                 </a:solidFill>
@@ -6035,71 +9054,71 @@
               </a:defRPr>
             </a:pPr>
             <a:r>
-              <a:t>1. ¡Hola!</a:t>
-            </a:r>
-          </a:p>
-        </p:txBody>
-      </p:sp>
-      <p:sp>
-        <p:nvSpPr>
-          <p:cNvPr id="11" name="TextBox 10"/>
-          <p:cNvSpPr txBox="1"/>
-          <p:nvPr/>
-        </p:nvSpPr>
-        <p:spPr>
-          <a:xfrm>
-            <a:off x="5943600" y="2011680"/>
-            <a:ext cx="5029200" cy="548640"/>
-          </a:xfrm>
-          <a:prstGeom prst="rect">
-            <a:avLst/>
-          </a:prstGeom>
-          <a:noFill/>
-        </p:spPr>
-        <p:txBody>
-          <a:bodyPr wrap="none">
-            <a:spAutoFit/>
-          </a:bodyPr>
-          <a:lstStyle/>
-          <a:p>
-            <a:pPr algn="l">
-              <a:defRPr sz="2200" b="0">
-                <a:solidFill>
-                  <a:srgbClr val="888888"/>
-                </a:solidFill>
-                <a:latin typeface="Arial"/>
-              </a:defRPr>
-            </a:pPr>
-            <a:r>
-              <a:t>___</a:t>
-            </a:r>
-          </a:p>
-        </p:txBody>
-      </p:sp>
-      <p:sp>
-        <p:nvSpPr>
-          <p:cNvPr id="12" name="TextBox 11"/>
-          <p:cNvSpPr txBox="1"/>
-          <p:nvPr/>
-        </p:nvSpPr>
-        <p:spPr>
-          <a:xfrm>
-            <a:off x="640080" y="2926080"/>
-            <a:ext cx="5029200" cy="548640"/>
-          </a:xfrm>
-          <a:prstGeom prst="rect">
-            <a:avLst/>
-          </a:prstGeom>
-          <a:noFill/>
-        </p:spPr>
-        <p:txBody>
-          <a:bodyPr wrap="none">
-            <a:spAutoFit/>
-          </a:bodyPr>
-          <a:lstStyle/>
-          <a:p>
-            <a:pPr algn="l">
-              <a:defRPr sz="2200" b="1">
+              <a:t>¿Qué tal?</a:t>
+            </a:r>
+          </a:p>
+        </p:txBody>
+      </p:sp>
+      <p:sp>
+        <p:nvSpPr>
+          <p:cNvPr id="15" name="TextBox 14"/>
+          <p:cNvSpPr txBox="1"/>
+          <p:nvPr/>
+        </p:nvSpPr>
+        <p:spPr>
+          <a:xfrm>
+            <a:off x="5943600" y="2670048"/>
+            <a:ext cx="5029200" cy="365760"/>
+          </a:xfrm>
+          <a:prstGeom prst="rect">
+            <a:avLst/>
+          </a:prstGeom>
+          <a:noFill/>
+        </p:spPr>
+        <p:txBody>
+          <a:bodyPr wrap="none">
+            <a:spAutoFit/>
+          </a:bodyPr>
+          <a:lstStyle/>
+          <a:p>
+            <a:pPr algn="l">
+              <a:defRPr sz="2000" b="0">
+                <a:solidFill>
+                  <a:srgbClr val="222222"/>
+                </a:solidFill>
+                <a:latin typeface="Arial"/>
+              </a:defRPr>
+            </a:pPr>
+            <a:r>
+              <a:t>Wie geht's?</a:t>
+            </a:r>
+          </a:p>
+        </p:txBody>
+      </p:sp>
+      <p:sp>
+        <p:nvSpPr>
+          <p:cNvPr id="16" name="TextBox 15"/>
+          <p:cNvSpPr txBox="1"/>
+          <p:nvPr/>
+        </p:nvSpPr>
+        <p:spPr>
+          <a:xfrm>
+            <a:off x="640080" y="3264408"/>
+            <a:ext cx="5029200" cy="365760"/>
+          </a:xfrm>
+          <a:prstGeom prst="rect">
+            <a:avLst/>
+          </a:prstGeom>
+          <a:noFill/>
+        </p:spPr>
+        <p:txBody>
+          <a:bodyPr wrap="none">
+            <a:spAutoFit/>
+          </a:bodyPr>
+          <a:lstStyle/>
+          <a:p>
+            <a:pPr algn="l">
+              <a:defRPr sz="2000" b="1">
                 <a:solidFill>
                   <a:srgbClr val="C41E3A"/>
                 </a:solidFill>
@@ -6107,122 +9126,50 @@
               </a:defRPr>
             </a:pPr>
             <a:r>
-              <a:t>2. Buenos días</a:t>
-            </a:r>
-          </a:p>
-        </p:txBody>
-      </p:sp>
-      <p:sp>
-        <p:nvSpPr>
-          <p:cNvPr id="13" name="TextBox 12"/>
-          <p:cNvSpPr txBox="1"/>
-          <p:nvPr/>
-        </p:nvSpPr>
-        <p:spPr>
-          <a:xfrm>
-            <a:off x="5943600" y="2926080"/>
-            <a:ext cx="5029200" cy="548640"/>
-          </a:xfrm>
-          <a:prstGeom prst="rect">
-            <a:avLst/>
-          </a:prstGeom>
-          <a:noFill/>
-        </p:spPr>
-        <p:txBody>
-          <a:bodyPr wrap="none">
-            <a:spAutoFit/>
-          </a:bodyPr>
-          <a:lstStyle/>
-          <a:p>
-            <a:pPr algn="l">
-              <a:defRPr sz="2200" b="0">
-                <a:solidFill>
-                  <a:srgbClr val="888888"/>
-                </a:solidFill>
-                <a:latin typeface="Arial"/>
-              </a:defRPr>
-            </a:pPr>
-            <a:r>
-              <a:t>___</a:t>
-            </a:r>
-          </a:p>
-        </p:txBody>
-      </p:sp>
-      <p:sp>
-        <p:nvSpPr>
-          <p:cNvPr id="14" name="TextBox 13"/>
-          <p:cNvSpPr txBox="1"/>
-          <p:nvPr/>
-        </p:nvSpPr>
-        <p:spPr>
-          <a:xfrm>
-            <a:off x="640080" y="3840480"/>
-            <a:ext cx="5029200" cy="548640"/>
-          </a:xfrm>
-          <a:prstGeom prst="rect">
-            <a:avLst/>
-          </a:prstGeom>
-          <a:noFill/>
-        </p:spPr>
-        <p:txBody>
-          <a:bodyPr wrap="none">
-            <a:spAutoFit/>
-          </a:bodyPr>
-          <a:lstStyle/>
-          <a:p>
-            <a:pPr algn="l">
-              <a:defRPr sz="2200" b="1">
-                <a:solidFill>
-                  <a:srgbClr val="C41E3A"/>
-                </a:solidFill>
-                <a:latin typeface="Arial"/>
-              </a:defRPr>
-            </a:pPr>
-            <a:r>
-              <a:t>3. ¡Hasta mañana!</a:t>
-            </a:r>
-          </a:p>
-        </p:txBody>
-      </p:sp>
-      <p:sp>
-        <p:nvSpPr>
-          <p:cNvPr id="15" name="TextBox 14"/>
-          <p:cNvSpPr txBox="1"/>
-          <p:nvPr/>
-        </p:nvSpPr>
-        <p:spPr>
-          <a:xfrm>
-            <a:off x="5943600" y="3840480"/>
-            <a:ext cx="5029200" cy="548640"/>
-          </a:xfrm>
-          <a:prstGeom prst="rect">
-            <a:avLst/>
-          </a:prstGeom>
-          <a:noFill/>
-        </p:spPr>
-        <p:txBody>
-          <a:bodyPr wrap="none">
-            <a:spAutoFit/>
-          </a:bodyPr>
-          <a:lstStyle/>
-          <a:p>
-            <a:pPr algn="l">
-              <a:defRPr sz="2200" b="0">
-                <a:solidFill>
-                  <a:srgbClr val="888888"/>
-                </a:solidFill>
-                <a:latin typeface="Arial"/>
-              </a:defRPr>
-            </a:pPr>
-            <a:r>
-              <a:t>___</a:t>
-            </a:r>
-          </a:p>
-        </p:txBody>
-      </p:sp>
-      <p:sp>
-        <p:nvSpPr>
-          <p:cNvPr id="16" name="Rectangle 15"/>
+              <a:t>¿Cómo estás?</a:t>
+            </a:r>
+          </a:p>
+        </p:txBody>
+      </p:sp>
+      <p:sp>
+        <p:nvSpPr>
+          <p:cNvPr id="17" name="TextBox 16"/>
+          <p:cNvSpPr txBox="1"/>
+          <p:nvPr/>
+        </p:nvSpPr>
+        <p:spPr>
+          <a:xfrm>
+            <a:off x="5943600" y="3264408"/>
+            <a:ext cx="5029200" cy="365760"/>
+          </a:xfrm>
+          <a:prstGeom prst="rect">
+            <a:avLst/>
+          </a:prstGeom>
+          <a:noFill/>
+        </p:spPr>
+        <p:txBody>
+          <a:bodyPr wrap="none">
+            <a:spAutoFit/>
+          </a:bodyPr>
+          <a:lstStyle/>
+          <a:p>
+            <a:pPr algn="l">
+              <a:defRPr sz="2000" b="0">
+                <a:solidFill>
+                  <a:srgbClr val="222222"/>
+                </a:solidFill>
+                <a:latin typeface="Arial"/>
+              </a:defRPr>
+            </a:pPr>
+            <a:r>
+              <a:t>Wie geht es dir?</a:t>
+            </a:r>
+          </a:p>
+        </p:txBody>
+      </p:sp>
+      <p:sp>
+        <p:nvSpPr>
+          <p:cNvPr id="18" name="Rectangle 17"/>
           <p:cNvSpPr/>
           <p:nvPr/>
         </p:nvSpPr>
@@ -6267,7 +9214,7 @@
       </p:sp>
       <p:sp>
         <p:nvSpPr>
-          <p:cNvPr id="17" name="TextBox 16"/>
+          <p:cNvPr id="19" name="TextBox 18"/>
           <p:cNvSpPr txBox="1"/>
           <p:nvPr/>
         </p:nvSpPr>
@@ -6296,7 +9243,7 @@
               </a:defRPr>
             </a:pPr>
             <a:r>
-              <a:t>📝 AB-01a: Aufgabe 1</a:t>
+              <a:t>📝 AB-01a: Kasten 1</a:t>
             </a:r>
           </a:p>
         </p:txBody>
@@ -6515,20 +9462,56 @@
       </p:sp>
       <p:sp>
         <p:nvSpPr>
-          <p:cNvPr id="7" name="Rectangle 6"/>
+          <p:cNvPr id="7" name="TextBox 6"/>
+          <p:cNvSpPr txBox="1"/>
+          <p:nvPr/>
+        </p:nvSpPr>
+        <p:spPr>
+          <a:xfrm>
+            <a:off x="457200" y="640080"/>
+            <a:ext cx="11274552" cy="731520"/>
+          </a:xfrm>
+          <a:prstGeom prst="rect">
+            <a:avLst/>
+          </a:prstGeom>
+          <a:noFill/>
+        </p:spPr>
+        <p:txBody>
+          <a:bodyPr wrap="none">
+            <a:spAutoFit/>
+          </a:bodyPr>
+          <a:lstStyle/>
+          <a:p>
+            <a:pPr algn="l">
+              <a:defRPr sz="3200" b="1">
+                <a:solidFill>
+                  <a:srgbClr val="C41E3A"/>
+                </a:solidFill>
+                <a:latin typeface="Arial"/>
+              </a:defRPr>
+            </a:pPr>
+            <a:r>
+              <a:t>📚 Verabschieden</a:t>
+            </a:r>
+          </a:p>
+        </p:txBody>
+      </p:sp>
+      <p:sp>
+        <p:nvSpPr>
+          <p:cNvPr id="8" name="Rectangle 7"/>
           <p:cNvSpPr/>
           <p:nvPr/>
         </p:nvSpPr>
         <p:spPr>
           <a:xfrm>
-            <a:off x="457200" y="640080"/>
-            <a:ext cx="1828800" cy="457200"/>
+            <a:off x="457200" y="1371600"/>
+            <a:ext cx="11274552" cy="594360"/>
           </a:xfrm>
           <a:prstGeom prst="rect">
             <a:avLst/>
           </a:prstGeom>
           <a:solidFill>
-            <a:srgbClr val="2A7A4B"/>
+            <a:srgbClr val="C41E3A"/>
           </a:solidFill>
           <a:ln>
             <a:noFill/>
@@ -6558,288 +9541,527 @@
       </p:sp>
       <p:sp>
         <p:nvSpPr>
-          <p:cNvPr id="8" name="TextBox 7"/>
-          <p:cNvSpPr txBox="1"/>
-          <p:nvPr/>
-        </p:nvSpPr>
-        <p:spPr>
-          <a:xfrm>
-            <a:off x="548640" y="713231"/>
-            <a:ext cx="1645920" cy="320040"/>
-          </a:xfrm>
-          <a:prstGeom prst="rect">
-            <a:avLst/>
-          </a:prstGeom>
-          <a:noFill/>
-        </p:spPr>
-        <p:txBody>
-          <a:bodyPr wrap="none">
-            <a:spAutoFit/>
-          </a:bodyPr>
-          <a:lstStyle/>
-          <a:p>
-            <a:pPr algn="ctr">
+          <p:cNvPr id="9" name="TextBox 8"/>
+          <p:cNvSpPr txBox="1"/>
+          <p:nvPr/>
+        </p:nvSpPr>
+        <p:spPr>
+          <a:xfrm>
+            <a:off x="640080" y="1481328"/>
+            <a:ext cx="5029200" cy="365760"/>
+          </a:xfrm>
+          <a:prstGeom prst="rect">
+            <a:avLst/>
+          </a:prstGeom>
+          <a:noFill/>
+        </p:spPr>
+        <p:txBody>
+          <a:bodyPr wrap="none">
+            <a:spAutoFit/>
+          </a:bodyPr>
+          <a:lstStyle/>
+          <a:p>
+            <a:pPr algn="l">
+              <a:defRPr sz="1800" b="1">
+                <a:solidFill>
+                  <a:srgbClr val="FFFFFF"/>
+                </a:solidFill>
+                <a:latin typeface="Arial"/>
+              </a:defRPr>
+            </a:pPr>
+            <a:r>
+              <a:t>Spanisch</a:t>
+            </a:r>
+          </a:p>
+        </p:txBody>
+      </p:sp>
+      <p:sp>
+        <p:nvSpPr>
+          <p:cNvPr id="10" name="TextBox 9"/>
+          <p:cNvSpPr txBox="1"/>
+          <p:nvPr/>
+        </p:nvSpPr>
+        <p:spPr>
+          <a:xfrm>
+            <a:off x="5943600" y="1481328"/>
+            <a:ext cx="5029200" cy="365760"/>
+          </a:xfrm>
+          <a:prstGeom prst="rect">
+            <a:avLst/>
+          </a:prstGeom>
+          <a:noFill/>
+        </p:spPr>
+        <p:txBody>
+          <a:bodyPr wrap="none">
+            <a:spAutoFit/>
+          </a:bodyPr>
+          <a:lstStyle/>
+          <a:p>
+            <a:pPr algn="l">
+              <a:defRPr sz="1800" b="1">
+                <a:solidFill>
+                  <a:srgbClr val="FFFFFF"/>
+                </a:solidFill>
+                <a:latin typeface="Arial"/>
+              </a:defRPr>
+            </a:pPr>
+            <a:r>
+              <a:t>Deutsch</a:t>
+            </a:r>
+          </a:p>
+        </p:txBody>
+      </p:sp>
+      <p:sp>
+        <p:nvSpPr>
+          <p:cNvPr id="11" name="TextBox 10"/>
+          <p:cNvSpPr txBox="1"/>
+          <p:nvPr/>
+        </p:nvSpPr>
+        <p:spPr>
+          <a:xfrm>
+            <a:off x="640080" y="2075688"/>
+            <a:ext cx="5029200" cy="365760"/>
+          </a:xfrm>
+          <a:prstGeom prst="rect">
+            <a:avLst/>
+          </a:prstGeom>
+          <a:noFill/>
+        </p:spPr>
+        <p:txBody>
+          <a:bodyPr wrap="none">
+            <a:spAutoFit/>
+          </a:bodyPr>
+          <a:lstStyle/>
+          <a:p>
+            <a:pPr algn="l">
+              <a:defRPr sz="2000" b="1">
+                <a:solidFill>
+                  <a:srgbClr val="C41E3A"/>
+                </a:solidFill>
+                <a:latin typeface="Arial"/>
+              </a:defRPr>
+            </a:pPr>
+            <a:r>
+              <a:t>¡Adiós!</a:t>
+            </a:r>
+          </a:p>
+        </p:txBody>
+      </p:sp>
+      <p:sp>
+        <p:nvSpPr>
+          <p:cNvPr id="12" name="TextBox 11"/>
+          <p:cNvSpPr txBox="1"/>
+          <p:nvPr/>
+        </p:nvSpPr>
+        <p:spPr>
+          <a:xfrm>
+            <a:off x="5943600" y="2075688"/>
+            <a:ext cx="5029200" cy="365760"/>
+          </a:xfrm>
+          <a:prstGeom prst="rect">
+            <a:avLst/>
+          </a:prstGeom>
+          <a:noFill/>
+        </p:spPr>
+        <p:txBody>
+          <a:bodyPr wrap="none">
+            <a:spAutoFit/>
+          </a:bodyPr>
+          <a:lstStyle/>
+          <a:p>
+            <a:pPr algn="l">
+              <a:defRPr sz="2000" b="0">
+                <a:solidFill>
+                  <a:srgbClr val="222222"/>
+                </a:solidFill>
+                <a:latin typeface="Arial"/>
+              </a:defRPr>
+            </a:pPr>
+            <a:r>
+              <a:t>Tschüss!</a:t>
+            </a:r>
+          </a:p>
+        </p:txBody>
+      </p:sp>
+      <p:sp>
+        <p:nvSpPr>
+          <p:cNvPr id="13" name="Rectangle 12"/>
+          <p:cNvSpPr/>
+          <p:nvPr/>
+        </p:nvSpPr>
+        <p:spPr>
+          <a:xfrm>
+            <a:off x="457200" y="2560320"/>
+            <a:ext cx="11274552" cy="594360"/>
+          </a:xfrm>
+          <a:prstGeom prst="rect">
+            <a:avLst/>
+          </a:prstGeom>
+          <a:solidFill>
+            <a:srgbClr val="F5F5F5"/>
+          </a:solidFill>
+          <a:ln>
+            <a:noFill/>
+          </a:ln>
+        </p:spPr>
+        <p:style>
+          <a:lnRef idx="1">
+            <a:schemeClr val="accent1"/>
+          </a:lnRef>
+          <a:fillRef idx="3">
+            <a:schemeClr val="accent1"/>
+          </a:fillRef>
+          <a:effectRef idx="2">
+            <a:schemeClr val="accent1"/>
+          </a:effectRef>
+          <a:fontRef idx="minor">
+            <a:schemeClr val="lt1"/>
+          </a:fontRef>
+        </p:style>
+        <p:txBody>
+          <a:bodyPr rtlCol="0" anchor="ctr"/>
+          <a:lstStyle/>
+          <a:p>
+            <a:pPr algn="ctr"/>
+          </a:p>
+        </p:txBody>
+      </p:sp>
+      <p:sp>
+        <p:nvSpPr>
+          <p:cNvPr id="14" name="TextBox 13"/>
+          <p:cNvSpPr txBox="1"/>
+          <p:nvPr/>
+        </p:nvSpPr>
+        <p:spPr>
+          <a:xfrm>
+            <a:off x="640080" y="2670048"/>
+            <a:ext cx="5029200" cy="365760"/>
+          </a:xfrm>
+          <a:prstGeom prst="rect">
+            <a:avLst/>
+          </a:prstGeom>
+          <a:noFill/>
+        </p:spPr>
+        <p:txBody>
+          <a:bodyPr wrap="none">
+            <a:spAutoFit/>
+          </a:bodyPr>
+          <a:lstStyle/>
+          <a:p>
+            <a:pPr algn="l">
+              <a:defRPr sz="2000" b="1">
+                <a:solidFill>
+                  <a:srgbClr val="C41E3A"/>
+                </a:solidFill>
+                <a:latin typeface="Arial"/>
+              </a:defRPr>
+            </a:pPr>
+            <a:r>
+              <a:t>¡Hasta luego!</a:t>
+            </a:r>
+          </a:p>
+        </p:txBody>
+      </p:sp>
+      <p:sp>
+        <p:nvSpPr>
+          <p:cNvPr id="15" name="TextBox 14"/>
+          <p:cNvSpPr txBox="1"/>
+          <p:nvPr/>
+        </p:nvSpPr>
+        <p:spPr>
+          <a:xfrm>
+            <a:off x="5943600" y="2670048"/>
+            <a:ext cx="5029200" cy="365760"/>
+          </a:xfrm>
+          <a:prstGeom prst="rect">
+            <a:avLst/>
+          </a:prstGeom>
+          <a:noFill/>
+        </p:spPr>
+        <p:txBody>
+          <a:bodyPr wrap="none">
+            <a:spAutoFit/>
+          </a:bodyPr>
+          <a:lstStyle/>
+          <a:p>
+            <a:pPr algn="l">
+              <a:defRPr sz="2000" b="0">
+                <a:solidFill>
+                  <a:srgbClr val="222222"/>
+                </a:solidFill>
+                <a:latin typeface="Arial"/>
+              </a:defRPr>
+            </a:pPr>
+            <a:r>
+              <a:t>Bis später!</a:t>
+            </a:r>
+          </a:p>
+        </p:txBody>
+      </p:sp>
+      <p:sp>
+        <p:nvSpPr>
+          <p:cNvPr id="16" name="TextBox 15"/>
+          <p:cNvSpPr txBox="1"/>
+          <p:nvPr/>
+        </p:nvSpPr>
+        <p:spPr>
+          <a:xfrm>
+            <a:off x="640080" y="3264408"/>
+            <a:ext cx="5029200" cy="365760"/>
+          </a:xfrm>
+          <a:prstGeom prst="rect">
+            <a:avLst/>
+          </a:prstGeom>
+          <a:noFill/>
+        </p:spPr>
+        <p:txBody>
+          <a:bodyPr wrap="none">
+            <a:spAutoFit/>
+          </a:bodyPr>
+          <a:lstStyle/>
+          <a:p>
+            <a:pPr algn="l">
+              <a:defRPr sz="2000" b="1">
+                <a:solidFill>
+                  <a:srgbClr val="C41E3A"/>
+                </a:solidFill>
+                <a:latin typeface="Arial"/>
+              </a:defRPr>
+            </a:pPr>
+            <a:r>
+              <a:t>¡Hasta mañana!</a:t>
+            </a:r>
+          </a:p>
+        </p:txBody>
+      </p:sp>
+      <p:sp>
+        <p:nvSpPr>
+          <p:cNvPr id="17" name="TextBox 16"/>
+          <p:cNvSpPr txBox="1"/>
+          <p:nvPr/>
+        </p:nvSpPr>
+        <p:spPr>
+          <a:xfrm>
+            <a:off x="5943600" y="3264408"/>
+            <a:ext cx="5029200" cy="365760"/>
+          </a:xfrm>
+          <a:prstGeom prst="rect">
+            <a:avLst/>
+          </a:prstGeom>
+          <a:noFill/>
+        </p:spPr>
+        <p:txBody>
+          <a:bodyPr wrap="none">
+            <a:spAutoFit/>
+          </a:bodyPr>
+          <a:lstStyle/>
+          <a:p>
+            <a:pPr algn="l">
+              <a:defRPr sz="2000" b="0">
+                <a:solidFill>
+                  <a:srgbClr val="222222"/>
+                </a:solidFill>
+                <a:latin typeface="Arial"/>
+              </a:defRPr>
+            </a:pPr>
+            <a:r>
+              <a:t>Bis morgen!</a:t>
+            </a:r>
+          </a:p>
+        </p:txBody>
+      </p:sp>
+      <p:sp>
+        <p:nvSpPr>
+          <p:cNvPr id="18" name="Rectangle 17"/>
+          <p:cNvSpPr/>
+          <p:nvPr/>
+        </p:nvSpPr>
+        <p:spPr>
+          <a:xfrm>
+            <a:off x="457200" y="3749039"/>
+            <a:ext cx="11274552" cy="594360"/>
+          </a:xfrm>
+          <a:prstGeom prst="rect">
+            <a:avLst/>
+          </a:prstGeom>
+          <a:solidFill>
+            <a:srgbClr val="F5F5F5"/>
+          </a:solidFill>
+          <a:ln>
+            <a:noFill/>
+          </a:ln>
+        </p:spPr>
+        <p:style>
+          <a:lnRef idx="1">
+            <a:schemeClr val="accent1"/>
+          </a:lnRef>
+          <a:fillRef idx="3">
+            <a:schemeClr val="accent1"/>
+          </a:fillRef>
+          <a:effectRef idx="2">
+            <a:schemeClr val="accent1"/>
+          </a:effectRef>
+          <a:fontRef idx="minor">
+            <a:schemeClr val="lt1"/>
+          </a:fontRef>
+        </p:style>
+        <p:txBody>
+          <a:bodyPr rtlCol="0" anchor="ctr"/>
+          <a:lstStyle/>
+          <a:p>
+            <a:pPr algn="ctr"/>
+          </a:p>
+        </p:txBody>
+      </p:sp>
+      <p:sp>
+        <p:nvSpPr>
+          <p:cNvPr id="19" name="TextBox 18"/>
+          <p:cNvSpPr txBox="1"/>
+          <p:nvPr/>
+        </p:nvSpPr>
+        <p:spPr>
+          <a:xfrm>
+            <a:off x="640080" y="3858768"/>
+            <a:ext cx="5029200" cy="365760"/>
+          </a:xfrm>
+          <a:prstGeom prst="rect">
+            <a:avLst/>
+          </a:prstGeom>
+          <a:noFill/>
+        </p:spPr>
+        <p:txBody>
+          <a:bodyPr wrap="none">
+            <a:spAutoFit/>
+          </a:bodyPr>
+          <a:lstStyle/>
+          <a:p>
+            <a:pPr algn="l">
+              <a:defRPr sz="2000" b="1">
+                <a:solidFill>
+                  <a:srgbClr val="C41E3A"/>
+                </a:solidFill>
+                <a:latin typeface="Arial"/>
+              </a:defRPr>
+            </a:pPr>
+            <a:r>
+              <a:t>¡Hasta pronto!</a:t>
+            </a:r>
+          </a:p>
+        </p:txBody>
+      </p:sp>
+      <p:sp>
+        <p:nvSpPr>
+          <p:cNvPr id="20" name="TextBox 19"/>
+          <p:cNvSpPr txBox="1"/>
+          <p:nvPr/>
+        </p:nvSpPr>
+        <p:spPr>
+          <a:xfrm>
+            <a:off x="5943600" y="3858768"/>
+            <a:ext cx="5029200" cy="365760"/>
+          </a:xfrm>
+          <a:prstGeom prst="rect">
+            <a:avLst/>
+          </a:prstGeom>
+          <a:noFill/>
+        </p:spPr>
+        <p:txBody>
+          <a:bodyPr wrap="none">
+            <a:spAutoFit/>
+          </a:bodyPr>
+          <a:lstStyle/>
+          <a:p>
+            <a:pPr algn="l">
+              <a:defRPr sz="2000" b="0">
+                <a:solidFill>
+                  <a:srgbClr val="222222"/>
+                </a:solidFill>
+                <a:latin typeface="Arial"/>
+              </a:defRPr>
+            </a:pPr>
+            <a:r>
+              <a:t>Bis bald!</a:t>
+            </a:r>
+          </a:p>
+        </p:txBody>
+      </p:sp>
+      <p:sp>
+        <p:nvSpPr>
+          <p:cNvPr id="21" name="Rectangle 20"/>
+          <p:cNvSpPr/>
+          <p:nvPr/>
+        </p:nvSpPr>
+        <p:spPr>
+          <a:xfrm>
+            <a:off x="457200" y="5943600"/>
+            <a:ext cx="11274552" cy="548640"/>
+          </a:xfrm>
+          <a:prstGeom prst="rect">
+            <a:avLst/>
+          </a:prstGeom>
+          <a:solidFill>
+            <a:srgbClr val="FDF2F4"/>
+          </a:solidFill>
+          <a:ln>
+            <a:solidFill>
+              <a:srgbClr val="C41E3A"/>
+            </a:solidFill>
+          </a:ln>
+        </p:spPr>
+        <p:style>
+          <a:lnRef idx="1">
+            <a:schemeClr val="accent1"/>
+          </a:lnRef>
+          <a:fillRef idx="3">
+            <a:schemeClr val="accent1"/>
+          </a:fillRef>
+          <a:effectRef idx="2">
+            <a:schemeClr val="accent1"/>
+          </a:effectRef>
+          <a:fontRef idx="minor">
+            <a:schemeClr val="lt1"/>
+          </a:fontRef>
+        </p:style>
+        <p:txBody>
+          <a:bodyPr rtlCol="0" anchor="ctr"/>
+          <a:lstStyle/>
+          <a:p>
+            <a:pPr algn="ctr"/>
+          </a:p>
+        </p:txBody>
+      </p:sp>
+      <p:sp>
+        <p:nvSpPr>
+          <p:cNvPr id="22" name="TextBox 21"/>
+          <p:cNvSpPr txBox="1"/>
+          <p:nvPr/>
+        </p:nvSpPr>
+        <p:spPr>
+          <a:xfrm>
+            <a:off x="640080" y="6053328"/>
+            <a:ext cx="10972800" cy="365760"/>
+          </a:xfrm>
+          <a:prstGeom prst="rect">
+            <a:avLst/>
+          </a:prstGeom>
+          <a:noFill/>
+        </p:spPr>
+        <p:txBody>
+          <a:bodyPr wrap="none">
+            <a:spAutoFit/>
+          </a:bodyPr>
+          <a:lstStyle/>
+          <a:p>
+            <a:pPr algn="l">
               <a:defRPr sz="1400" b="1">
                 <a:solidFill>
-                  <a:srgbClr val="FFFFFF"/>
-                </a:solidFill>
-                <a:latin typeface="Arial"/>
-              </a:defRPr>
-            </a:pPr>
-            <a:r>
-              <a:t>LÖSUNG</a:t>
-            </a:r>
-          </a:p>
-        </p:txBody>
-      </p:sp>
-      <p:sp>
-        <p:nvSpPr>
-          <p:cNvPr id="9" name="TextBox 8"/>
-          <p:cNvSpPr txBox="1"/>
-          <p:nvPr/>
-        </p:nvSpPr>
-        <p:spPr>
-          <a:xfrm>
-            <a:off x="457200" y="1280160"/>
-            <a:ext cx="11274552" cy="731520"/>
-          </a:xfrm>
-          <a:prstGeom prst="rect">
-            <a:avLst/>
-          </a:prstGeom>
-          <a:noFill/>
-        </p:spPr>
-        <p:txBody>
-          <a:bodyPr wrap="none">
-            <a:spAutoFit/>
-          </a:bodyPr>
-          <a:lstStyle/>
-          <a:p>
-            <a:pPr algn="l">
-              <a:defRPr sz="3200" b="1">
-                <a:solidFill>
                   <a:srgbClr val="C41E3A"/>
                 </a:solidFill>
                 <a:latin typeface="Arial"/>
               </a:defRPr>
             </a:pPr>
             <a:r>
-              <a:t>✅ Lösung</a:t>
-            </a:r>
-          </a:p>
-        </p:txBody>
-      </p:sp>
-      <p:sp>
-        <p:nvSpPr>
-          <p:cNvPr id="10" name="TextBox 9"/>
-          <p:cNvSpPr txBox="1"/>
-          <p:nvPr/>
-        </p:nvSpPr>
-        <p:spPr>
-          <a:xfrm>
-            <a:off x="640080" y="2011680"/>
-            <a:ext cx="5029200" cy="548640"/>
-          </a:xfrm>
-          <a:prstGeom prst="rect">
-            <a:avLst/>
-          </a:prstGeom>
-          <a:noFill/>
-        </p:spPr>
-        <p:txBody>
-          <a:bodyPr wrap="none">
-            <a:spAutoFit/>
-          </a:bodyPr>
-          <a:lstStyle/>
-          <a:p>
-            <a:pPr algn="l">
-              <a:defRPr sz="2400" b="1">
-                <a:solidFill>
-                  <a:srgbClr val="C41E3A"/>
-                </a:solidFill>
-                <a:latin typeface="Arial"/>
-              </a:defRPr>
-            </a:pPr>
-            <a:r>
-              <a:t>¡Hola!</a:t>
-            </a:r>
-          </a:p>
-        </p:txBody>
-      </p:sp>
-      <p:sp>
-        <p:nvSpPr>
-          <p:cNvPr id="11" name="TextBox 10"/>
-          <p:cNvSpPr txBox="1"/>
-          <p:nvPr/>
-        </p:nvSpPr>
-        <p:spPr>
-          <a:xfrm>
-            <a:off x="5943600" y="2011680"/>
-            <a:ext cx="5029200" cy="548640"/>
-          </a:xfrm>
-          <a:prstGeom prst="rect">
-            <a:avLst/>
-          </a:prstGeom>
-          <a:noFill/>
-        </p:spPr>
-        <p:txBody>
-          <a:bodyPr wrap="none">
-            <a:spAutoFit/>
-          </a:bodyPr>
-          <a:lstStyle/>
-          <a:p>
-            <a:pPr algn="l">
-              <a:defRPr sz="2400" b="1">
-                <a:solidFill>
-                  <a:srgbClr val="2A7A4B"/>
-                </a:solidFill>
-                <a:latin typeface="Arial"/>
-              </a:defRPr>
-            </a:pPr>
-            <a:r>
-              <a:t>Hallo!</a:t>
-            </a:r>
-          </a:p>
-        </p:txBody>
-      </p:sp>
-      <p:sp>
-        <p:nvSpPr>
-          <p:cNvPr id="12" name="TextBox 11"/>
-          <p:cNvSpPr txBox="1"/>
-          <p:nvPr/>
-        </p:nvSpPr>
-        <p:spPr>
-          <a:xfrm>
-            <a:off x="640080" y="3108960"/>
-            <a:ext cx="5029200" cy="548640"/>
-          </a:xfrm>
-          <a:prstGeom prst="rect">
-            <a:avLst/>
-          </a:prstGeom>
-          <a:noFill/>
-        </p:spPr>
-        <p:txBody>
-          <a:bodyPr wrap="none">
-            <a:spAutoFit/>
-          </a:bodyPr>
-          <a:lstStyle/>
-          <a:p>
-            <a:pPr algn="l">
-              <a:defRPr sz="2400" b="1">
-                <a:solidFill>
-                  <a:srgbClr val="C41E3A"/>
-                </a:solidFill>
-                <a:latin typeface="Arial"/>
-              </a:defRPr>
-            </a:pPr>
-            <a:r>
-              <a:t>Buenos días</a:t>
-            </a:r>
-          </a:p>
-        </p:txBody>
-      </p:sp>
-      <p:sp>
-        <p:nvSpPr>
-          <p:cNvPr id="13" name="TextBox 12"/>
-          <p:cNvSpPr txBox="1"/>
-          <p:nvPr/>
-        </p:nvSpPr>
-        <p:spPr>
-          <a:xfrm>
-            <a:off x="5943600" y="3108960"/>
-            <a:ext cx="5029200" cy="548640"/>
-          </a:xfrm>
-          <a:prstGeom prst="rect">
-            <a:avLst/>
-          </a:prstGeom>
-          <a:noFill/>
-        </p:spPr>
-        <p:txBody>
-          <a:bodyPr wrap="none">
-            <a:spAutoFit/>
-          </a:bodyPr>
-          <a:lstStyle/>
-          <a:p>
-            <a:pPr algn="l">
-              <a:defRPr sz="2400" b="1">
-                <a:solidFill>
-                  <a:srgbClr val="2A7A4B"/>
-                </a:solidFill>
-                <a:latin typeface="Arial"/>
-              </a:defRPr>
-            </a:pPr>
-            <a:r>
-              <a:t>Guten Morgen</a:t>
-            </a:r>
-          </a:p>
-        </p:txBody>
-      </p:sp>
-      <p:sp>
-        <p:nvSpPr>
-          <p:cNvPr id="14" name="TextBox 13"/>
-          <p:cNvSpPr txBox="1"/>
-          <p:nvPr/>
-        </p:nvSpPr>
-        <p:spPr>
-          <a:xfrm>
-            <a:off x="640080" y="4206240"/>
-            <a:ext cx="5029200" cy="548640"/>
-          </a:xfrm>
-          <a:prstGeom prst="rect">
-            <a:avLst/>
-          </a:prstGeom>
-          <a:noFill/>
-        </p:spPr>
-        <p:txBody>
-          <a:bodyPr wrap="none">
-            <a:spAutoFit/>
-          </a:bodyPr>
-          <a:lstStyle/>
-          <a:p>
-            <a:pPr algn="l">
-              <a:defRPr sz="2400" b="1">
-                <a:solidFill>
-                  <a:srgbClr val="C41E3A"/>
-                </a:solidFill>
-                <a:latin typeface="Arial"/>
-              </a:defRPr>
-            </a:pPr>
-            <a:r>
-              <a:t>¡Hasta mañana!</a:t>
-            </a:r>
-          </a:p>
-        </p:txBody>
-      </p:sp>
-      <p:sp>
-        <p:nvSpPr>
-          <p:cNvPr id="15" name="TextBox 14"/>
-          <p:cNvSpPr txBox="1"/>
-          <p:nvPr/>
-        </p:nvSpPr>
-        <p:spPr>
-          <a:xfrm>
-            <a:off x="5943600" y="4206240"/>
-            <a:ext cx="5029200" cy="548640"/>
-          </a:xfrm>
-          <a:prstGeom prst="rect">
-            <a:avLst/>
-          </a:prstGeom>
-          <a:noFill/>
-        </p:spPr>
-        <p:txBody>
-          <a:bodyPr wrap="none">
-            <a:spAutoFit/>
-          </a:bodyPr>
-          <a:lstStyle/>
-          <a:p>
-            <a:pPr algn="l">
-              <a:defRPr sz="2400" b="1">
-                <a:solidFill>
-                  <a:srgbClr val="2A7A4B"/>
-                </a:solidFill>
-                <a:latin typeface="Arial"/>
-              </a:defRPr>
-            </a:pPr>
-            <a:r>
-              <a:t>Bis morgen!</a:t>
+              <a:t>📝 AB-01a: Kasten 2</a:t>
             </a:r>
           </a:p>
         </p:txBody>
@@ -7058,14 +10280,365 @@
       </p:sp>
       <p:sp>
         <p:nvSpPr>
-          <p:cNvPr id="7" name="Rectangle 6"/>
+          <p:cNvPr id="7" name="TextBox 6"/>
+          <p:cNvSpPr txBox="1"/>
+          <p:nvPr/>
+        </p:nvSpPr>
+        <p:spPr>
+          <a:xfrm>
+            <a:off x="457200" y="640080"/>
+            <a:ext cx="11274552" cy="731520"/>
+          </a:xfrm>
+          <a:prstGeom prst="rect">
+            <a:avLst/>
+          </a:prstGeom>
+          <a:noFill/>
+        </p:spPr>
+        <p:txBody>
+          <a:bodyPr wrap="none">
+            <a:spAutoFit/>
+          </a:bodyPr>
+          <a:lstStyle/>
+          <a:p>
+            <a:pPr algn="l">
+              <a:defRPr sz="3200" b="1">
+                <a:solidFill>
+                  <a:srgbClr val="C41E3A"/>
+                </a:solidFill>
+                <a:latin typeface="Arial"/>
+              </a:defRPr>
+            </a:pPr>
+            <a:r>
+              <a:t>📝 Grammatik: Genus</a:t>
+            </a:r>
+          </a:p>
+        </p:txBody>
+      </p:sp>
+      <p:sp>
+        <p:nvSpPr>
+          <p:cNvPr id="8" name="TextBox 7"/>
+          <p:cNvSpPr txBox="1"/>
+          <p:nvPr/>
+        </p:nvSpPr>
+        <p:spPr>
+          <a:xfrm>
+            <a:off x="640080" y="1463040"/>
+            <a:ext cx="5029200" cy="731520"/>
+          </a:xfrm>
+          <a:prstGeom prst="rect">
+            <a:avLst/>
+          </a:prstGeom>
+          <a:noFill/>
+        </p:spPr>
+        <p:txBody>
+          <a:bodyPr wrap="none">
+            <a:spAutoFit/>
+          </a:bodyPr>
+          <a:lstStyle/>
+          <a:p>
+            <a:pPr algn="l">
+              <a:defRPr sz="2800" b="1">
+                <a:solidFill>
+                  <a:srgbClr val="C41E3A"/>
+                </a:solidFill>
+                <a:latin typeface="Arial"/>
+              </a:defRPr>
+            </a:pPr>
+            <a:r>
+              <a:t>Buenos días</a:t>
+            </a:r>
+          </a:p>
+        </p:txBody>
+      </p:sp>
+      <p:sp>
+        <p:nvSpPr>
+          <p:cNvPr id="9" name="TextBox 8"/>
+          <p:cNvSpPr txBox="1"/>
+          <p:nvPr/>
+        </p:nvSpPr>
+        <p:spPr>
+          <a:xfrm>
+            <a:off x="5943600" y="1554480"/>
+            <a:ext cx="5486400" cy="548640"/>
+          </a:xfrm>
+          <a:prstGeom prst="rect">
+            <a:avLst/>
+          </a:prstGeom>
+          <a:noFill/>
+        </p:spPr>
+        <p:txBody>
+          <a:bodyPr wrap="none">
+            <a:spAutoFit/>
+          </a:bodyPr>
+          <a:lstStyle/>
+          <a:p>
+            <a:pPr algn="l">
+              <a:defRPr sz="1800" b="0">
+                <a:solidFill>
+                  <a:srgbClr val="555555"/>
+                </a:solidFill>
+                <a:latin typeface="Arial"/>
+              </a:defRPr>
+            </a:pPr>
+            <a:r>
+              <a:t>← maskulin Plural</a:t>
+            </a:r>
+          </a:p>
+        </p:txBody>
+      </p:sp>
+      <p:sp>
+        <p:nvSpPr>
+          <p:cNvPr id="10" name="TextBox 9"/>
+          <p:cNvSpPr txBox="1"/>
+          <p:nvPr/>
+        </p:nvSpPr>
+        <p:spPr>
+          <a:xfrm>
+            <a:off x="640080" y="2560320"/>
+            <a:ext cx="5029200" cy="731520"/>
+          </a:xfrm>
+          <a:prstGeom prst="rect">
+            <a:avLst/>
+          </a:prstGeom>
+          <a:noFill/>
+        </p:spPr>
+        <p:txBody>
+          <a:bodyPr wrap="none">
+            <a:spAutoFit/>
+          </a:bodyPr>
+          <a:lstStyle/>
+          <a:p>
+            <a:pPr algn="l">
+              <a:defRPr sz="2800" b="1">
+                <a:solidFill>
+                  <a:srgbClr val="C41E3A"/>
+                </a:solidFill>
+                <a:latin typeface="Arial"/>
+              </a:defRPr>
+            </a:pPr>
+            <a:r>
+              <a:t>Buenas tardes</a:t>
+            </a:r>
+          </a:p>
+        </p:txBody>
+      </p:sp>
+      <p:sp>
+        <p:nvSpPr>
+          <p:cNvPr id="11" name="TextBox 10"/>
+          <p:cNvSpPr txBox="1"/>
+          <p:nvPr/>
+        </p:nvSpPr>
+        <p:spPr>
+          <a:xfrm>
+            <a:off x="5943600" y="2651760"/>
+            <a:ext cx="5486400" cy="548640"/>
+          </a:xfrm>
+          <a:prstGeom prst="rect">
+            <a:avLst/>
+          </a:prstGeom>
+          <a:noFill/>
+        </p:spPr>
+        <p:txBody>
+          <a:bodyPr wrap="none">
+            <a:spAutoFit/>
+          </a:bodyPr>
+          <a:lstStyle/>
+          <a:p>
+            <a:pPr algn="l">
+              <a:defRPr sz="1800" b="0">
+                <a:solidFill>
+                  <a:srgbClr val="555555"/>
+                </a:solidFill>
+                <a:latin typeface="Arial"/>
+              </a:defRPr>
+            </a:pPr>
+            <a:r>
+              <a:t>← feminin Plural</a:t>
+            </a:r>
+          </a:p>
+        </p:txBody>
+      </p:sp>
+      <p:sp>
+        <p:nvSpPr>
+          <p:cNvPr id="12" name="TextBox 11"/>
+          <p:cNvSpPr txBox="1"/>
+          <p:nvPr/>
+        </p:nvSpPr>
+        <p:spPr>
+          <a:xfrm>
+            <a:off x="640080" y="3657600"/>
+            <a:ext cx="5029200" cy="731520"/>
+          </a:xfrm>
+          <a:prstGeom prst="rect">
+            <a:avLst/>
+          </a:prstGeom>
+          <a:noFill/>
+        </p:spPr>
+        <p:txBody>
+          <a:bodyPr wrap="none">
+            <a:spAutoFit/>
+          </a:bodyPr>
+          <a:lstStyle/>
+          <a:p>
+            <a:pPr algn="l">
+              <a:defRPr sz="2800" b="1">
+                <a:solidFill>
+                  <a:srgbClr val="C41E3A"/>
+                </a:solidFill>
+                <a:latin typeface="Arial"/>
+              </a:defRPr>
+            </a:pPr>
+            <a:r>
+              <a:t>Buenas noches</a:t>
+            </a:r>
+          </a:p>
+        </p:txBody>
+      </p:sp>
+      <p:sp>
+        <p:nvSpPr>
+          <p:cNvPr id="13" name="TextBox 12"/>
+          <p:cNvSpPr txBox="1"/>
+          <p:nvPr/>
+        </p:nvSpPr>
+        <p:spPr>
+          <a:xfrm>
+            <a:off x="5943600" y="3749039"/>
+            <a:ext cx="5486400" cy="548640"/>
+          </a:xfrm>
+          <a:prstGeom prst="rect">
+            <a:avLst/>
+          </a:prstGeom>
+          <a:noFill/>
+        </p:spPr>
+        <p:txBody>
+          <a:bodyPr wrap="none">
+            <a:spAutoFit/>
+          </a:bodyPr>
+          <a:lstStyle/>
+          <a:p>
+            <a:pPr algn="l">
+              <a:defRPr sz="1800" b="0">
+                <a:solidFill>
+                  <a:srgbClr val="555555"/>
+                </a:solidFill>
+                <a:latin typeface="Arial"/>
+              </a:defRPr>
+            </a:pPr>
+            <a:r>
+              <a:t>← feminin Plural</a:t>
+            </a:r>
+          </a:p>
+        </p:txBody>
+      </p:sp>
+      <p:sp>
+        <p:nvSpPr>
+          <p:cNvPr id="14" name="Rectangle 13"/>
           <p:cNvSpPr/>
           <p:nvPr/>
         </p:nvSpPr>
         <p:spPr>
           <a:xfrm>
-            <a:off x="457200" y="640080"/>
-            <a:ext cx="1828800" cy="457200"/>
+            <a:off x="457200" y="5029200"/>
+            <a:ext cx="11274552" cy="1097280"/>
+          </a:xfrm>
+          <a:prstGeom prst="rect">
+            <a:avLst/>
+          </a:prstGeom>
+          <a:solidFill>
+            <a:srgbClr val="FFF8F0"/>
+          </a:solidFill>
+          <a:ln>
+            <a:solidFill>
+              <a:srgbClr val="B35C00"/>
+            </a:solidFill>
+          </a:ln>
+        </p:spPr>
+        <p:style>
+          <a:lnRef idx="1">
+            <a:schemeClr val="accent1"/>
+          </a:lnRef>
+          <a:fillRef idx="3">
+            <a:schemeClr val="accent1"/>
+          </a:fillRef>
+          <a:effectRef idx="2">
+            <a:schemeClr val="accent1"/>
+          </a:effectRef>
+          <a:fontRef idx="minor">
+            <a:schemeClr val="lt1"/>
+          </a:fontRef>
+        </p:style>
+        <p:txBody>
+          <a:bodyPr rtlCol="0" anchor="ctr"/>
+          <a:lstStyle/>
+          <a:p>
+            <a:pPr algn="ctr"/>
+          </a:p>
+        </p:txBody>
+      </p:sp>
+      <p:sp>
+        <p:nvSpPr>
+          <p:cNvPr id="15" name="TextBox 14"/>
+          <p:cNvSpPr txBox="1"/>
+          <p:nvPr/>
+        </p:nvSpPr>
+        <p:spPr>
+          <a:xfrm>
+            <a:off x="640080" y="5212080"/>
+            <a:ext cx="10972800" cy="731520"/>
+          </a:xfrm>
+          <a:prstGeom prst="rect">
+            <a:avLst/>
+          </a:prstGeom>
+          <a:noFill/>
+        </p:spPr>
+        <p:txBody>
+          <a:bodyPr wrap="none">
+            <a:spAutoFit/>
+          </a:bodyPr>
+          <a:lstStyle/>
+          <a:p>
+            <a:pPr algn="l">
+              <a:defRPr sz="1600" b="0">
+                <a:solidFill>
+                  <a:srgbClr val="222222"/>
+                </a:solidFill>
+                <a:latin typeface="Arial"/>
+              </a:defRPr>
+            </a:pPr>
+            <a:r>
+              <a:t>💡 día ist maskulin, tarde/noche feminin</a:t>
+            </a:r>
+          </a:p>
+        </p:txBody>
+      </p:sp>
+    </p:spTree>
+  </p:cSld>
+  <p:clrMapOvr>
+    <a:masterClrMapping/>
+  </p:clrMapOvr>
+</p:sld>
+</file>
+
+<file path=ppt/slides/slide9.xml><?xml version="1.0" encoding="utf-8"?>
+<p:sld xmlns:a="http://schemas.openxmlformats.org/drawingml/2006/main" xmlns:p="http://schemas.openxmlformats.org/presentationml/2006/main" xmlns:r="http://schemas.openxmlformats.org/officeDocument/2006/relationships">
+  <p:cSld>
+    <p:spTree>
+      <p:nvGrpSpPr>
+        <p:cNvPr id="1" name=""/>
+        <p:cNvGrpSpPr/>
+        <p:nvPr/>
+      </p:nvGrpSpPr>
+      <p:grpSpPr/>
+      <p:sp>
+        <p:nvSpPr>
+          <p:cNvPr id="2" name="Rectangle 1"/>
+          <p:cNvSpPr/>
+          <p:nvPr/>
+        </p:nvSpPr>
+        <p:spPr>
+          <a:xfrm>
+            <a:off x="0" y="0"/>
+            <a:ext cx="12191695" cy="457200"/>
           </a:xfrm>
           <a:prstGeom prst="rect">
             <a:avLst/>
@@ -7101,36 +10674,223 @@
       </p:sp>
       <p:sp>
         <p:nvSpPr>
+          <p:cNvPr id="3" name="TextBox 2"/>
+          <p:cNvSpPr txBox="1"/>
+          <p:nvPr/>
+        </p:nvSpPr>
+        <p:spPr>
+          <a:xfrm>
+            <a:off x="274320" y="91440"/>
+            <a:ext cx="3657600" cy="274320"/>
+          </a:xfrm>
+          <a:prstGeom prst="rect">
+            <a:avLst/>
+          </a:prstGeom>
+          <a:noFill/>
+        </p:spPr>
+        <p:txBody>
+          <a:bodyPr wrap="none">
+            <a:spAutoFit/>
+          </a:bodyPr>
+          <a:lstStyle/>
+          <a:p>
+            <a:pPr algn="l">
+              <a:defRPr sz="1400" b="1">
+                <a:solidFill>
+                  <a:srgbClr val="FFFFFF"/>
+                </a:solidFill>
+                <a:latin typeface="Arial"/>
+              </a:defRPr>
+            </a:pPr>
+            <a:r>
+              <a:t>Spanisch Klasse 7 · LP-01a</a:t>
+            </a:r>
+          </a:p>
+        </p:txBody>
+      </p:sp>
+      <p:sp>
+        <p:nvSpPr>
+          <p:cNvPr id="4" name="Rectangle 3"/>
+          <p:cNvSpPr/>
+          <p:nvPr/>
+        </p:nvSpPr>
+        <p:spPr>
+          <a:xfrm>
+            <a:off x="0" y="6583680"/>
+            <a:ext cx="12191695" cy="274320"/>
+          </a:xfrm>
+          <a:prstGeom prst="rect">
+            <a:avLst/>
+          </a:prstGeom>
+          <a:solidFill>
+            <a:srgbClr val="F5F5F5"/>
+          </a:solidFill>
+          <a:ln>
+            <a:noFill/>
+          </a:ln>
+        </p:spPr>
+        <p:style>
+          <a:lnRef idx="1">
+            <a:schemeClr val="accent1"/>
+          </a:lnRef>
+          <a:fillRef idx="3">
+            <a:schemeClr val="accent1"/>
+          </a:fillRef>
+          <a:effectRef idx="2">
+            <a:schemeClr val="accent1"/>
+          </a:effectRef>
+          <a:fontRef idx="minor">
+            <a:schemeClr val="lt1"/>
+          </a:fontRef>
+        </p:style>
+        <p:txBody>
+          <a:bodyPr rtlCol="0" anchor="ctr"/>
+          <a:lstStyle/>
+          <a:p>
+            <a:pPr algn="ctr"/>
+          </a:p>
+        </p:txBody>
+      </p:sp>
+      <p:sp>
+        <p:nvSpPr>
+          <p:cNvPr id="5" name="TextBox 4"/>
+          <p:cNvSpPr txBox="1"/>
+          <p:nvPr/>
+        </p:nvSpPr>
+        <p:spPr>
+          <a:xfrm>
+            <a:off x="274320" y="6601968"/>
+            <a:ext cx="4572000" cy="228600"/>
+          </a:xfrm>
+          <a:prstGeom prst="rect">
+            <a:avLst/>
+          </a:prstGeom>
+          <a:noFill/>
+        </p:spPr>
+        <p:txBody>
+          <a:bodyPr wrap="none">
+            <a:spAutoFit/>
+          </a:bodyPr>
+          <a:lstStyle/>
+          <a:p>
+            <a:pPr algn="l">
+              <a:defRPr sz="1000" b="0">
+                <a:solidFill>
+                  <a:srgbClr val="555555"/>
+                </a:solidFill>
+                <a:latin typeface="Arial"/>
+              </a:defRPr>
+            </a:pPr>
+            <a:r>
+              <a:t>¡Hola!</a:t>
+            </a:r>
+          </a:p>
+        </p:txBody>
+      </p:sp>
+      <p:sp>
+        <p:nvSpPr>
+          <p:cNvPr id="6" name="TextBox 5"/>
+          <p:cNvSpPr txBox="1"/>
+          <p:nvPr/>
+        </p:nvSpPr>
+        <p:spPr>
+          <a:xfrm>
+            <a:off x="9144000" y="6601968"/>
+            <a:ext cx="2743200" cy="228600"/>
+          </a:xfrm>
+          <a:prstGeom prst="rect">
+            <a:avLst/>
+          </a:prstGeom>
+          <a:noFill/>
+        </p:spPr>
+        <p:txBody>
+          <a:bodyPr wrap="none">
+            <a:spAutoFit/>
+          </a:bodyPr>
+          <a:lstStyle/>
+          <a:p>
+            <a:pPr algn="r">
+              <a:defRPr sz="1000" b="0">
+                <a:solidFill>
+                  <a:srgbClr val="555555"/>
+                </a:solidFill>
+                <a:latin typeface="Arial"/>
+              </a:defRPr>
+            </a:pPr>
+            <a:r>
+              <a:t>Sequenz 1</a:t>
+            </a:r>
+          </a:p>
+        </p:txBody>
+      </p:sp>
+      <p:sp>
+        <p:nvSpPr>
+          <p:cNvPr id="7" name="TextBox 6"/>
+          <p:cNvSpPr txBox="1"/>
+          <p:nvPr/>
+        </p:nvSpPr>
+        <p:spPr>
+          <a:xfrm>
+            <a:off x="457200" y="640080"/>
+            <a:ext cx="11274552" cy="731520"/>
+          </a:xfrm>
+          <a:prstGeom prst="rect">
+            <a:avLst/>
+          </a:prstGeom>
+          <a:noFill/>
+        </p:spPr>
+        <p:txBody>
+          <a:bodyPr wrap="none">
+            <a:spAutoFit/>
+          </a:bodyPr>
+          <a:lstStyle/>
+          <a:p>
+            <a:pPr algn="l">
+              <a:defRPr sz="3200" b="1">
+                <a:solidFill>
+                  <a:srgbClr val="C41E3A"/>
+                </a:solidFill>
+                <a:latin typeface="Arial"/>
+              </a:defRPr>
+            </a:pPr>
+            <a:r>
+              <a:t>📝 Sonderzeichen</a:t>
+            </a:r>
+          </a:p>
+        </p:txBody>
+      </p:sp>
+      <p:sp>
+        <p:nvSpPr>
           <p:cNvPr id="8" name="TextBox 7"/>
           <p:cNvSpPr txBox="1"/>
           <p:nvPr/>
         </p:nvSpPr>
         <p:spPr>
           <a:xfrm>
-            <a:off x="548640" y="713231"/>
-            <a:ext cx="1645920" cy="320040"/>
-          </a:xfrm>
-          <a:prstGeom prst="rect">
-            <a:avLst/>
-          </a:prstGeom>
-          <a:noFill/>
-        </p:spPr>
-        <p:txBody>
-          <a:bodyPr wrap="none">
-            <a:spAutoFit/>
-          </a:bodyPr>
-          <a:lstStyle/>
-          <a:p>
-            <a:pPr algn="ctr">
-              <a:defRPr sz="1400" b="1">
-                <a:solidFill>
-                  <a:srgbClr val="FFFFFF"/>
-                </a:solidFill>
-                <a:latin typeface="Arial"/>
-              </a:defRPr>
-            </a:pPr>
-            <a:r>
-              <a:t>HAUSAUFGABE</a:t>
+            <a:off x="640080" y="1463040"/>
+            <a:ext cx="5029200" cy="731520"/>
+          </a:xfrm>
+          <a:prstGeom prst="rect">
+            <a:avLst/>
+          </a:prstGeom>
+          <a:noFill/>
+        </p:spPr>
+        <p:txBody>
+          <a:bodyPr wrap="none">
+            <a:spAutoFit/>
+          </a:bodyPr>
+          <a:lstStyle/>
+          <a:p>
+            <a:pPr algn="l">
+              <a:defRPr sz="2800" b="1">
+                <a:solidFill>
+                  <a:srgbClr val="C41E3A"/>
+                </a:solidFill>
+                <a:latin typeface="Arial"/>
+              </a:defRPr>
+            </a:pPr>
+            <a:r>
+              <a:t>¡...!</a:t>
             </a:r>
           </a:p>
         </p:txBody>
@@ -7143,22 +10903,58 @@
         </p:nvSpPr>
         <p:spPr>
           <a:xfrm>
-            <a:off x="457200" y="1280160"/>
-            <a:ext cx="11274552" cy="731520"/>
-          </a:xfrm>
-          <a:prstGeom prst="rect">
-            <a:avLst/>
-          </a:prstGeom>
-          <a:noFill/>
-        </p:spPr>
-        <p:txBody>
-          <a:bodyPr wrap="none">
-            <a:spAutoFit/>
-          </a:bodyPr>
-          <a:lstStyle/>
-          <a:p>
-            <a:pPr algn="l">
-              <a:defRPr sz="3200" b="1">
+            <a:off x="5943600" y="1554480"/>
+            <a:ext cx="5486400" cy="548640"/>
+          </a:xfrm>
+          <a:prstGeom prst="rect">
+            <a:avLst/>
+          </a:prstGeom>
+          <a:noFill/>
+        </p:spPr>
+        <p:txBody>
+          <a:bodyPr wrap="none">
+            <a:spAutoFit/>
+          </a:bodyPr>
+          <a:lstStyle/>
+          <a:p>
+            <a:pPr algn="l">
+              <a:defRPr sz="1800" b="0">
+                <a:solidFill>
+                  <a:srgbClr val="555555"/>
+                </a:solidFill>
+                <a:latin typeface="Arial"/>
+              </a:defRPr>
+            </a:pPr>
+            <a:r>
+              <a:t>Ausrufezeichen am Anfang UND Ende</a:t>
+            </a:r>
+          </a:p>
+        </p:txBody>
+      </p:sp>
+      <p:sp>
+        <p:nvSpPr>
+          <p:cNvPr id="10" name="TextBox 9"/>
+          <p:cNvSpPr txBox="1"/>
+          <p:nvPr/>
+        </p:nvSpPr>
+        <p:spPr>
+          <a:xfrm>
+            <a:off x="640080" y="2560320"/>
+            <a:ext cx="5029200" cy="731520"/>
+          </a:xfrm>
+          <a:prstGeom prst="rect">
+            <a:avLst/>
+          </a:prstGeom>
+          <a:noFill/>
+        </p:spPr>
+        <p:txBody>
+          <a:bodyPr wrap="none">
+            <a:spAutoFit/>
+          </a:bodyPr>
+          <a:lstStyle/>
+          <a:p>
+            <a:pPr algn="l">
+              <a:defRPr sz="2800" b="1">
                 <a:solidFill>
                   <a:srgbClr val="C41E3A"/>
                 </a:solidFill>
@@ -7166,43 +10962,7 @@
               </a:defRPr>
             </a:pPr>
             <a:r>
-              <a:t>📚 Para casa</a:t>
-            </a:r>
-          </a:p>
-        </p:txBody>
-      </p:sp>
-      <p:sp>
-        <p:nvSpPr>
-          <p:cNvPr id="10" name="TextBox 9"/>
-          <p:cNvSpPr txBox="1"/>
-          <p:nvPr/>
-        </p:nvSpPr>
-        <p:spPr>
-          <a:xfrm>
-            <a:off x="640080" y="2103120"/>
-            <a:ext cx="457200" cy="457200"/>
-          </a:xfrm>
-          <a:prstGeom prst="rect">
-            <a:avLst/>
-          </a:prstGeom>
-          <a:noFill/>
-        </p:spPr>
-        <p:txBody>
-          <a:bodyPr wrap="none">
-            <a:spAutoFit/>
-          </a:bodyPr>
-          <a:lstStyle/>
-          <a:p>
-            <a:pPr algn="l">
-              <a:defRPr sz="2400" b="1">
-                <a:solidFill>
-                  <a:srgbClr val="2A7A4B"/>
-                </a:solidFill>
-                <a:latin typeface="Arial"/>
-              </a:defRPr>
-            </a:pPr>
-            <a:r>
-              <a:t>✓</a:t>
+              <a:t>¿...?</a:t>
             </a:r>
           </a:p>
         </p:txBody>
@@ -7215,22 +10975,103 @@
         </p:nvSpPr>
         <p:spPr>
           <a:xfrm>
-            <a:off x="1188720" y="2103120"/>
-            <a:ext cx="10058400" cy="457200"/>
-          </a:xfrm>
-          <a:prstGeom prst="rect">
-            <a:avLst/>
-          </a:prstGeom>
-          <a:noFill/>
-        </p:spPr>
-        <p:txBody>
-          <a:bodyPr wrap="none">
-            <a:spAutoFit/>
-          </a:bodyPr>
-          <a:lstStyle/>
-          <a:p>
-            <a:pPr algn="l">
-              <a:defRPr sz="2000" b="0">
+            <a:off x="5943600" y="2651760"/>
+            <a:ext cx="5486400" cy="548640"/>
+          </a:xfrm>
+          <a:prstGeom prst="rect">
+            <a:avLst/>
+          </a:prstGeom>
+          <a:noFill/>
+        </p:spPr>
+        <p:txBody>
+          <a:bodyPr wrap="none">
+            <a:spAutoFit/>
+          </a:bodyPr>
+          <a:lstStyle/>
+          <a:p>
+            <a:pPr algn="l">
+              <a:defRPr sz="1800" b="0">
+                <a:solidFill>
+                  <a:srgbClr val="555555"/>
+                </a:solidFill>
+                <a:latin typeface="Arial"/>
+              </a:defRPr>
+            </a:pPr>
+            <a:r>
+              <a:t>Fragezeichen am Anfang UND Ende</a:t>
+            </a:r>
+          </a:p>
+        </p:txBody>
+      </p:sp>
+      <p:sp>
+        <p:nvSpPr>
+          <p:cNvPr id="12" name="Rectangle 11"/>
+          <p:cNvSpPr/>
+          <p:nvPr/>
+        </p:nvSpPr>
+        <p:spPr>
+          <a:xfrm>
+            <a:off x="457200" y="5029200"/>
+            <a:ext cx="11274552" cy="1097280"/>
+          </a:xfrm>
+          <a:prstGeom prst="rect">
+            <a:avLst/>
+          </a:prstGeom>
+          <a:solidFill>
+            <a:srgbClr val="FFF8F0"/>
+          </a:solidFill>
+          <a:ln>
+            <a:solidFill>
+              <a:srgbClr val="B35C00"/>
+            </a:solidFill>
+          </a:ln>
+        </p:spPr>
+        <p:style>
+          <a:lnRef idx="1">
+            <a:schemeClr val="accent1"/>
+          </a:lnRef>
+          <a:fillRef idx="3">
+            <a:schemeClr val="accent1"/>
+          </a:fillRef>
+          <a:effectRef idx="2">
+            <a:schemeClr val="accent1"/>
+          </a:effectRef>
+          <a:fontRef idx="minor">
+            <a:schemeClr val="lt1"/>
+          </a:fontRef>
+        </p:style>
+        <p:txBody>
+          <a:bodyPr rtlCol="0" anchor="ctr"/>
+          <a:lstStyle/>
+          <a:p>
+            <a:pPr algn="ctr"/>
+          </a:p>
+        </p:txBody>
+      </p:sp>
+      <p:sp>
+        <p:nvSpPr>
+          <p:cNvPr id="13" name="TextBox 12"/>
+          <p:cNvSpPr txBox="1"/>
+          <p:nvPr/>
+        </p:nvSpPr>
+        <p:spPr>
+          <a:xfrm>
+            <a:off x="640080" y="5212080"/>
+            <a:ext cx="10972800" cy="731520"/>
+          </a:xfrm>
+          <a:prstGeom prst="rect">
+            <a:avLst/>
+          </a:prstGeom>
+          <a:noFill/>
+        </p:spPr>
+        <p:txBody>
+          <a:bodyPr wrap="none">
+            <a:spAutoFit/>
+          </a:bodyPr>
+          <a:lstStyle/>
+          <a:p>
+            <a:pPr algn="l">
+              <a:defRPr sz="1600" b="0">
                 <a:solidFill>
                   <a:srgbClr val="222222"/>
                 </a:solidFill>
@@ -7238,115 +11079,7 @@
               </a:defRPr>
             </a:pPr>
             <a:r>
-              <a:t>AB-01a ausfüllen</a:t>
-            </a:r>
-          </a:p>
-        </p:txBody>
-      </p:sp>
-      <p:sp>
-        <p:nvSpPr>
-          <p:cNvPr id="12" name="TextBox 11"/>
-          <p:cNvSpPr txBox="1"/>
-          <p:nvPr/>
-        </p:nvSpPr>
-        <p:spPr>
-          <a:xfrm>
-            <a:off x="640080" y="2926079"/>
-            <a:ext cx="457200" cy="457200"/>
-          </a:xfrm>
-          <a:prstGeom prst="rect">
-            <a:avLst/>
-          </a:prstGeom>
-          <a:noFill/>
-        </p:spPr>
-        <p:txBody>
-          <a:bodyPr wrap="none">
-            <a:spAutoFit/>
-          </a:bodyPr>
-          <a:lstStyle/>
-          <a:p>
-            <a:pPr algn="l">
-              <a:defRPr sz="2400" b="1">
-                <a:solidFill>
-                  <a:srgbClr val="2A7A4B"/>
-                </a:solidFill>
-                <a:latin typeface="Arial"/>
-              </a:defRPr>
-            </a:pPr>
-            <a:r>
-              <a:t>✓</a:t>
-            </a:r>
-          </a:p>
-        </p:txBody>
-      </p:sp>
-      <p:sp>
-        <p:nvSpPr>
-          <p:cNvPr id="13" name="TextBox 12"/>
-          <p:cNvSpPr txBox="1"/>
-          <p:nvPr/>
-        </p:nvSpPr>
-        <p:spPr>
-          <a:xfrm>
-            <a:off x="1188720" y="2926079"/>
-            <a:ext cx="10058400" cy="457200"/>
-          </a:xfrm>
-          <a:prstGeom prst="rect">
-            <a:avLst/>
-          </a:prstGeom>
-          <a:noFill/>
-        </p:spPr>
-        <p:txBody>
-          <a:bodyPr wrap="none">
-            <a:spAutoFit/>
-          </a:bodyPr>
-          <a:lstStyle/>
-          <a:p>
-            <a:pPr algn="l">
-              <a:defRPr sz="2000" b="0">
-                <a:solidFill>
-                  <a:srgbClr val="222222"/>
-                </a:solidFill>
-                <a:latin typeface="Arial"/>
-              </a:defRPr>
-            </a:pPr>
-            <a:r>
-              <a:t>Vokabeln lernen</a:t>
-            </a:r>
-          </a:p>
-        </p:txBody>
-      </p:sp>
-      <p:sp>
-        <p:nvSpPr>
-          <p:cNvPr id="14" name="TextBox 13"/>
-          <p:cNvSpPr txBox="1"/>
-          <p:nvPr/>
-        </p:nvSpPr>
-        <p:spPr>
-          <a:xfrm>
-            <a:off x="457200" y="5760720"/>
-            <a:ext cx="11274552" cy="548640"/>
-          </a:xfrm>
-          <a:prstGeom prst="rect">
-            <a:avLst/>
-          </a:prstGeom>
-          <a:noFill/>
-        </p:spPr>
-        <p:txBody>
-          <a:bodyPr wrap="none">
-            <a:spAutoFit/>
-          </a:bodyPr>
-          <a:lstStyle/>
-          <a:p>
-            <a:pPr algn="ctr">
-              <a:defRPr sz="3200" b="1">
-                <a:solidFill>
-                  <a:srgbClr val="C41E3A"/>
-                </a:solidFill>
-                <a:latin typeface="Arial"/>
-              </a:defRPr>
-            </a:pPr>
-            <a:r>
-              <a:t>¡Hasta luego!</a:t>
+              <a:t>💡 Nur im Spanischen!</a:t>
             </a:r>
           </a:p>
         </p:txBody>
